--- a/public/downloads/praesentation/M14.pptx
+++ b/public/downloads/praesentation/M14.pptx
@@ -21,6 +21,15 @@
     <p:sldId id="269" r:id="rId20"/>
     <p:sldId id="270" r:id="rId21"/>
     <p:sldId id="271" r:id="rId22"/>
+    <p:sldId id="272" r:id="rId23"/>
+    <p:sldId id="273" r:id="rId24"/>
+    <p:sldId id="274" r:id="rId25"/>
+    <p:sldId id="275" r:id="rId26"/>
+    <p:sldId id="276" r:id="rId27"/>
+    <p:sldId id="277" r:id="rId28"/>
+    <p:sldId id="278" r:id="rId29"/>
+    <p:sldId id="279" r:id="rId30"/>
+    <p:sldId id="280" r:id="rId31"/>
   </p:sldIdLst>
   <p:sldSz cx="12188952" cy="6858000" type="screen4x3"/>
   <p:notesSz cx="6858000" cy="9144000"/>
@@ -3162,8 +3171,8 @@
         </p:nvSpPr>
         <p:spPr>
           <a:xfrm>
-            <a:off x="365760" y="365760"/>
-            <a:ext cx="11430000" cy="457200"/>
+            <a:off x="365760" y="320040"/>
+            <a:ext cx="11430000" cy="411480"/>
           </a:xfrm>
           <a:prstGeom prst="rect">
             <a:avLst/>
@@ -3178,13 +3187,13 @@
           <a:p>
             <a:pPr algn="l"/>
             <a:r>
-              <a:rPr sz="1100" b="0">
-                <a:solidFill>
-                  <a:srgbClr val="FFFFFF"/>
-                </a:solidFill>
-                <a:latin typeface="Arial"/>
-              </a:rPr>
-              <a:t>M14  ·  K-04 Vertrieb &amp; Ertragsoptimierung  ·  Sparring  ·  90 Min.</a:t>
+              <a:rPr sz="1100" b="0" i="0">
+                <a:solidFill>
+                  <a:srgbClr val="BBCCEE"/>
+                </a:solidFill>
+                <a:latin typeface="Arial"/>
+              </a:rPr>
+              <a:t>M14  ·  K-04 Vertrieb &amp; Ertragsoptimierung  ·  Zielstufe: Sparring  ·  90 Min.</a:t>
             </a:r>
           </a:p>
         </p:txBody>
@@ -3197,14 +3206,14 @@
         </p:nvSpPr>
         <p:spPr>
           <a:xfrm>
-            <a:off x="365760" y="868680"/>
-            <a:ext cx="7315200" cy="27432"/>
+            <a:off x="365760" y="804672"/>
+            <a:ext cx="8229600" cy="22860"/>
           </a:xfrm>
           <a:prstGeom prst="rect">
             <a:avLst/>
           </a:prstGeom>
           <a:solidFill>
-            <a:srgbClr val="FFFFFF"/>
+            <a:srgbClr val="335CC0"/>
           </a:solidFill>
           <a:ln>
             <a:noFill/>
@@ -3240,8 +3249,8 @@
         </p:nvSpPr>
         <p:spPr>
           <a:xfrm>
-            <a:off x="365760" y="1097280"/>
-            <a:ext cx="11430000" cy="2286000"/>
+            <a:off x="365760" y="1005840"/>
+            <a:ext cx="11430000" cy="2560320"/>
           </a:xfrm>
           <a:prstGeom prst="rect">
             <a:avLst/>
@@ -3256,7 +3265,7 @@
           <a:p>
             <a:pPr algn="l"/>
             <a:r>
-              <a:rPr sz="4000" b="1">
+              <a:rPr sz="4200" b="1" i="0">
                 <a:solidFill>
                   <a:srgbClr val="FFFFFF"/>
                 </a:solidFill>
@@ -3275,8 +3284,8 @@
         </p:nvSpPr>
         <p:spPr>
           <a:xfrm>
-            <a:off x="365760" y="3200400"/>
-            <a:ext cx="9144000" cy="914400"/>
+            <a:off x="365760" y="3383280"/>
+            <a:ext cx="10058400" cy="822960"/>
           </a:xfrm>
           <a:prstGeom prst="rect">
             <a:avLst/>
@@ -3291,7 +3300,7 @@
           <a:p>
             <a:pPr algn="l"/>
             <a:r>
-              <a:rPr sz="2000" b="0">
+              <a:rPr sz="2000" b="0" i="1">
                 <a:solidFill>
                   <a:srgbClr val="CCD6F0"/>
                 </a:solidFill>
@@ -3310,8 +3319,8 @@
         </p:nvSpPr>
         <p:spPr>
           <a:xfrm>
-            <a:off x="365760" y="6217920"/>
-            <a:ext cx="11430000" cy="457200"/>
+            <a:off x="365760" y="6309360"/>
+            <a:ext cx="11430000" cy="365760"/>
           </a:xfrm>
           <a:prstGeom prst="rect">
             <a:avLst/>
@@ -3326,9 +3335,9 @@
           <a:p>
             <a:pPr algn="l"/>
             <a:r>
-              <a:rPr sz="1000" b="0">
-                <a:solidFill>
-                  <a:srgbClr val="99AACC"/>
+              <a:rPr sz="900" b="0" i="0">
+                <a:solidFill>
+                  <a:srgbClr val="889ACC"/>
                 </a:solidFill>
                 <a:latin typeface="Arial"/>
               </a:rPr>
@@ -3351,7 +3360,7 @@
     <p:bg>
       <p:bgPr>
         <a:solidFill>
-          <a:srgbClr val="1A1A1A"/>
+          <a:srgbClr val="FFFFFF"/>
         </a:solidFill>
         <a:effectLst/>
       </p:bgPr>
@@ -3378,7 +3387,7 @@
             <a:avLst/>
           </a:prstGeom>
           <a:solidFill>
-            <a:srgbClr val="E05B00"/>
+            <a:srgbClr val="003DA5"/>
           </a:solidFill>
           <a:ln>
             <a:noFill/>
@@ -3414,8 +3423,8 @@
         </p:nvSpPr>
         <p:spPr>
           <a:xfrm>
-            <a:off x="365760" y="2286000"/>
-            <a:ext cx="11430000" cy="1828800"/>
+            <a:off x="228600" y="182880"/>
+            <a:ext cx="11430000" cy="320040"/>
           </a:xfrm>
           <a:prstGeom prst="rect">
             <a:avLst/>
@@ -3430,17 +3439,394 @@
           <a:p>
             <a:pPr algn="l"/>
             <a:r>
-              <a:rPr sz="3600" b="1">
-                <a:solidFill>
-                  <a:srgbClr val="FFFFFF"/>
-                </a:solidFill>
-                <a:latin typeface="Arial"/>
-              </a:rPr>
-              <a:t>Signale für Unterpreisierung</a:t>
-            </a:r>
-          </a:p>
-        </p:txBody>
-      </p:sp>
+              <a:rPr sz="900" b="0" i="0">
+                <a:solidFill>
+                  <a:srgbClr val="556575"/>
+                </a:solidFill>
+                <a:latin typeface="Arial"/>
+              </a:rPr>
+              <a:t>M14 · 4.2 Risikogerechtes Pricing</a:t>
+            </a:r>
+          </a:p>
+        </p:txBody>
+      </p:sp>
+      <p:sp>
+        <p:nvSpPr>
+          <p:cNvPr id="4" name="TextBox 3"/>
+          <p:cNvSpPr txBox="1"/>
+          <p:nvPr/>
+        </p:nvSpPr>
+        <p:spPr>
+          <a:xfrm>
+            <a:off x="365760" y="274320"/>
+            <a:ext cx="11430000" cy="777240"/>
+          </a:xfrm>
+          <a:prstGeom prst="rect">
+            <a:avLst/>
+          </a:prstGeom>
+          <a:noFill/>
+        </p:spPr>
+        <p:txBody>
+          <a:bodyPr wrap="square">
+            <a:spAutoFit/>
+          </a:bodyPr>
+          <a:lstStyle/>
+          <a:p>
+            <a:pPr algn="l"/>
+            <a:r>
+              <a:rPr sz="2200" b="1" i="0">
+                <a:solidFill>
+                  <a:srgbClr val="003DA5"/>
+                </a:solidFill>
+                <a:latin typeface="Arial"/>
+              </a:rPr>
+              <a:t>Der Expected Loss als Kalkulationsgrundlage</a:t>
+            </a:r>
+          </a:p>
+        </p:txBody>
+      </p:sp>
+      <p:sp>
+        <p:nvSpPr>
+          <p:cNvPr id="5" name="Rectangle 4"/>
+          <p:cNvSpPr/>
+          <p:nvPr/>
+        </p:nvSpPr>
+        <p:spPr>
+          <a:xfrm>
+            <a:off x="365760" y="1005840"/>
+            <a:ext cx="11430000" cy="27432"/>
+          </a:xfrm>
+          <a:prstGeom prst="rect">
+            <a:avLst/>
+          </a:prstGeom>
+          <a:solidFill>
+            <a:srgbClr val="D1D5DB"/>
+          </a:solidFill>
+          <a:ln>
+            <a:noFill/>
+          </a:ln>
+        </p:spPr>
+        <p:style>
+          <a:lnRef idx="1">
+            <a:schemeClr val="accent1"/>
+          </a:lnRef>
+          <a:fillRef idx="3">
+            <a:schemeClr val="accent1"/>
+          </a:fillRef>
+          <a:effectRef idx="2">
+            <a:schemeClr val="accent1"/>
+          </a:effectRef>
+          <a:fontRef idx="minor">
+            <a:schemeClr val="lt1"/>
+          </a:fontRef>
+        </p:style>
+        <p:txBody>
+          <a:bodyPr rtlCol="0" anchor="ctr"/>
+          <a:lstStyle/>
+          <a:p>
+            <a:pPr algn="ctr"/>
+          </a:p>
+        </p:txBody>
+      </p:sp>
+      <p:graphicFrame>
+        <p:nvGraphicFramePr>
+          <p:cNvPr id="6" name="Table 5"/>
+          <p:cNvGraphicFramePr>
+            <a:graphicFrameLocks noGrp="1"/>
+          </p:cNvGraphicFramePr>
+          <p:nvPr/>
+        </p:nvGraphicFramePr>
+        <p:xfrm>
+          <a:off x="365760" y="1143000"/>
+          <a:ext cx="11430000" cy="1901952"/>
+        </p:xfrm>
+        <a:graphic>
+          <a:graphicData uri="http://schemas.openxmlformats.org/drawingml/2006/table">
+            <a:tbl>
+              <a:tblPr firstRow="1" bandRow="1">
+                <a:tableStyleId>{5C22544A-7EE6-4342-B048-85BDC9FD1C3A}</a:tableStyleId>
+              </a:tblPr>
+              <a:tblGrid>
+                <a:gridCol w="3810000"/>
+                <a:gridCol w="3810000"/>
+                <a:gridCol w="3810000"/>
+              </a:tblGrid>
+              <a:tr h="475488">
+                <a:tc>
+                  <a:txBody>
+                    <a:bodyPr wrap="square"/>
+                    <a:lstStyle/>
+                    <a:p>
+                      <a:r>
+                        <a:rPr sz="1100" b="1">
+                          <a:solidFill>
+                            <a:srgbClr val="FFFFFF"/>
+                          </a:solidFill>
+                          <a:latin typeface="Arial"/>
+                        </a:rPr>
+                        <a:t>Parameter</a:t>
+                      </a:r>
+                    </a:p>
+                  </a:txBody>
+                  <a:tcPr>
+                    <a:solidFill>
+                      <a:srgbClr val="003DA5"/>
+                    </a:solidFill>
+                  </a:tcPr>
+                </a:tc>
+                <a:tc>
+                  <a:txBody>
+                    <a:bodyPr wrap="square"/>
+                    <a:lstStyle/>
+                    <a:p>
+                      <a:r>
+                        <a:rPr sz="1100" b="1">
+                          <a:solidFill>
+                            <a:srgbClr val="FFFFFF"/>
+                          </a:solidFill>
+                          <a:latin typeface="Arial"/>
+                        </a:rPr>
+                        <a:t>Bedeutung</a:t>
+                      </a:r>
+                    </a:p>
+                  </a:txBody>
+                  <a:tcPr>
+                    <a:solidFill>
+                      <a:srgbClr val="003DA5"/>
+                    </a:solidFill>
+                  </a:tcPr>
+                </a:tc>
+                <a:tc>
+                  <a:txBody>
+                    <a:bodyPr wrap="square"/>
+                    <a:lstStyle/>
+                    <a:p>
+                      <a:r>
+                        <a:rPr sz="1100" b="1">
+                          <a:solidFill>
+                            <a:srgbClr val="FFFFFF"/>
+                          </a:solidFill>
+                          <a:latin typeface="Arial"/>
+                        </a:rPr>
+                        <a:t>Praktische Annäherung</a:t>
+                      </a:r>
+                    </a:p>
+                  </a:txBody>
+                  <a:tcPr>
+                    <a:solidFill>
+                      <a:srgbClr val="003DA5"/>
+                    </a:solidFill>
+                  </a:tcPr>
+                </a:tc>
+              </a:tr>
+              <a:tr h="475488">
+                <a:tc>
+                  <a:txBody>
+                    <a:bodyPr wrap="square"/>
+                    <a:lstStyle/>
+                    <a:p>
+                      <a:r>
+                        <a:rPr sz="1100" b="0">
+                          <a:solidFill>
+                            <a:srgbClr val="1A1A1A"/>
+                          </a:solidFill>
+                          <a:latin typeface="Arial"/>
+                        </a:rPr>
+                        <a:t>PD (Probability of Default)</a:t>
+                      </a:r>
+                    </a:p>
+                  </a:txBody>
+                  <a:tcPr>
+                    <a:solidFill>
+                      <a:srgbClr val="FFFFFF"/>
+                    </a:solidFill>
+                  </a:tcPr>
+                </a:tc>
+                <a:tc>
+                  <a:txBody>
+                    <a:bodyPr wrap="square"/>
+                    <a:lstStyle/>
+                    <a:p>
+                      <a:r>
+                        <a:rPr sz="1100" b="0">
+                          <a:solidFill>
+                            <a:srgbClr val="1A1A1A"/>
+                          </a:solidFill>
+                          <a:latin typeface="Arial"/>
+                        </a:rPr>
+                        <a:t>Ausfallwahrscheinlichkeit</a:t>
+                      </a:r>
+                    </a:p>
+                  </a:txBody>
+                  <a:tcPr>
+                    <a:solidFill>
+                      <a:srgbClr val="FFFFFF"/>
+                    </a:solidFill>
+                  </a:tcPr>
+                </a:tc>
+                <a:tc>
+                  <a:txBody>
+                    <a:bodyPr wrap="square"/>
+                    <a:lstStyle/>
+                    <a:p>
+                      <a:r>
+                        <a:rPr sz="1100" b="0">
+                          <a:solidFill>
+                            <a:srgbClr val="1A1A1A"/>
+                          </a:solidFill>
+                          <a:latin typeface="Arial"/>
+                        </a:rPr>
+                        <a:t>Abgeleitet aus dem internen Rating; VR-Banken nutzen VR-Rating/agree</a:t>
+                      </a:r>
+                    </a:p>
+                  </a:txBody>
+                  <a:tcPr>
+                    <a:solidFill>
+                      <a:srgbClr val="FFFFFF"/>
+                    </a:solidFill>
+                  </a:tcPr>
+                </a:tc>
+              </a:tr>
+              <a:tr h="475488">
+                <a:tc>
+                  <a:txBody>
+                    <a:bodyPr wrap="square"/>
+                    <a:lstStyle/>
+                    <a:p>
+                      <a:r>
+                        <a:rPr sz="1100" b="0">
+                          <a:solidFill>
+                            <a:srgbClr val="1A1A1A"/>
+                          </a:solidFill>
+                          <a:latin typeface="Arial"/>
+                        </a:rPr>
+                        <a:t>LGD (Loss Given Default)</a:t>
+                      </a:r>
+                    </a:p>
+                  </a:txBody>
+                  <a:tcPr>
+                    <a:solidFill>
+                      <a:srgbClr val="F4F6FA"/>
+                    </a:solidFill>
+                  </a:tcPr>
+                </a:tc>
+                <a:tc>
+                  <a:txBody>
+                    <a:bodyPr wrap="square"/>
+                    <a:lstStyle/>
+                    <a:p>
+                      <a:r>
+                        <a:rPr sz="1100" b="0">
+                          <a:solidFill>
+                            <a:srgbClr val="1A1A1A"/>
+                          </a:solidFill>
+                          <a:latin typeface="Arial"/>
+                        </a:rPr>
+                        <a:t>Verlust bei Ausfall</a:t>
+                      </a:r>
+                    </a:p>
+                  </a:txBody>
+                  <a:tcPr>
+                    <a:solidFill>
+                      <a:srgbClr val="F4F6FA"/>
+                    </a:solidFill>
+                  </a:tcPr>
+                </a:tc>
+                <a:tc>
+                  <a:txBody>
+                    <a:bodyPr wrap="square"/>
+                    <a:lstStyle/>
+                    <a:p>
+                      <a:r>
+                        <a:rPr sz="1100" b="0">
+                          <a:solidFill>
+                            <a:srgbClr val="1A1A1A"/>
+                          </a:solidFill>
+                          <a:latin typeface="Arial"/>
+                        </a:rPr>
+                        <a:t>Abhängig von Besicherung; typisch 40–60 % unbesichert</a:t>
+                      </a:r>
+                    </a:p>
+                  </a:txBody>
+                  <a:tcPr>
+                    <a:solidFill>
+                      <a:srgbClr val="F4F6FA"/>
+                    </a:solidFill>
+                  </a:tcPr>
+                </a:tc>
+              </a:tr>
+              <a:tr h="475488">
+                <a:tc>
+                  <a:txBody>
+                    <a:bodyPr wrap="square"/>
+                    <a:lstStyle/>
+                    <a:p>
+                      <a:r>
+                        <a:rPr sz="1100" b="0">
+                          <a:solidFill>
+                            <a:srgbClr val="1A1A1A"/>
+                          </a:solidFill>
+                          <a:latin typeface="Arial"/>
+                        </a:rPr>
+                        <a:t>EAD (Exposure at Default)</a:t>
+                      </a:r>
+                    </a:p>
+                  </a:txBody>
+                  <a:tcPr>
+                    <a:solidFill>
+                      <a:srgbClr val="FFFFFF"/>
+                    </a:solidFill>
+                  </a:tcPr>
+                </a:tc>
+                <a:tc>
+                  <a:txBody>
+                    <a:bodyPr wrap="square"/>
+                    <a:lstStyle/>
+                    <a:p>
+                      <a:r>
+                        <a:rPr sz="1100" b="0">
+                          <a:solidFill>
+                            <a:srgbClr val="1A1A1A"/>
+                          </a:solidFill>
+                          <a:latin typeface="Arial"/>
+                        </a:rPr>
+                        <a:t>Kreditvolumen bei Ausfall</a:t>
+                      </a:r>
+                    </a:p>
+                  </a:txBody>
+                  <a:tcPr>
+                    <a:solidFill>
+                      <a:srgbClr val="FFFFFF"/>
+                    </a:solidFill>
+                  </a:tcPr>
+                </a:tc>
+                <a:tc>
+                  <a:txBody>
+                    <a:bodyPr wrap="square"/>
+                    <a:lstStyle/>
+                    <a:p>
+                      <a:r>
+                        <a:rPr sz="1100" b="0">
+                          <a:solidFill>
+                            <a:srgbClr val="1A1A1A"/>
+                          </a:solidFill>
+                          <a:latin typeface="Arial"/>
+                        </a:rPr>
+                        <a:t>Inanspruchnahme + konservative Schätzung Inanspruchnahme offener Linien</a:t>
+                      </a:r>
+                    </a:p>
+                  </a:txBody>
+                  <a:tcPr>
+                    <a:solidFill>
+                      <a:srgbClr val="FFFFFF"/>
+                    </a:solidFill>
+                  </a:tcPr>
+                </a:tc>
+              </a:tr>
+            </a:tbl>
+          </a:graphicData>
+        </a:graphic>
+      </p:graphicFrame>
     </p:spTree>
   </p:cSld>
   <p:clrMapOvr>
@@ -3518,8 +3904,8 @@
         </p:nvSpPr>
         <p:spPr>
           <a:xfrm>
-            <a:off x="365760" y="2286000"/>
-            <a:ext cx="11430000" cy="1828800"/>
+            <a:off x="365760" y="2011680"/>
+            <a:ext cx="11430000" cy="2011680"/>
           </a:xfrm>
           <a:prstGeom prst="rect">
             <a:avLst/>
@@ -3534,13 +3920,13 @@
           <a:p>
             <a:pPr algn="l"/>
             <a:r>
-              <a:rPr sz="3600" b="1">
+              <a:rPr sz="3600" b="1" i="0">
                 <a:solidFill>
                   <a:srgbClr val="FFFFFF"/>
                 </a:solidFill>
                 <a:latin typeface="Arial"/>
               </a:rPr>
-              <a:t>Vom Konditionengespräch zum Wertgespräch</a:t>
+              <a:t>Das Nettomargenziel (NMZ) als Steuerungsgröße</a:t>
             </a:r>
           </a:p>
         </p:txBody>
@@ -3559,7 +3945,7 @@
     <p:bg>
       <p:bgPr>
         <a:solidFill>
-          <a:srgbClr val="1A1A1A"/>
+          <a:srgbClr val="FFFFFF"/>
         </a:solidFill>
         <a:effectLst/>
       </p:bgPr>
@@ -3586,7 +3972,7 @@
             <a:avLst/>
           </a:prstGeom>
           <a:solidFill>
-            <a:srgbClr val="E05B00"/>
+            <a:srgbClr val="003DA5"/>
           </a:solidFill>
           <a:ln>
             <a:noFill/>
@@ -3622,8 +4008,8 @@
         </p:nvSpPr>
         <p:spPr>
           <a:xfrm>
-            <a:off x="365760" y="2286000"/>
-            <a:ext cx="11430000" cy="1828800"/>
+            <a:off x="228600" y="182880"/>
+            <a:ext cx="11430000" cy="320040"/>
           </a:xfrm>
           <a:prstGeom prst="rect">
             <a:avLst/>
@@ -3638,13 +4024,250 @@
           <a:p>
             <a:pPr algn="l"/>
             <a:r>
-              <a:rPr sz="3600" b="1">
-                <a:solidFill>
-                  <a:srgbClr val="FFFFFF"/>
-                </a:solidFill>
-                <a:latin typeface="Arial"/>
-              </a:rPr>
-              <a:t>Arbeitsblatt A: Deckungsbeitragsrechnung</a:t>
+              <a:rPr sz="900" b="0" i="0">
+                <a:solidFill>
+                  <a:srgbClr val="556575"/>
+                </a:solidFill>
+                <a:latin typeface="Arial"/>
+              </a:rPr>
+              <a:t>M14 · 4.2 Risikogerechtes Pricing</a:t>
+            </a:r>
+          </a:p>
+        </p:txBody>
+      </p:sp>
+      <p:sp>
+        <p:nvSpPr>
+          <p:cNvPr id="4" name="TextBox 3"/>
+          <p:cNvSpPr txBox="1"/>
+          <p:nvPr/>
+        </p:nvSpPr>
+        <p:spPr>
+          <a:xfrm>
+            <a:off x="365760" y="274320"/>
+            <a:ext cx="11430000" cy="777240"/>
+          </a:xfrm>
+          <a:prstGeom prst="rect">
+            <a:avLst/>
+          </a:prstGeom>
+          <a:noFill/>
+        </p:spPr>
+        <p:txBody>
+          <a:bodyPr wrap="square">
+            <a:spAutoFit/>
+          </a:bodyPr>
+          <a:lstStyle/>
+          <a:p>
+            <a:pPr algn="l"/>
+            <a:r>
+              <a:rPr sz="2200" b="1" i="0">
+                <a:solidFill>
+                  <a:srgbClr val="003DA5"/>
+                </a:solidFill>
+                <a:latin typeface="Arial"/>
+              </a:rPr>
+              <a:t>Das Nettomargenziel (NMZ) als Steuerungsgröße</a:t>
+            </a:r>
+          </a:p>
+        </p:txBody>
+      </p:sp>
+      <p:sp>
+        <p:nvSpPr>
+          <p:cNvPr id="5" name="Rectangle 4"/>
+          <p:cNvSpPr/>
+          <p:nvPr/>
+        </p:nvSpPr>
+        <p:spPr>
+          <a:xfrm>
+            <a:off x="365760" y="1005840"/>
+            <a:ext cx="11430000" cy="27432"/>
+          </a:xfrm>
+          <a:prstGeom prst="rect">
+            <a:avLst/>
+          </a:prstGeom>
+          <a:solidFill>
+            <a:srgbClr val="D1D5DB"/>
+          </a:solidFill>
+          <a:ln>
+            <a:noFill/>
+          </a:ln>
+        </p:spPr>
+        <p:style>
+          <a:lnRef idx="1">
+            <a:schemeClr val="accent1"/>
+          </a:lnRef>
+          <a:fillRef idx="3">
+            <a:schemeClr val="accent1"/>
+          </a:fillRef>
+          <a:effectRef idx="2">
+            <a:schemeClr val="accent1"/>
+          </a:effectRef>
+          <a:fontRef idx="minor">
+            <a:schemeClr val="lt1"/>
+          </a:fontRef>
+        </p:style>
+        <p:txBody>
+          <a:bodyPr rtlCol="0" anchor="ctr"/>
+          <a:lstStyle/>
+          <a:p>
+            <a:pPr algn="ctr"/>
+          </a:p>
+        </p:txBody>
+      </p:sp>
+      <p:sp>
+        <p:nvSpPr>
+          <p:cNvPr id="6" name="TextBox 5"/>
+          <p:cNvSpPr txBox="1"/>
+          <p:nvPr/>
+        </p:nvSpPr>
+        <p:spPr>
+          <a:xfrm>
+            <a:off x="365760" y="1143000"/>
+            <a:ext cx="11430000" cy="5212080"/>
+          </a:xfrm>
+          <a:prstGeom prst="rect">
+            <a:avLst/>
+          </a:prstGeom>
+          <a:noFill/>
+        </p:spPr>
+        <p:txBody>
+          <a:bodyPr wrap="square">
+            <a:spAutoFit/>
+          </a:bodyPr>
+          <a:lstStyle/>
+          <a:p>
+            <a:pPr>
+              <a:spcBef>
+                <a:spcPts val="500"/>
+              </a:spcBef>
+            </a:pPr>
+            <a:r>
+              <a:rPr sz="1500">
+                <a:solidFill>
+                  <a:srgbClr val="003DA5"/>
+                </a:solidFill>
+                <a:latin typeface="Arial"/>
+              </a:rPr>
+              <a:t>▪  </a:t>
+            </a:r>
+            <a:r>
+              <a:rPr sz="1700" b="1">
+                <a:solidFill>
+                  <a:srgbClr val="003DA5"/>
+                </a:solidFill>
+                <a:latin typeface="Arial"/>
+              </a:rPr>
+              <a:t>Nettomargenziel (NMZ): </a:t>
+            </a:r>
+            <a:r>
+              <a:rPr sz="1700">
+                <a:solidFill>
+                  <a:srgbClr val="1A1A1A"/>
+                </a:solidFill>
+                <a:latin typeface="Arial"/>
+              </a:rPr>
+              <a:t>als Untergrenze für das Konditionensetting genutzt. Das NMZ gibt an, welche Nettomarge nach Abzug von Refinanzierungskosten, Risikokosten (EL) und Standardbetriebskosten…</a:t>
+            </a:r>
+          </a:p>
+          <a:p>
+            <a:pPr>
+              <a:spcBef>
+                <a:spcPts val="500"/>
+              </a:spcBef>
+            </a:pPr>
+            <a:r>
+              <a:rPr sz="1500">
+                <a:solidFill>
+                  <a:srgbClr val="003DA5"/>
+                </a:solidFill>
+                <a:latin typeface="Arial"/>
+              </a:rPr>
+              <a:t>▪  </a:t>
+            </a:r>
+            <a:r>
+              <a:rPr sz="1700" b="1">
+                <a:solidFill>
+                  <a:srgbClr val="003DA5"/>
+                </a:solidFill>
+                <a:latin typeface="Arial"/>
+              </a:rPr>
+              <a:t>Logik: </a:t>
+            </a:r>
+            <a:r>
+              <a:rPr sz="1700">
+                <a:solidFill>
+                  <a:srgbClr val="1A1A1A"/>
+                </a:solidFill>
+                <a:latin typeface="Arial"/>
+              </a:rPr>
+              <a:t>&gt; Bruttomarge (vereinbarte Kreditmarge) − Refinanzierungskosten − EL − Standardbetriebskosten =</a:t>
+            </a:r>
+          </a:p>
+          <a:p>
+            <a:pPr>
+              <a:spcBef>
+                <a:spcPts val="500"/>
+              </a:spcBef>
+            </a:pPr>
+            <a:r>
+              <a:rPr sz="1500">
+                <a:solidFill>
+                  <a:srgbClr val="003DA5"/>
+                </a:solidFill>
+                <a:latin typeface="Arial"/>
+              </a:rPr>
+              <a:t>▪  </a:t>
+            </a:r>
+            <a:r>
+              <a:rPr sz="1700" b="1">
+                <a:solidFill>
+                  <a:srgbClr val="003DA5"/>
+                </a:solidFill>
+                <a:latin typeface="Arial"/>
+              </a:rPr>
+              <a:t>Nettomarge: </a:t>
+            </a:r>
+            <a:r>
+              <a:rPr sz="1700">
+                <a:solidFill>
+                  <a:srgbClr val="1A1A1A"/>
+                </a:solidFill>
+                <a:latin typeface="Arial"/>
+              </a:rPr>
+              <a:t>Liegt die Nettomarge unterhalb des hausindividuellen NMZ, ist eine Konditionsanpassung betriebswirtschaftlich zwingend – unabhängig davon, ob der Kunde zufrieden ist oder nicht.…</a:t>
+            </a:r>
+          </a:p>
+          <a:p>
+            <a:pPr>
+              <a:spcBef>
+                <a:spcPts val="500"/>
+              </a:spcBef>
+            </a:pPr>
+            <a:r>
+              <a:rPr sz="1500">
+                <a:solidFill>
+                  <a:srgbClr val="003DA5"/>
+                </a:solidFill>
+                <a:latin typeface="Arial"/>
+              </a:rPr>
+              <a:t>▪  </a:t>
+            </a:r>
+            <a:r>
+              <a:rPr sz="1700" b="1">
+                <a:solidFill>
+                  <a:srgbClr val="003DA5"/>
+                </a:solidFill>
+                <a:latin typeface="Arial"/>
+              </a:rPr>
+              <a:t>Vertiefung → M16 NMZ-Optimierung: </a:t>
+            </a:r>
+            <a:r>
+              <a:rPr sz="1700">
+                <a:solidFill>
+                  <a:srgbClr val="1A1A1A"/>
+                </a:solidFill>
+                <a:latin typeface="Arial"/>
+              </a:rPr>
+              <a:t>(Ertragsteuerung auf Bestandsebene).</a:t>
             </a:r>
           </a:p>
         </p:txBody>
@@ -3726,8 +4349,8 @@
         </p:nvSpPr>
         <p:spPr>
           <a:xfrm>
-            <a:off x="365760" y="2286000"/>
-            <a:ext cx="11430000" cy="1828800"/>
+            <a:off x="365760" y="2011680"/>
+            <a:ext cx="11430000" cy="2011680"/>
           </a:xfrm>
           <a:prstGeom prst="rect">
             <a:avLst/>
@@ -3742,13 +4365,13 @@
           <a:p>
             <a:pPr algn="l"/>
             <a:r>
-              <a:rPr sz="3600" b="1">
+              <a:rPr sz="3600" b="1" i="0">
                 <a:solidFill>
                   <a:srgbClr val="FFFFFF"/>
                 </a:solidFill>
                 <a:latin typeface="Arial"/>
               </a:rPr>
-              <a:t>Arbeitsblatt B: Konditionengespräch vorbereiten</a:t>
+              <a:t>Konditionsanpassung vorbereiten</a:t>
             </a:r>
           </a:p>
         </p:txBody>
@@ -3767,7 +4390,7 @@
     <p:bg>
       <p:bgPr>
         <a:solidFill>
-          <a:srgbClr val="1A1A1A"/>
+          <a:srgbClr val="FFFFFF"/>
         </a:solidFill>
         <a:effectLst/>
       </p:bgPr>
@@ -3794,7 +4417,7 @@
             <a:avLst/>
           </a:prstGeom>
           <a:solidFill>
-            <a:srgbClr val="E05B00"/>
+            <a:srgbClr val="003DA5"/>
           </a:solidFill>
           <a:ln>
             <a:noFill/>
@@ -3830,8 +4453,8 @@
         </p:nvSpPr>
         <p:spPr>
           <a:xfrm>
-            <a:off x="365760" y="2286000"/>
-            <a:ext cx="11430000" cy="1828800"/>
+            <a:off x="228600" y="182880"/>
+            <a:ext cx="11430000" cy="320040"/>
           </a:xfrm>
           <a:prstGeom prst="rect">
             <a:avLst/>
@@ -3846,13 +4469,284 @@
           <a:p>
             <a:pPr algn="l"/>
             <a:r>
-              <a:rPr sz="3600" b="1">
-                <a:solidFill>
-                  <a:srgbClr val="FFFFFF"/>
-                </a:solidFill>
-                <a:latin typeface="Arial"/>
-              </a:rPr>
-              <a:t>Fachlich</a:t>
+              <a:rPr sz="900" b="0" i="0">
+                <a:solidFill>
+                  <a:srgbClr val="556575"/>
+                </a:solidFill>
+                <a:latin typeface="Arial"/>
+              </a:rPr>
+              <a:t>M14 · 4.2 Risikogerechtes Pricing</a:t>
+            </a:r>
+          </a:p>
+        </p:txBody>
+      </p:sp>
+      <p:sp>
+        <p:nvSpPr>
+          <p:cNvPr id="4" name="TextBox 3"/>
+          <p:cNvSpPr txBox="1"/>
+          <p:nvPr/>
+        </p:nvSpPr>
+        <p:spPr>
+          <a:xfrm>
+            <a:off x="365760" y="274320"/>
+            <a:ext cx="11430000" cy="777240"/>
+          </a:xfrm>
+          <a:prstGeom prst="rect">
+            <a:avLst/>
+          </a:prstGeom>
+          <a:noFill/>
+        </p:spPr>
+        <p:txBody>
+          <a:bodyPr wrap="square">
+            <a:spAutoFit/>
+          </a:bodyPr>
+          <a:lstStyle/>
+          <a:p>
+            <a:pPr algn="l"/>
+            <a:r>
+              <a:rPr sz="2200" b="1" i="0">
+                <a:solidFill>
+                  <a:srgbClr val="003DA5"/>
+                </a:solidFill>
+                <a:latin typeface="Arial"/>
+              </a:rPr>
+              <a:t>Konditionsanpassung vorbereiten</a:t>
+            </a:r>
+          </a:p>
+        </p:txBody>
+      </p:sp>
+      <p:sp>
+        <p:nvSpPr>
+          <p:cNvPr id="5" name="Rectangle 4"/>
+          <p:cNvSpPr/>
+          <p:nvPr/>
+        </p:nvSpPr>
+        <p:spPr>
+          <a:xfrm>
+            <a:off x="365760" y="1005840"/>
+            <a:ext cx="11430000" cy="27432"/>
+          </a:xfrm>
+          <a:prstGeom prst="rect">
+            <a:avLst/>
+          </a:prstGeom>
+          <a:solidFill>
+            <a:srgbClr val="D1D5DB"/>
+          </a:solidFill>
+          <a:ln>
+            <a:noFill/>
+          </a:ln>
+        </p:spPr>
+        <p:style>
+          <a:lnRef idx="1">
+            <a:schemeClr val="accent1"/>
+          </a:lnRef>
+          <a:fillRef idx="3">
+            <a:schemeClr val="accent1"/>
+          </a:fillRef>
+          <a:effectRef idx="2">
+            <a:schemeClr val="accent1"/>
+          </a:effectRef>
+          <a:fontRef idx="minor">
+            <a:schemeClr val="lt1"/>
+          </a:fontRef>
+        </p:style>
+        <p:txBody>
+          <a:bodyPr rtlCol="0" anchor="ctr"/>
+          <a:lstStyle/>
+          <a:p>
+            <a:pPr algn="ctr"/>
+          </a:p>
+        </p:txBody>
+      </p:sp>
+      <p:sp>
+        <p:nvSpPr>
+          <p:cNvPr id="6" name="TextBox 5"/>
+          <p:cNvSpPr txBox="1"/>
+          <p:nvPr/>
+        </p:nvSpPr>
+        <p:spPr>
+          <a:xfrm>
+            <a:off x="365760" y="1143000"/>
+            <a:ext cx="11430000" cy="5212080"/>
+          </a:xfrm>
+          <a:prstGeom prst="rect">
+            <a:avLst/>
+          </a:prstGeom>
+          <a:noFill/>
+        </p:spPr>
+        <p:txBody>
+          <a:bodyPr wrap="square">
+            <a:spAutoFit/>
+          </a:bodyPr>
+          <a:lstStyle/>
+          <a:p>
+            <a:pPr>
+              <a:spcBef>
+                <a:spcPts val="500"/>
+              </a:spcBef>
+            </a:pPr>
+            <a:r>
+              <a:rPr sz="1500">
+                <a:solidFill>
+                  <a:srgbClr val="003DA5"/>
+                </a:solidFill>
+                <a:latin typeface="Arial"/>
+              </a:rPr>
+              <a:t>▪  </a:t>
+            </a:r>
+            <a:r>
+              <a:rPr sz="1700" b="1">
+                <a:solidFill>
+                  <a:srgbClr val="003DA5"/>
+                </a:solidFill>
+                <a:latin typeface="Arial"/>
+              </a:rPr>
+              <a:t>Zinsmarge erhöhen: </a:t>
+            </a:r>
+            <a:r>
+              <a:rPr sz="1700">
+                <a:solidFill>
+                  <a:srgbClr val="1A1A1A"/>
+                </a:solidFill>
+                <a:latin typeface="Arial"/>
+              </a:rPr>
+              <a:t>Direkte Wirkung auf DB I. Erfordert Konditionengespräch (Sec 4.4). 2.</a:t>
+            </a:r>
+          </a:p>
+          <a:p>
+            <a:pPr>
+              <a:spcBef>
+                <a:spcPts val="500"/>
+              </a:spcBef>
+            </a:pPr>
+            <a:r>
+              <a:rPr sz="1500">
+                <a:solidFill>
+                  <a:srgbClr val="003DA5"/>
+                </a:solidFill>
+                <a:latin typeface="Arial"/>
+              </a:rPr>
+              <a:t>▪  </a:t>
+            </a:r>
+            <a:r>
+              <a:rPr sz="1700" b="1">
+                <a:solidFill>
+                  <a:srgbClr val="003DA5"/>
+                </a:solidFill>
+                <a:latin typeface="Arial"/>
+              </a:rPr>
+              <a:t>Cross-Selling ausbauen: </a:t>
+            </a:r>
+            <a:r>
+              <a:rPr sz="1700">
+                <a:solidFill>
+                  <a:srgbClr val="1A1A1A"/>
+                </a:solidFill>
+                <a:latin typeface="Arial"/>
+              </a:rPr>
+              <a:t>Verbundertrag und Provisionen steigern, ohne Zinskonditionen anzufassen. Oft der schonendere Weg. 3.</a:t>
+            </a:r>
+          </a:p>
+          <a:p>
+            <a:pPr>
+              <a:spcBef>
+                <a:spcPts val="500"/>
+              </a:spcBef>
+            </a:pPr>
+            <a:r>
+              <a:rPr sz="1500">
+                <a:solidFill>
+                  <a:srgbClr val="003DA5"/>
+                </a:solidFill>
+                <a:latin typeface="Arial"/>
+              </a:rPr>
+              <a:t>▪  </a:t>
+            </a:r>
+            <a:r>
+              <a:rPr sz="1700" b="1">
+                <a:solidFill>
+                  <a:srgbClr val="003DA5"/>
+                </a:solidFill>
+                <a:latin typeface="Arial"/>
+              </a:rPr>
+              <a:t>Betreuungskosten senken: </a:t>
+            </a:r>
+            <a:r>
+              <a:rPr sz="1700">
+                <a:solidFill>
+                  <a:srgbClr val="1A1A1A"/>
+                </a:solidFill>
+                <a:latin typeface="Arial"/>
+              </a:rPr>
+              <a:t>Gesprächsfrequenz anpassen, digitale Kanäle stärker nutzen. Wirkt auf DB II.</a:t>
+            </a:r>
+          </a:p>
+          <a:p>
+            <a:pPr>
+              <a:spcBef>
+                <a:spcPts val="500"/>
+              </a:spcBef>
+            </a:pPr>
+            <a:r>
+              <a:rPr sz="1500">
+                <a:solidFill>
+                  <a:srgbClr val="003DA5"/>
+                </a:solidFill>
+                <a:latin typeface="Arial"/>
+              </a:rPr>
+              <a:t>▪  </a:t>
+            </a:r>
+            <a:r>
+              <a:rPr sz="1700" b="1">
+                <a:solidFill>
+                  <a:srgbClr val="003DA5"/>
+                </a:solidFill>
+                <a:latin typeface="Arial"/>
+              </a:rPr>
+              <a:t>Wichtig – Genehmigungspflicht beachten: </a:t>
+            </a:r>
+            <a:r>
+              <a:rPr sz="1700">
+                <a:solidFill>
+                  <a:srgbClr val="1A1A1A"/>
+                </a:solidFill>
+                <a:latin typeface="Arial"/>
+              </a:rPr>
+              <a:t>Konditionsanpassungen oberhalb des eigenen Kompetenzrahmens erfordern ein Votum der Marktfolge oder die Freigabe durch den Bereichsleiter. Kläre</a:t>
+            </a:r>
+          </a:p>
+          <a:p>
+            <a:pPr>
+              <a:spcBef>
+                <a:spcPts val="500"/>
+              </a:spcBef>
+            </a:pPr>
+            <a:r>
+              <a:rPr sz="1500">
+                <a:solidFill>
+                  <a:srgbClr val="003DA5"/>
+                </a:solidFill>
+                <a:latin typeface="Arial"/>
+              </a:rPr>
+              <a:t>▪  </a:t>
+            </a:r>
+            <a:r>
+              <a:rPr sz="1700" b="1">
+                <a:solidFill>
+                  <a:srgbClr val="003DA5"/>
+                </a:solidFill>
+                <a:latin typeface="Arial"/>
+              </a:rPr>
+              <a:t>vor: </a:t>
+            </a:r>
+            <a:r>
+              <a:rPr sz="1700">
+                <a:solidFill>
+                  <a:srgbClr val="1A1A1A"/>
+                </a:solidFill>
+                <a:latin typeface="Arial"/>
+              </a:rPr>
+              <a:t>dem Kundengespräch intern, welchen Spielraum du hast. Wer dem Kunden eine Konditionen-Zusage macht und diese dann nicht genehmigt bekommt, beschädigt seine Glaubwürdigkeit…</a:t>
             </a:r>
           </a:p>
         </p:txBody>
@@ -3934,8 +4828,8 @@
         </p:nvSpPr>
         <p:spPr>
           <a:xfrm>
-            <a:off x="365760" y="2286000"/>
-            <a:ext cx="11430000" cy="1828800"/>
+            <a:off x="365760" y="2011680"/>
+            <a:ext cx="11430000" cy="2011680"/>
           </a:xfrm>
           <a:prstGeom prst="rect">
             <a:avLst/>
@@ -3950,13 +4844,13 @@
           <a:p>
             <a:pPr algn="l"/>
             <a:r>
-              <a:rPr sz="3600" b="1">
+              <a:rPr sz="3600" b="1" i="0">
                 <a:solidFill>
                   <a:srgbClr val="FFFFFF"/>
                 </a:solidFill>
                 <a:latin typeface="Arial"/>
               </a:rPr>
-              <a:t>Praxismaterialien</a:t>
+              <a:t>Kundensegmentierung nach Ertragsprofil</a:t>
             </a:r>
           </a:p>
         </p:txBody>
@@ -3970,6 +4864,2791 @@
 </file>
 
 <file path=ppt/slides/slide16.xml><?xml version="1.0" encoding="utf-8"?>
+<p:sld xmlns:a="http://schemas.openxmlformats.org/drawingml/2006/main" xmlns:p="http://schemas.openxmlformats.org/presentationml/2006/main" xmlns:r="http://schemas.openxmlformats.org/officeDocument/2006/relationships">
+  <p:cSld>
+    <p:bg>
+      <p:bgPr>
+        <a:solidFill>
+          <a:srgbClr val="FFFFFF"/>
+        </a:solidFill>
+        <a:effectLst/>
+      </p:bgPr>
+    </p:bg>
+    <p:spTree>
+      <p:nvGrpSpPr>
+        <p:cNvPr id="1" name=""/>
+        <p:cNvGrpSpPr/>
+        <p:nvPr/>
+      </p:nvGrpSpPr>
+      <p:grpSpPr/>
+      <p:sp>
+        <p:nvSpPr>
+          <p:cNvPr id="2" name="Rectangle 1"/>
+          <p:cNvSpPr/>
+          <p:nvPr/>
+        </p:nvSpPr>
+        <p:spPr>
+          <a:xfrm>
+            <a:off x="0" y="0"/>
+            <a:ext cx="73152" cy="6858000"/>
+          </a:xfrm>
+          <a:prstGeom prst="rect">
+            <a:avLst/>
+          </a:prstGeom>
+          <a:solidFill>
+            <a:srgbClr val="003DA5"/>
+          </a:solidFill>
+          <a:ln>
+            <a:noFill/>
+          </a:ln>
+        </p:spPr>
+        <p:style>
+          <a:lnRef idx="1">
+            <a:schemeClr val="accent1"/>
+          </a:lnRef>
+          <a:fillRef idx="3">
+            <a:schemeClr val="accent1"/>
+          </a:fillRef>
+          <a:effectRef idx="2">
+            <a:schemeClr val="accent1"/>
+          </a:effectRef>
+          <a:fontRef idx="minor">
+            <a:schemeClr val="lt1"/>
+          </a:fontRef>
+        </p:style>
+        <p:txBody>
+          <a:bodyPr rtlCol="0" anchor="ctr"/>
+          <a:lstStyle/>
+          <a:p>
+            <a:pPr algn="ctr"/>
+          </a:p>
+        </p:txBody>
+      </p:sp>
+      <p:sp>
+        <p:nvSpPr>
+          <p:cNvPr id="3" name="TextBox 2"/>
+          <p:cNvSpPr txBox="1"/>
+          <p:nvPr/>
+        </p:nvSpPr>
+        <p:spPr>
+          <a:xfrm>
+            <a:off x="228600" y="182880"/>
+            <a:ext cx="11430000" cy="320040"/>
+          </a:xfrm>
+          <a:prstGeom prst="rect">
+            <a:avLst/>
+          </a:prstGeom>
+          <a:noFill/>
+        </p:spPr>
+        <p:txBody>
+          <a:bodyPr wrap="square">
+            <a:spAutoFit/>
+          </a:bodyPr>
+          <a:lstStyle/>
+          <a:p>
+            <a:pPr algn="l"/>
+            <a:r>
+              <a:rPr sz="900" b="0" i="0">
+                <a:solidFill>
+                  <a:srgbClr val="556575"/>
+                </a:solidFill>
+                <a:latin typeface="Arial"/>
+              </a:rPr>
+              <a:t>M14 · 4.3 Ertragsstruktur-Analyse im Bestand</a:t>
+            </a:r>
+          </a:p>
+        </p:txBody>
+      </p:sp>
+      <p:sp>
+        <p:nvSpPr>
+          <p:cNvPr id="4" name="TextBox 3"/>
+          <p:cNvSpPr txBox="1"/>
+          <p:nvPr/>
+        </p:nvSpPr>
+        <p:spPr>
+          <a:xfrm>
+            <a:off x="365760" y="274320"/>
+            <a:ext cx="11430000" cy="777240"/>
+          </a:xfrm>
+          <a:prstGeom prst="rect">
+            <a:avLst/>
+          </a:prstGeom>
+          <a:noFill/>
+        </p:spPr>
+        <p:txBody>
+          <a:bodyPr wrap="square">
+            <a:spAutoFit/>
+          </a:bodyPr>
+          <a:lstStyle/>
+          <a:p>
+            <a:pPr algn="l"/>
+            <a:r>
+              <a:rPr sz="2200" b="1" i="0">
+                <a:solidFill>
+                  <a:srgbClr val="003DA5"/>
+                </a:solidFill>
+                <a:latin typeface="Arial"/>
+              </a:rPr>
+              <a:t>Kundensegmentierung nach Ertragsprofil</a:t>
+            </a:r>
+          </a:p>
+        </p:txBody>
+      </p:sp>
+      <p:sp>
+        <p:nvSpPr>
+          <p:cNvPr id="5" name="Rectangle 4"/>
+          <p:cNvSpPr/>
+          <p:nvPr/>
+        </p:nvSpPr>
+        <p:spPr>
+          <a:xfrm>
+            <a:off x="365760" y="1005840"/>
+            <a:ext cx="11430000" cy="27432"/>
+          </a:xfrm>
+          <a:prstGeom prst="rect">
+            <a:avLst/>
+          </a:prstGeom>
+          <a:solidFill>
+            <a:srgbClr val="D1D5DB"/>
+          </a:solidFill>
+          <a:ln>
+            <a:noFill/>
+          </a:ln>
+        </p:spPr>
+        <p:style>
+          <a:lnRef idx="1">
+            <a:schemeClr val="accent1"/>
+          </a:lnRef>
+          <a:fillRef idx="3">
+            <a:schemeClr val="accent1"/>
+          </a:fillRef>
+          <a:effectRef idx="2">
+            <a:schemeClr val="accent1"/>
+          </a:effectRef>
+          <a:fontRef idx="minor">
+            <a:schemeClr val="lt1"/>
+          </a:fontRef>
+        </p:style>
+        <p:txBody>
+          <a:bodyPr rtlCol="0" anchor="ctr"/>
+          <a:lstStyle/>
+          <a:p>
+            <a:pPr algn="ctr"/>
+          </a:p>
+        </p:txBody>
+      </p:sp>
+      <p:graphicFrame>
+        <p:nvGraphicFramePr>
+          <p:cNvPr id="6" name="Table 5"/>
+          <p:cNvGraphicFramePr>
+            <a:graphicFrameLocks noGrp="1"/>
+          </p:cNvGraphicFramePr>
+          <p:nvPr/>
+        </p:nvGraphicFramePr>
+        <p:xfrm>
+          <a:off x="365760" y="1143000"/>
+          <a:ext cx="11430000" cy="1426464"/>
+        </p:xfrm>
+        <a:graphic>
+          <a:graphicData uri="http://schemas.openxmlformats.org/drawingml/2006/table">
+            <a:tbl>
+              <a:tblPr firstRow="1" bandRow="1">
+                <a:tableStyleId>{5C22544A-7EE6-4342-B048-85BDC9FD1C3A}</a:tableStyleId>
+              </a:tblPr>
+              <a:tblGrid>
+                <a:gridCol w="3810000"/>
+                <a:gridCol w="3810000"/>
+                <a:gridCol w="3810000"/>
+              </a:tblGrid>
+              <a:tr h="475488">
+                <a:tc>
+                  <a:txBody>
+                    <a:bodyPr wrap="square"/>
+                    <a:lstStyle/>
+                    <a:p>
+                      <a:r>
+                        <a:rPr sz="1100" b="1">
+                          <a:solidFill>
+                            <a:srgbClr val="FFFFFF"/>
+                          </a:solidFill>
+                          <a:latin typeface="Arial"/>
+                        </a:rPr>
+                        <a:t/>
+                      </a:r>
+                    </a:p>
+                  </a:txBody>
+                  <a:tcPr>
+                    <a:solidFill>
+                      <a:srgbClr val="003DA5"/>
+                    </a:solidFill>
+                  </a:tcPr>
+                </a:tc>
+                <a:tc>
+                  <a:txBody>
+                    <a:bodyPr wrap="square"/>
+                    <a:lstStyle/>
+                    <a:p>
+                      <a:r>
+                        <a:rPr sz="1100" b="1">
+                          <a:solidFill>
+                            <a:srgbClr val="FFFFFF"/>
+                          </a:solidFill>
+                          <a:latin typeface="Arial"/>
+                        </a:rPr>
+                        <a:t>Hoher aktueller DB</a:t>
+                      </a:r>
+                    </a:p>
+                  </a:txBody>
+                  <a:tcPr>
+                    <a:solidFill>
+                      <a:srgbClr val="003DA5"/>
+                    </a:solidFill>
+                  </a:tcPr>
+                </a:tc>
+                <a:tc>
+                  <a:txBody>
+                    <a:bodyPr wrap="square"/>
+                    <a:lstStyle/>
+                    <a:p>
+                      <a:r>
+                        <a:rPr sz="1100" b="1">
+                          <a:solidFill>
+                            <a:srgbClr val="FFFFFF"/>
+                          </a:solidFill>
+                          <a:latin typeface="Arial"/>
+                        </a:rPr>
+                        <a:t>Niedriger aktueller DB</a:t>
+                      </a:r>
+                    </a:p>
+                  </a:txBody>
+                  <a:tcPr>
+                    <a:solidFill>
+                      <a:srgbClr val="003DA5"/>
+                    </a:solidFill>
+                  </a:tcPr>
+                </a:tc>
+              </a:tr>
+              <a:tr h="475488">
+                <a:tc>
+                  <a:txBody>
+                    <a:bodyPr wrap="square"/>
+                    <a:lstStyle/>
+                    <a:p>
+                      <a:r>
+                        <a:rPr sz="1100" b="0">
+                          <a:solidFill>
+                            <a:srgbClr val="1A1A1A"/>
+                          </a:solidFill>
+                          <a:latin typeface="Arial"/>
+                        </a:rPr>
+                        <a:t>Hohes Potenzial</a:t>
+                      </a:r>
+                    </a:p>
+                  </a:txBody>
+                  <a:tcPr>
+                    <a:solidFill>
+                      <a:srgbClr val="FFFFFF"/>
+                    </a:solidFill>
+                  </a:tcPr>
+                </a:tc>
+                <a:tc>
+                  <a:txBody>
+                    <a:bodyPr wrap="square"/>
+                    <a:lstStyle/>
+                    <a:p>
+                      <a:r>
+                        <a:rPr sz="1100" b="0">
+                          <a:solidFill>
+                            <a:srgbClr val="1A1A1A"/>
+                          </a:solidFill>
+                          <a:latin typeface="Arial"/>
+                        </a:rPr>
+                        <a:t>Kernkunde: halten, ausbauen</a:t>
+                      </a:r>
+                    </a:p>
+                  </a:txBody>
+                  <a:tcPr>
+                    <a:solidFill>
+                      <a:srgbClr val="FFFFFF"/>
+                    </a:solidFill>
+                  </a:tcPr>
+                </a:tc>
+                <a:tc>
+                  <a:txBody>
+                    <a:bodyPr wrap="square"/>
+                    <a:lstStyle/>
+                    <a:p>
+                      <a:r>
+                        <a:rPr sz="1100" b="0">
+                          <a:solidFill>
+                            <a:srgbClr val="1A1A1A"/>
+                          </a:solidFill>
+                          <a:latin typeface="Arial"/>
+                        </a:rPr>
+                        <a:t>Entwicklungskunde: Cross-Selling, Konditionen</a:t>
+                      </a:r>
+                    </a:p>
+                  </a:txBody>
+                  <a:tcPr>
+                    <a:solidFill>
+                      <a:srgbClr val="FFFFFF"/>
+                    </a:solidFill>
+                  </a:tcPr>
+                </a:tc>
+              </a:tr>
+              <a:tr h="475488">
+                <a:tc>
+                  <a:txBody>
+                    <a:bodyPr wrap="square"/>
+                    <a:lstStyle/>
+                    <a:p>
+                      <a:r>
+                        <a:rPr sz="1100" b="0">
+                          <a:solidFill>
+                            <a:srgbClr val="1A1A1A"/>
+                          </a:solidFill>
+                          <a:latin typeface="Arial"/>
+                        </a:rPr>
+                        <a:t>Niedriges Potenzial</a:t>
+                      </a:r>
+                    </a:p>
+                  </a:txBody>
+                  <a:tcPr>
+                    <a:solidFill>
+                      <a:srgbClr val="F4F6FA"/>
+                    </a:solidFill>
+                  </a:tcPr>
+                </a:tc>
+                <a:tc>
+                  <a:txBody>
+                    <a:bodyPr wrap="square"/>
+                    <a:lstStyle/>
+                    <a:p>
+                      <a:r>
+                        <a:rPr sz="1100" b="0">
+                          <a:solidFill>
+                            <a:srgbClr val="1A1A1A"/>
+                          </a:solidFill>
+                          <a:latin typeface="Arial"/>
+                        </a:rPr>
+                        <a:t>Ertragskunde: Beziehung pflegen</a:t>
+                      </a:r>
+                    </a:p>
+                  </a:txBody>
+                  <a:tcPr>
+                    <a:solidFill>
+                      <a:srgbClr val="F4F6FA"/>
+                    </a:solidFill>
+                  </a:tcPr>
+                </a:tc>
+                <a:tc>
+                  <a:txBody>
+                    <a:bodyPr wrap="square"/>
+                    <a:lstStyle/>
+                    <a:p>
+                      <a:r>
+                        <a:rPr sz="1100" b="0">
+                          <a:solidFill>
+                            <a:srgbClr val="1A1A1A"/>
+                          </a:solidFill>
+                          <a:latin typeface="Arial"/>
+                        </a:rPr>
+                        <a:t>Problemkunde: Betreuungsintensität senken oder Exit prüfen</a:t>
+                      </a:r>
+                    </a:p>
+                  </a:txBody>
+                  <a:tcPr>
+                    <a:solidFill>
+                      <a:srgbClr val="F4F6FA"/>
+                    </a:solidFill>
+                  </a:tcPr>
+                </a:tc>
+              </a:tr>
+            </a:tbl>
+          </a:graphicData>
+        </a:graphic>
+      </p:graphicFrame>
+    </p:spTree>
+  </p:cSld>
+  <p:clrMapOvr>
+    <a:masterClrMapping/>
+  </p:clrMapOvr>
+</p:sld>
+</file>
+
+<file path=ppt/slides/slide17.xml><?xml version="1.0" encoding="utf-8"?>
+<p:sld xmlns:a="http://schemas.openxmlformats.org/drawingml/2006/main" xmlns:p="http://schemas.openxmlformats.org/presentationml/2006/main" xmlns:r="http://schemas.openxmlformats.org/officeDocument/2006/relationships">
+  <p:cSld>
+    <p:bg>
+      <p:bgPr>
+        <a:solidFill>
+          <a:srgbClr val="1A1A1A"/>
+        </a:solidFill>
+        <a:effectLst/>
+      </p:bgPr>
+    </p:bg>
+    <p:spTree>
+      <p:nvGrpSpPr>
+        <p:cNvPr id="1" name=""/>
+        <p:cNvGrpSpPr/>
+        <p:nvPr/>
+      </p:nvGrpSpPr>
+      <p:grpSpPr/>
+      <p:sp>
+        <p:nvSpPr>
+          <p:cNvPr id="2" name="Rectangle 1"/>
+          <p:cNvSpPr/>
+          <p:nvPr/>
+        </p:nvSpPr>
+        <p:spPr>
+          <a:xfrm>
+            <a:off x="0" y="0"/>
+            <a:ext cx="73152" cy="6858000"/>
+          </a:xfrm>
+          <a:prstGeom prst="rect">
+            <a:avLst/>
+          </a:prstGeom>
+          <a:solidFill>
+            <a:srgbClr val="E05B00"/>
+          </a:solidFill>
+          <a:ln>
+            <a:noFill/>
+          </a:ln>
+        </p:spPr>
+        <p:style>
+          <a:lnRef idx="1">
+            <a:schemeClr val="accent1"/>
+          </a:lnRef>
+          <a:fillRef idx="3">
+            <a:schemeClr val="accent1"/>
+          </a:fillRef>
+          <a:effectRef idx="2">
+            <a:schemeClr val="accent1"/>
+          </a:effectRef>
+          <a:fontRef idx="minor">
+            <a:schemeClr val="lt1"/>
+          </a:fontRef>
+        </p:style>
+        <p:txBody>
+          <a:bodyPr rtlCol="0" anchor="ctr"/>
+          <a:lstStyle/>
+          <a:p>
+            <a:pPr algn="ctr"/>
+          </a:p>
+        </p:txBody>
+      </p:sp>
+      <p:sp>
+        <p:nvSpPr>
+          <p:cNvPr id="3" name="TextBox 2"/>
+          <p:cNvSpPr txBox="1"/>
+          <p:nvPr/>
+        </p:nvSpPr>
+        <p:spPr>
+          <a:xfrm>
+            <a:off x="365760" y="2011680"/>
+            <a:ext cx="11430000" cy="2011680"/>
+          </a:xfrm>
+          <a:prstGeom prst="rect">
+            <a:avLst/>
+          </a:prstGeom>
+          <a:noFill/>
+        </p:spPr>
+        <p:txBody>
+          <a:bodyPr wrap="square">
+            <a:spAutoFit/>
+          </a:bodyPr>
+          <a:lstStyle/>
+          <a:p>
+            <a:pPr algn="l"/>
+            <a:r>
+              <a:rPr sz="3600" b="1" i="0">
+                <a:solidFill>
+                  <a:srgbClr val="FFFFFF"/>
+                </a:solidFill>
+                <a:latin typeface="Arial"/>
+              </a:rPr>
+              <a:t>Signale für Unterpreisierung</a:t>
+            </a:r>
+          </a:p>
+        </p:txBody>
+      </p:sp>
+    </p:spTree>
+  </p:cSld>
+  <p:clrMapOvr>
+    <a:masterClrMapping/>
+  </p:clrMapOvr>
+</p:sld>
+</file>
+
+<file path=ppt/slides/slide18.xml><?xml version="1.0" encoding="utf-8"?>
+<p:sld xmlns:a="http://schemas.openxmlformats.org/drawingml/2006/main" xmlns:p="http://schemas.openxmlformats.org/presentationml/2006/main" xmlns:r="http://schemas.openxmlformats.org/officeDocument/2006/relationships">
+  <p:cSld>
+    <p:bg>
+      <p:bgPr>
+        <a:solidFill>
+          <a:srgbClr val="FFFFFF"/>
+        </a:solidFill>
+        <a:effectLst/>
+      </p:bgPr>
+    </p:bg>
+    <p:spTree>
+      <p:nvGrpSpPr>
+        <p:cNvPr id="1" name=""/>
+        <p:cNvGrpSpPr/>
+        <p:nvPr/>
+      </p:nvGrpSpPr>
+      <p:grpSpPr/>
+      <p:sp>
+        <p:nvSpPr>
+          <p:cNvPr id="2" name="Rectangle 1"/>
+          <p:cNvSpPr/>
+          <p:nvPr/>
+        </p:nvSpPr>
+        <p:spPr>
+          <a:xfrm>
+            <a:off x="0" y="0"/>
+            <a:ext cx="73152" cy="6858000"/>
+          </a:xfrm>
+          <a:prstGeom prst="rect">
+            <a:avLst/>
+          </a:prstGeom>
+          <a:solidFill>
+            <a:srgbClr val="003DA5"/>
+          </a:solidFill>
+          <a:ln>
+            <a:noFill/>
+          </a:ln>
+        </p:spPr>
+        <p:style>
+          <a:lnRef idx="1">
+            <a:schemeClr val="accent1"/>
+          </a:lnRef>
+          <a:fillRef idx="3">
+            <a:schemeClr val="accent1"/>
+          </a:fillRef>
+          <a:effectRef idx="2">
+            <a:schemeClr val="accent1"/>
+          </a:effectRef>
+          <a:fontRef idx="minor">
+            <a:schemeClr val="lt1"/>
+          </a:fontRef>
+        </p:style>
+        <p:txBody>
+          <a:bodyPr rtlCol="0" anchor="ctr"/>
+          <a:lstStyle/>
+          <a:p>
+            <a:pPr algn="ctr"/>
+          </a:p>
+        </p:txBody>
+      </p:sp>
+      <p:sp>
+        <p:nvSpPr>
+          <p:cNvPr id="3" name="TextBox 2"/>
+          <p:cNvSpPr txBox="1"/>
+          <p:nvPr/>
+        </p:nvSpPr>
+        <p:spPr>
+          <a:xfrm>
+            <a:off x="228600" y="182880"/>
+            <a:ext cx="11430000" cy="320040"/>
+          </a:xfrm>
+          <a:prstGeom prst="rect">
+            <a:avLst/>
+          </a:prstGeom>
+          <a:noFill/>
+        </p:spPr>
+        <p:txBody>
+          <a:bodyPr wrap="square">
+            <a:spAutoFit/>
+          </a:bodyPr>
+          <a:lstStyle/>
+          <a:p>
+            <a:pPr algn="l"/>
+            <a:r>
+              <a:rPr sz="900" b="0" i="0">
+                <a:solidFill>
+                  <a:srgbClr val="556575"/>
+                </a:solidFill>
+                <a:latin typeface="Arial"/>
+              </a:rPr>
+              <a:t>M14 · 4.3 Ertragsstruktur-Analyse im Bestand</a:t>
+            </a:r>
+          </a:p>
+        </p:txBody>
+      </p:sp>
+      <p:sp>
+        <p:nvSpPr>
+          <p:cNvPr id="4" name="TextBox 3"/>
+          <p:cNvSpPr txBox="1"/>
+          <p:nvPr/>
+        </p:nvSpPr>
+        <p:spPr>
+          <a:xfrm>
+            <a:off x="365760" y="274320"/>
+            <a:ext cx="11430000" cy="777240"/>
+          </a:xfrm>
+          <a:prstGeom prst="rect">
+            <a:avLst/>
+          </a:prstGeom>
+          <a:noFill/>
+        </p:spPr>
+        <p:txBody>
+          <a:bodyPr wrap="square">
+            <a:spAutoFit/>
+          </a:bodyPr>
+          <a:lstStyle/>
+          <a:p>
+            <a:pPr algn="l"/>
+            <a:r>
+              <a:rPr sz="2200" b="1" i="0">
+                <a:solidFill>
+                  <a:srgbClr val="003DA5"/>
+                </a:solidFill>
+                <a:latin typeface="Arial"/>
+              </a:rPr>
+              <a:t>Signale für Unterpreisierung</a:t>
+            </a:r>
+          </a:p>
+        </p:txBody>
+      </p:sp>
+      <p:sp>
+        <p:nvSpPr>
+          <p:cNvPr id="5" name="Rectangle 4"/>
+          <p:cNvSpPr/>
+          <p:nvPr/>
+        </p:nvSpPr>
+        <p:spPr>
+          <a:xfrm>
+            <a:off x="365760" y="1005840"/>
+            <a:ext cx="11430000" cy="27432"/>
+          </a:xfrm>
+          <a:prstGeom prst="rect">
+            <a:avLst/>
+          </a:prstGeom>
+          <a:solidFill>
+            <a:srgbClr val="D1D5DB"/>
+          </a:solidFill>
+          <a:ln>
+            <a:noFill/>
+          </a:ln>
+        </p:spPr>
+        <p:style>
+          <a:lnRef idx="1">
+            <a:schemeClr val="accent1"/>
+          </a:lnRef>
+          <a:fillRef idx="3">
+            <a:schemeClr val="accent1"/>
+          </a:fillRef>
+          <a:effectRef idx="2">
+            <a:schemeClr val="accent1"/>
+          </a:effectRef>
+          <a:fontRef idx="minor">
+            <a:schemeClr val="lt1"/>
+          </a:fontRef>
+        </p:style>
+        <p:txBody>
+          <a:bodyPr rtlCol="0" anchor="ctr"/>
+          <a:lstStyle/>
+          <a:p>
+            <a:pPr algn="ctr"/>
+          </a:p>
+        </p:txBody>
+      </p:sp>
+      <p:sp>
+        <p:nvSpPr>
+          <p:cNvPr id="6" name="TextBox 5"/>
+          <p:cNvSpPr txBox="1"/>
+          <p:nvPr/>
+        </p:nvSpPr>
+        <p:spPr>
+          <a:xfrm>
+            <a:off x="365760" y="1143000"/>
+            <a:ext cx="11430000" cy="5212080"/>
+          </a:xfrm>
+          <a:prstGeom prst="rect">
+            <a:avLst/>
+          </a:prstGeom>
+          <a:noFill/>
+        </p:spPr>
+        <p:txBody>
+          <a:bodyPr wrap="square">
+            <a:spAutoFit/>
+          </a:bodyPr>
+          <a:lstStyle/>
+          <a:p>
+            <a:pPr>
+              <a:spcBef>
+                <a:spcPts val="500"/>
+              </a:spcBef>
+            </a:pPr>
+            <a:r>
+              <a:rPr sz="1500">
+                <a:solidFill>
+                  <a:srgbClr val="003DA5"/>
+                </a:solidFill>
+                <a:latin typeface="Arial"/>
+              </a:rPr>
+              <a:t>▪  </a:t>
+            </a:r>
+            <a:r>
+              <a:rPr sz="1700">
+                <a:solidFill>
+                  <a:srgbClr val="1A1A1A"/>
+                </a:solidFill>
+                <a:latin typeface="Arial"/>
+              </a:rPr>
+              <a:t>Berater erkennen unterpreiste Engagements oft an folgenden Signalen: - Kreditmarge liegt deutlich unter Marktüblichkeit (Benchmarkcheck in agree) - Kein…</a:t>
+            </a:r>
+          </a:p>
+        </p:txBody>
+      </p:sp>
+    </p:spTree>
+  </p:cSld>
+  <p:clrMapOvr>
+    <a:masterClrMapping/>
+  </p:clrMapOvr>
+</p:sld>
+</file>
+
+<file path=ppt/slides/slide19.xml><?xml version="1.0" encoding="utf-8"?>
+<p:sld xmlns:a="http://schemas.openxmlformats.org/drawingml/2006/main" xmlns:p="http://schemas.openxmlformats.org/presentationml/2006/main" xmlns:r="http://schemas.openxmlformats.org/officeDocument/2006/relationships">
+  <p:cSld>
+    <p:bg>
+      <p:bgPr>
+        <a:solidFill>
+          <a:srgbClr val="1A1A1A"/>
+        </a:solidFill>
+        <a:effectLst/>
+      </p:bgPr>
+    </p:bg>
+    <p:spTree>
+      <p:nvGrpSpPr>
+        <p:cNvPr id="1" name=""/>
+        <p:cNvGrpSpPr/>
+        <p:nvPr/>
+      </p:nvGrpSpPr>
+      <p:grpSpPr/>
+      <p:sp>
+        <p:nvSpPr>
+          <p:cNvPr id="2" name="Rectangle 1"/>
+          <p:cNvSpPr/>
+          <p:nvPr/>
+        </p:nvSpPr>
+        <p:spPr>
+          <a:xfrm>
+            <a:off x="0" y="0"/>
+            <a:ext cx="73152" cy="6858000"/>
+          </a:xfrm>
+          <a:prstGeom prst="rect">
+            <a:avLst/>
+          </a:prstGeom>
+          <a:solidFill>
+            <a:srgbClr val="E05B00"/>
+          </a:solidFill>
+          <a:ln>
+            <a:noFill/>
+          </a:ln>
+        </p:spPr>
+        <p:style>
+          <a:lnRef idx="1">
+            <a:schemeClr val="accent1"/>
+          </a:lnRef>
+          <a:fillRef idx="3">
+            <a:schemeClr val="accent1"/>
+          </a:fillRef>
+          <a:effectRef idx="2">
+            <a:schemeClr val="accent1"/>
+          </a:effectRef>
+          <a:fontRef idx="minor">
+            <a:schemeClr val="lt1"/>
+          </a:fontRef>
+        </p:style>
+        <p:txBody>
+          <a:bodyPr rtlCol="0" anchor="ctr"/>
+          <a:lstStyle/>
+          <a:p>
+            <a:pPr algn="ctr"/>
+          </a:p>
+        </p:txBody>
+      </p:sp>
+      <p:sp>
+        <p:nvSpPr>
+          <p:cNvPr id="3" name="TextBox 2"/>
+          <p:cNvSpPr txBox="1"/>
+          <p:nvPr/>
+        </p:nvSpPr>
+        <p:spPr>
+          <a:xfrm>
+            <a:off x="365760" y="2011680"/>
+            <a:ext cx="11430000" cy="2011680"/>
+          </a:xfrm>
+          <a:prstGeom prst="rect">
+            <a:avLst/>
+          </a:prstGeom>
+          <a:noFill/>
+        </p:spPr>
+        <p:txBody>
+          <a:bodyPr wrap="square">
+            <a:spAutoFit/>
+          </a:bodyPr>
+          <a:lstStyle/>
+          <a:p>
+            <a:pPr algn="l"/>
+            <a:r>
+              <a:rPr sz="3600" b="1" i="0">
+                <a:solidFill>
+                  <a:srgbClr val="FFFFFF"/>
+                </a:solidFill>
+                <a:latin typeface="Arial"/>
+              </a:rPr>
+              <a:t>Vom Konditionengespräch zum Wertgespräch</a:t>
+            </a:r>
+          </a:p>
+        </p:txBody>
+      </p:sp>
+    </p:spTree>
+  </p:cSld>
+  <p:clrMapOvr>
+    <a:masterClrMapping/>
+  </p:clrMapOvr>
+</p:sld>
+</file>
+
+<file path=ppt/slides/slide2.xml><?xml version="1.0" encoding="utf-8"?>
+<p:sld xmlns:a="http://schemas.openxmlformats.org/drawingml/2006/main" xmlns:p="http://schemas.openxmlformats.org/presentationml/2006/main" xmlns:r="http://schemas.openxmlformats.org/officeDocument/2006/relationships">
+  <p:cSld>
+    <p:bg>
+      <p:bgPr>
+        <a:solidFill>
+          <a:srgbClr val="F4F6FA"/>
+        </a:solidFill>
+        <a:effectLst/>
+      </p:bgPr>
+    </p:bg>
+    <p:spTree>
+      <p:nvGrpSpPr>
+        <p:cNvPr id="1" name=""/>
+        <p:cNvGrpSpPr/>
+        <p:nvPr/>
+      </p:nvGrpSpPr>
+      <p:grpSpPr/>
+      <p:sp>
+        <p:nvSpPr>
+          <p:cNvPr id="2" name="Rectangle 1"/>
+          <p:cNvSpPr/>
+          <p:nvPr/>
+        </p:nvSpPr>
+        <p:spPr>
+          <a:xfrm>
+            <a:off x="0" y="0"/>
+            <a:ext cx="73152" cy="6858000"/>
+          </a:xfrm>
+          <a:prstGeom prst="rect">
+            <a:avLst/>
+          </a:prstGeom>
+          <a:solidFill>
+            <a:srgbClr val="003DA5"/>
+          </a:solidFill>
+          <a:ln>
+            <a:noFill/>
+          </a:ln>
+        </p:spPr>
+        <p:style>
+          <a:lnRef idx="1">
+            <a:schemeClr val="accent1"/>
+          </a:lnRef>
+          <a:fillRef idx="3">
+            <a:schemeClr val="accent1"/>
+          </a:fillRef>
+          <a:effectRef idx="2">
+            <a:schemeClr val="accent1"/>
+          </a:effectRef>
+          <a:fontRef idx="minor">
+            <a:schemeClr val="lt1"/>
+          </a:fontRef>
+        </p:style>
+        <p:txBody>
+          <a:bodyPr rtlCol="0" anchor="ctr"/>
+          <a:lstStyle/>
+          <a:p>
+            <a:pPr algn="ctr"/>
+          </a:p>
+        </p:txBody>
+      </p:sp>
+      <p:sp>
+        <p:nvSpPr>
+          <p:cNvPr id="3" name="Rectangle 2"/>
+          <p:cNvSpPr/>
+          <p:nvPr/>
+        </p:nvSpPr>
+        <p:spPr>
+          <a:xfrm>
+            <a:off x="228600" y="804672"/>
+            <a:ext cx="11612880" cy="22860"/>
+          </a:xfrm>
+          <a:prstGeom prst="rect">
+            <a:avLst/>
+          </a:prstGeom>
+          <a:solidFill>
+            <a:srgbClr val="D1D5DB"/>
+          </a:solidFill>
+          <a:ln>
+            <a:noFill/>
+          </a:ln>
+        </p:spPr>
+        <p:style>
+          <a:lnRef idx="1">
+            <a:schemeClr val="accent1"/>
+          </a:lnRef>
+          <a:fillRef idx="3">
+            <a:schemeClr val="accent1"/>
+          </a:fillRef>
+          <a:effectRef idx="2">
+            <a:schemeClr val="accent1"/>
+          </a:effectRef>
+          <a:fontRef idx="minor">
+            <a:schemeClr val="lt1"/>
+          </a:fontRef>
+        </p:style>
+        <p:txBody>
+          <a:bodyPr rtlCol="0" anchor="ctr"/>
+          <a:lstStyle/>
+          <a:p>
+            <a:pPr algn="ctr"/>
+          </a:p>
+        </p:txBody>
+      </p:sp>
+      <p:sp>
+        <p:nvSpPr>
+          <p:cNvPr id="4" name="TextBox 3"/>
+          <p:cNvSpPr txBox="1"/>
+          <p:nvPr/>
+        </p:nvSpPr>
+        <p:spPr>
+          <a:xfrm>
+            <a:off x="365760" y="320040"/>
+            <a:ext cx="4572000" cy="347472"/>
+          </a:xfrm>
+          <a:prstGeom prst="rect">
+            <a:avLst/>
+          </a:prstGeom>
+          <a:noFill/>
+        </p:spPr>
+        <p:txBody>
+          <a:bodyPr wrap="square">
+            <a:spAutoFit/>
+          </a:bodyPr>
+          <a:lstStyle/>
+          <a:p>
+            <a:pPr algn="l"/>
+            <a:r>
+              <a:rPr sz="900" b="1" i="0">
+                <a:solidFill>
+                  <a:srgbClr val="003DA5"/>
+                </a:solidFill>
+                <a:latin typeface="Arial"/>
+              </a:rPr>
+              <a:t>LERNZIELE</a:t>
+            </a:r>
+          </a:p>
+        </p:txBody>
+      </p:sp>
+      <p:sp>
+        <p:nvSpPr>
+          <p:cNvPr id="5" name="TextBox 4"/>
+          <p:cNvSpPr txBox="1"/>
+          <p:nvPr/>
+        </p:nvSpPr>
+        <p:spPr>
+          <a:xfrm>
+            <a:off x="365760" y="502920"/>
+            <a:ext cx="10058400" cy="640080"/>
+          </a:xfrm>
+          <a:prstGeom prst="rect">
+            <a:avLst/>
+          </a:prstGeom>
+          <a:noFill/>
+        </p:spPr>
+        <p:txBody>
+          <a:bodyPr wrap="square">
+            <a:spAutoFit/>
+          </a:bodyPr>
+          <a:lstStyle/>
+          <a:p>
+            <a:pPr algn="l"/>
+            <a:r>
+              <a:rPr sz="2400" b="1" i="0">
+                <a:solidFill>
+                  <a:srgbClr val="1A1A1A"/>
+                </a:solidFill>
+                <a:latin typeface="Arial"/>
+              </a:rPr>
+              <a:t>Was Sie nach diesem Modul können.</a:t>
+            </a:r>
+          </a:p>
+        </p:txBody>
+      </p:sp>
+      <p:sp>
+        <p:nvSpPr>
+          <p:cNvPr id="6" name="TextBox 5"/>
+          <p:cNvSpPr txBox="1"/>
+          <p:nvPr/>
+        </p:nvSpPr>
+        <p:spPr>
+          <a:xfrm>
+            <a:off x="365760" y="1234440"/>
+            <a:ext cx="11430000" cy="5303520"/>
+          </a:xfrm>
+          <a:prstGeom prst="rect">
+            <a:avLst/>
+          </a:prstGeom>
+          <a:noFill/>
+        </p:spPr>
+        <p:txBody>
+          <a:bodyPr wrap="square">
+            <a:spAutoFit/>
+          </a:bodyPr>
+          <a:lstStyle/>
+          <a:p>
+            <a:pPr>
+              <a:spcBef>
+                <a:spcPts val="500"/>
+              </a:spcBef>
+            </a:pPr>
+            <a:r>
+              <a:rPr sz="1500">
+                <a:solidFill>
+                  <a:srgbClr val="003DA5"/>
+                </a:solidFill>
+                <a:latin typeface="Arial"/>
+              </a:rPr>
+              <a:t>▪  </a:t>
+            </a:r>
+            <a:r>
+              <a:rPr sz="1700">
+                <a:solidFill>
+                  <a:srgbClr val="1A1A1A"/>
+                </a:solidFill>
+                <a:latin typeface="Arial"/>
+              </a:rPr>
+              <a:t>Den Kundendeckungsbeitrag anhand der vier Ertragskomponenten berechnen</a:t>
+            </a:r>
+          </a:p>
+          <a:p>
+            <a:pPr>
+              <a:spcBef>
+                <a:spcPts val="500"/>
+              </a:spcBef>
+            </a:pPr>
+            <a:r>
+              <a:rPr sz="1500">
+                <a:solidFill>
+                  <a:srgbClr val="003DA5"/>
+                </a:solidFill>
+                <a:latin typeface="Arial"/>
+              </a:rPr>
+              <a:t>▪  </a:t>
+            </a:r>
+            <a:r>
+              <a:rPr sz="1700">
+                <a:solidFill>
+                  <a:srgbClr val="1A1A1A"/>
+                </a:solidFill>
+                <a:latin typeface="Arial"/>
+              </a:rPr>
+              <a:t>Die Ertragsstruktur eines Kunden analysieren und die größten Optimierungshebel identifizieren</a:t>
+            </a:r>
+          </a:p>
+          <a:p>
+            <a:pPr>
+              <a:spcBef>
+                <a:spcPts val="500"/>
+              </a:spcBef>
+            </a:pPr>
+            <a:r>
+              <a:rPr sz="1500">
+                <a:solidFill>
+                  <a:srgbClr val="003DA5"/>
+                </a:solidFill>
+                <a:latin typeface="Arial"/>
+              </a:rPr>
+              <a:t>▪  </a:t>
+            </a:r>
+            <a:r>
+              <a:rPr sz="1700">
+                <a:solidFill>
+                  <a:srgbClr val="1A1A1A"/>
+                </a:solidFill>
+                <a:latin typeface="Arial"/>
+              </a:rPr>
+              <a:t>Den Expected Loss in der Konditionenkalkulation erklären und bewerten, ob eine Beziehung risikogerecht bepreist ist</a:t>
+            </a:r>
+          </a:p>
+          <a:p>
+            <a:pPr>
+              <a:spcBef>
+                <a:spcPts val="500"/>
+              </a:spcBef>
+            </a:pPr>
+            <a:r>
+              <a:rPr sz="1500">
+                <a:solidFill>
+                  <a:srgbClr val="003DA5"/>
+                </a:solidFill>
+                <a:latin typeface="Arial"/>
+              </a:rPr>
+              <a:t>▪  </a:t>
+            </a:r>
+            <a:r>
+              <a:rPr sz="1700">
+                <a:solidFill>
+                  <a:srgbClr val="1A1A1A"/>
+                </a:solidFill>
+                <a:latin typeface="Arial"/>
+              </a:rPr>
+              <a:t>Drei Optimierungsszenarien bewerten und die ertragswirksamste Option wählen</a:t>
+            </a:r>
+          </a:p>
+          <a:p>
+            <a:pPr>
+              <a:spcBef>
+                <a:spcPts val="500"/>
+              </a:spcBef>
+            </a:pPr>
+            <a:r>
+              <a:rPr sz="1500">
+                <a:solidFill>
+                  <a:srgbClr val="003DA5"/>
+                </a:solidFill>
+                <a:latin typeface="Arial"/>
+              </a:rPr>
+              <a:t>▪  </a:t>
+            </a:r>
+            <a:r>
+              <a:rPr sz="1700">
+                <a:solidFill>
+                  <a:srgbClr val="1A1A1A"/>
+                </a:solidFill>
+                <a:latin typeface="Arial"/>
+              </a:rPr>
+              <a:t>Ein Konditionengespräch wertbasiert führen – Nutzen kommunizieren bevor über Konditionen gesprochen wird</a:t>
+            </a:r>
+          </a:p>
+        </p:txBody>
+      </p:sp>
+    </p:spTree>
+  </p:cSld>
+  <p:clrMapOvr>
+    <a:masterClrMapping/>
+  </p:clrMapOvr>
+</p:sld>
+</file>
+
+<file path=ppt/slides/slide20.xml><?xml version="1.0" encoding="utf-8"?>
+<p:sld xmlns:a="http://schemas.openxmlformats.org/drawingml/2006/main" xmlns:p="http://schemas.openxmlformats.org/presentationml/2006/main" xmlns:r="http://schemas.openxmlformats.org/officeDocument/2006/relationships">
+  <p:cSld>
+    <p:bg>
+      <p:bgPr>
+        <a:solidFill>
+          <a:srgbClr val="FFFFFF"/>
+        </a:solidFill>
+        <a:effectLst/>
+      </p:bgPr>
+    </p:bg>
+    <p:spTree>
+      <p:nvGrpSpPr>
+        <p:cNvPr id="1" name=""/>
+        <p:cNvGrpSpPr/>
+        <p:nvPr/>
+      </p:nvGrpSpPr>
+      <p:grpSpPr/>
+      <p:sp>
+        <p:nvSpPr>
+          <p:cNvPr id="2" name="Rectangle 1"/>
+          <p:cNvSpPr/>
+          <p:nvPr/>
+        </p:nvSpPr>
+        <p:spPr>
+          <a:xfrm>
+            <a:off x="0" y="0"/>
+            <a:ext cx="73152" cy="6858000"/>
+          </a:xfrm>
+          <a:prstGeom prst="rect">
+            <a:avLst/>
+          </a:prstGeom>
+          <a:solidFill>
+            <a:srgbClr val="003DA5"/>
+          </a:solidFill>
+          <a:ln>
+            <a:noFill/>
+          </a:ln>
+        </p:spPr>
+        <p:style>
+          <a:lnRef idx="1">
+            <a:schemeClr val="accent1"/>
+          </a:lnRef>
+          <a:fillRef idx="3">
+            <a:schemeClr val="accent1"/>
+          </a:fillRef>
+          <a:effectRef idx="2">
+            <a:schemeClr val="accent1"/>
+          </a:effectRef>
+          <a:fontRef idx="minor">
+            <a:schemeClr val="lt1"/>
+          </a:fontRef>
+        </p:style>
+        <p:txBody>
+          <a:bodyPr rtlCol="0" anchor="ctr"/>
+          <a:lstStyle/>
+          <a:p>
+            <a:pPr algn="ctr"/>
+          </a:p>
+        </p:txBody>
+      </p:sp>
+      <p:sp>
+        <p:nvSpPr>
+          <p:cNvPr id="3" name="TextBox 2"/>
+          <p:cNvSpPr txBox="1"/>
+          <p:nvPr/>
+        </p:nvSpPr>
+        <p:spPr>
+          <a:xfrm>
+            <a:off x="228600" y="182880"/>
+            <a:ext cx="11430000" cy="320040"/>
+          </a:xfrm>
+          <a:prstGeom prst="rect">
+            <a:avLst/>
+          </a:prstGeom>
+          <a:noFill/>
+        </p:spPr>
+        <p:txBody>
+          <a:bodyPr wrap="square">
+            <a:spAutoFit/>
+          </a:bodyPr>
+          <a:lstStyle/>
+          <a:p>
+            <a:pPr algn="l"/>
+            <a:r>
+              <a:rPr sz="900" b="0" i="0">
+                <a:solidFill>
+                  <a:srgbClr val="556575"/>
+                </a:solidFill>
+                <a:latin typeface="Arial"/>
+              </a:rPr>
+              <a:t>M14 · 4.4 Das Konditionengespräch wertbasiert führen</a:t>
+            </a:r>
+          </a:p>
+        </p:txBody>
+      </p:sp>
+      <p:sp>
+        <p:nvSpPr>
+          <p:cNvPr id="4" name="TextBox 3"/>
+          <p:cNvSpPr txBox="1"/>
+          <p:nvPr/>
+        </p:nvSpPr>
+        <p:spPr>
+          <a:xfrm>
+            <a:off x="365760" y="274320"/>
+            <a:ext cx="11430000" cy="777240"/>
+          </a:xfrm>
+          <a:prstGeom prst="rect">
+            <a:avLst/>
+          </a:prstGeom>
+          <a:noFill/>
+        </p:spPr>
+        <p:txBody>
+          <a:bodyPr wrap="square">
+            <a:spAutoFit/>
+          </a:bodyPr>
+          <a:lstStyle/>
+          <a:p>
+            <a:pPr algn="l"/>
+            <a:r>
+              <a:rPr sz="2200" b="1" i="0">
+                <a:solidFill>
+                  <a:srgbClr val="003DA5"/>
+                </a:solidFill>
+                <a:latin typeface="Arial"/>
+              </a:rPr>
+              <a:t>Vom Konditionengespräch zum Wertgespräch</a:t>
+            </a:r>
+          </a:p>
+        </p:txBody>
+      </p:sp>
+      <p:sp>
+        <p:nvSpPr>
+          <p:cNvPr id="5" name="Rectangle 4"/>
+          <p:cNvSpPr/>
+          <p:nvPr/>
+        </p:nvSpPr>
+        <p:spPr>
+          <a:xfrm>
+            <a:off x="365760" y="1005840"/>
+            <a:ext cx="11430000" cy="27432"/>
+          </a:xfrm>
+          <a:prstGeom prst="rect">
+            <a:avLst/>
+          </a:prstGeom>
+          <a:solidFill>
+            <a:srgbClr val="D1D5DB"/>
+          </a:solidFill>
+          <a:ln>
+            <a:noFill/>
+          </a:ln>
+        </p:spPr>
+        <p:style>
+          <a:lnRef idx="1">
+            <a:schemeClr val="accent1"/>
+          </a:lnRef>
+          <a:fillRef idx="3">
+            <a:schemeClr val="accent1"/>
+          </a:fillRef>
+          <a:effectRef idx="2">
+            <a:schemeClr val="accent1"/>
+          </a:effectRef>
+          <a:fontRef idx="minor">
+            <a:schemeClr val="lt1"/>
+          </a:fontRef>
+        </p:style>
+        <p:txBody>
+          <a:bodyPr rtlCol="0" anchor="ctr"/>
+          <a:lstStyle/>
+          <a:p>
+            <a:pPr algn="ctr"/>
+          </a:p>
+        </p:txBody>
+      </p:sp>
+      <p:sp>
+        <p:nvSpPr>
+          <p:cNvPr id="6" name="TextBox 5"/>
+          <p:cNvSpPr txBox="1"/>
+          <p:nvPr/>
+        </p:nvSpPr>
+        <p:spPr>
+          <a:xfrm>
+            <a:off x="365760" y="1143000"/>
+            <a:ext cx="11430000" cy="5212080"/>
+          </a:xfrm>
+          <a:prstGeom prst="rect">
+            <a:avLst/>
+          </a:prstGeom>
+          <a:noFill/>
+        </p:spPr>
+        <p:txBody>
+          <a:bodyPr wrap="square">
+            <a:spAutoFit/>
+          </a:bodyPr>
+          <a:lstStyle/>
+          <a:p>
+            <a:pPr>
+              <a:spcBef>
+                <a:spcPts val="500"/>
+              </a:spcBef>
+            </a:pPr>
+            <a:r>
+              <a:rPr sz="1500">
+                <a:solidFill>
+                  <a:srgbClr val="003DA5"/>
+                </a:solidFill>
+                <a:latin typeface="Arial"/>
+              </a:rPr>
+              <a:t>▪  </a:t>
+            </a:r>
+            <a:r>
+              <a:rPr sz="1700" b="1">
+                <a:solidFill>
+                  <a:srgbClr val="003DA5"/>
+                </a:solidFill>
+                <a:latin typeface="Arial"/>
+              </a:rPr>
+              <a:t>Phase 1: Wert der Beziehung artikulieren: </a:t>
+            </a:r>
+            <a:r>
+              <a:rPr sz="1700">
+                <a:solidFill>
+                  <a:srgbClr val="1A1A1A"/>
+                </a:solidFill>
+                <a:latin typeface="Arial"/>
+              </a:rPr>
+              <a:t>Bevor Konditionen angesprochen werden, wird der Nutzen der Bankbeziehung konkret gemacht: schnelle Kreditentscheidungen, Verbundpartner-Einbindung, Beratungsleistung,…</a:t>
+            </a:r>
+          </a:p>
+          <a:p>
+            <a:pPr>
+              <a:spcBef>
+                <a:spcPts val="500"/>
+              </a:spcBef>
+            </a:pPr>
+            <a:r>
+              <a:rPr sz="1500">
+                <a:solidFill>
+                  <a:srgbClr val="003DA5"/>
+                </a:solidFill>
+                <a:latin typeface="Arial"/>
+              </a:rPr>
+              <a:t>▪  </a:t>
+            </a:r>
+            <a:r>
+              <a:rPr sz="1700" b="1">
+                <a:solidFill>
+                  <a:srgbClr val="003DA5"/>
+                </a:solidFill>
+                <a:latin typeface="Arial"/>
+              </a:rPr>
+              <a:t>Phase 2: Marktumfeld erklären: </a:t>
+            </a:r>
+            <a:r>
+              <a:rPr sz="1700">
+                <a:solidFill>
+                  <a:srgbClr val="1A1A1A"/>
+                </a:solidFill>
+                <a:latin typeface="Arial"/>
+              </a:rPr>
+              <a:t>Zinsentwicklung, Refinanzierungskosten, Risikoumfeld transparent machen – ohne Details zu internen Kalkulationen preiszugeben.</a:t>
+            </a:r>
+          </a:p>
+          <a:p>
+            <a:pPr>
+              <a:spcBef>
+                <a:spcPts val="500"/>
+              </a:spcBef>
+            </a:pPr>
+            <a:r>
+              <a:rPr sz="1500">
+                <a:solidFill>
+                  <a:srgbClr val="003DA5"/>
+                </a:solidFill>
+                <a:latin typeface="Arial"/>
+              </a:rPr>
+              <a:t>▪  </a:t>
+            </a:r>
+            <a:r>
+              <a:rPr sz="1700" b="1">
+                <a:solidFill>
+                  <a:srgbClr val="003DA5"/>
+                </a:solidFill>
+                <a:latin typeface="Arial"/>
+              </a:rPr>
+              <a:t>Phase 3: Konditionen transparent kommunizieren: </a:t>
+            </a:r>
+            <a:r>
+              <a:rPr sz="1700">
+                <a:solidFill>
+                  <a:srgbClr val="1A1A1A"/>
+                </a:solidFill>
+                <a:latin typeface="Arial"/>
+              </a:rPr>
+              <a:t>Erst jetzt die konkrete Anpassung benennen – mit Begründung, nicht als einseitige Mitteilung. „Auf Basis dieser Entwicklung möchten wir die Marge um X Basispunkte anpassen. Was…</a:t>
+            </a:r>
+          </a:p>
+          <a:p>
+            <a:pPr>
+              <a:spcBef>
+                <a:spcPts val="500"/>
+              </a:spcBef>
+            </a:pPr>
+            <a:r>
+              <a:rPr sz="1500">
+                <a:solidFill>
+                  <a:srgbClr val="003DA5"/>
+                </a:solidFill>
+                <a:latin typeface="Arial"/>
+              </a:rPr>
+              <a:t>▪  </a:t>
+            </a:r>
+            <a:r>
+              <a:rPr sz="1700" b="1">
+                <a:solidFill>
+                  <a:srgbClr val="003DA5"/>
+                </a:solidFill>
+                <a:latin typeface="Arial"/>
+              </a:rPr>
+              <a:t>Phase 4: Alternativen anbieten: </a:t>
+            </a:r>
+            <a:r>
+              <a:rPr sz="1700">
+                <a:solidFill>
+                  <a:srgbClr val="1A1A1A"/>
+                </a:solidFill>
+                <a:latin typeface="Arial"/>
+              </a:rPr>
+              <a:t>Dem Kunden Optionen geben: „Wenn wir die Besicherung verbessern, könnten wir bei der Marge etwas flexibler sein." Oder: „Wenn Sie das R+V-Paket hinzunehmen, sehen wir die…</a:t>
+            </a:r>
+          </a:p>
+        </p:txBody>
+      </p:sp>
+    </p:spTree>
+  </p:cSld>
+  <p:clrMapOvr>
+    <a:masterClrMapping/>
+  </p:clrMapOvr>
+</p:sld>
+</file>
+
+<file path=ppt/slides/slide21.xml><?xml version="1.0" encoding="utf-8"?>
+<p:sld xmlns:a="http://schemas.openxmlformats.org/drawingml/2006/main" xmlns:p="http://schemas.openxmlformats.org/presentationml/2006/main" xmlns:r="http://schemas.openxmlformats.org/officeDocument/2006/relationships">
+  <p:cSld>
+    <p:bg>
+      <p:bgPr>
+        <a:solidFill>
+          <a:srgbClr val="1A1A1A"/>
+        </a:solidFill>
+        <a:effectLst/>
+      </p:bgPr>
+    </p:bg>
+    <p:spTree>
+      <p:nvGrpSpPr>
+        <p:cNvPr id="1" name=""/>
+        <p:cNvGrpSpPr/>
+        <p:nvPr/>
+      </p:nvGrpSpPr>
+      <p:grpSpPr/>
+      <p:sp>
+        <p:nvSpPr>
+          <p:cNvPr id="2" name="Rectangle 1"/>
+          <p:cNvSpPr/>
+          <p:nvPr/>
+        </p:nvSpPr>
+        <p:spPr>
+          <a:xfrm>
+            <a:off x="0" y="0"/>
+            <a:ext cx="73152" cy="6858000"/>
+          </a:xfrm>
+          <a:prstGeom prst="rect">
+            <a:avLst/>
+          </a:prstGeom>
+          <a:solidFill>
+            <a:srgbClr val="E05B00"/>
+          </a:solidFill>
+          <a:ln>
+            <a:noFill/>
+          </a:ln>
+        </p:spPr>
+        <p:style>
+          <a:lnRef idx="1">
+            <a:schemeClr val="accent1"/>
+          </a:lnRef>
+          <a:fillRef idx="3">
+            <a:schemeClr val="accent1"/>
+          </a:fillRef>
+          <a:effectRef idx="2">
+            <a:schemeClr val="accent1"/>
+          </a:effectRef>
+          <a:fontRef idx="minor">
+            <a:schemeClr val="lt1"/>
+          </a:fontRef>
+        </p:style>
+        <p:txBody>
+          <a:bodyPr rtlCol="0" anchor="ctr"/>
+          <a:lstStyle/>
+          <a:p>
+            <a:pPr algn="ctr"/>
+          </a:p>
+        </p:txBody>
+      </p:sp>
+      <p:sp>
+        <p:nvSpPr>
+          <p:cNvPr id="3" name="TextBox 2"/>
+          <p:cNvSpPr txBox="1"/>
+          <p:nvPr/>
+        </p:nvSpPr>
+        <p:spPr>
+          <a:xfrm>
+            <a:off x="365760" y="2011680"/>
+            <a:ext cx="11430000" cy="2011680"/>
+          </a:xfrm>
+          <a:prstGeom prst="rect">
+            <a:avLst/>
+          </a:prstGeom>
+          <a:noFill/>
+        </p:spPr>
+        <p:txBody>
+          <a:bodyPr wrap="square">
+            <a:spAutoFit/>
+          </a:bodyPr>
+          <a:lstStyle/>
+          <a:p>
+            <a:pPr algn="l"/>
+            <a:r>
+              <a:rPr sz="3600" b="1" i="0">
+                <a:solidFill>
+                  <a:srgbClr val="FFFFFF"/>
+                </a:solidFill>
+                <a:latin typeface="Arial"/>
+              </a:rPr>
+              <a:t>Arbeitsblatt A: Deckungsbeitragsrechnung</a:t>
+            </a:r>
+          </a:p>
+        </p:txBody>
+      </p:sp>
+    </p:spTree>
+  </p:cSld>
+  <p:clrMapOvr>
+    <a:masterClrMapping/>
+  </p:clrMapOvr>
+</p:sld>
+</file>
+
+<file path=ppt/slides/slide22.xml><?xml version="1.0" encoding="utf-8"?>
+<p:sld xmlns:a="http://schemas.openxmlformats.org/drawingml/2006/main" xmlns:p="http://schemas.openxmlformats.org/presentationml/2006/main" xmlns:r="http://schemas.openxmlformats.org/officeDocument/2006/relationships">
+  <p:cSld>
+    <p:bg>
+      <p:bgPr>
+        <a:solidFill>
+          <a:srgbClr val="FFFFFF"/>
+        </a:solidFill>
+        <a:effectLst/>
+      </p:bgPr>
+    </p:bg>
+    <p:spTree>
+      <p:nvGrpSpPr>
+        <p:cNvPr id="1" name=""/>
+        <p:cNvGrpSpPr/>
+        <p:nvPr/>
+      </p:nvGrpSpPr>
+      <p:grpSpPr/>
+      <p:sp>
+        <p:nvSpPr>
+          <p:cNvPr id="2" name="Rectangle 1"/>
+          <p:cNvSpPr/>
+          <p:nvPr/>
+        </p:nvSpPr>
+        <p:spPr>
+          <a:xfrm>
+            <a:off x="0" y="0"/>
+            <a:ext cx="73152" cy="6858000"/>
+          </a:xfrm>
+          <a:prstGeom prst="rect">
+            <a:avLst/>
+          </a:prstGeom>
+          <a:solidFill>
+            <a:srgbClr val="003DA5"/>
+          </a:solidFill>
+          <a:ln>
+            <a:noFill/>
+          </a:ln>
+        </p:spPr>
+        <p:style>
+          <a:lnRef idx="1">
+            <a:schemeClr val="accent1"/>
+          </a:lnRef>
+          <a:fillRef idx="3">
+            <a:schemeClr val="accent1"/>
+          </a:fillRef>
+          <a:effectRef idx="2">
+            <a:schemeClr val="accent1"/>
+          </a:effectRef>
+          <a:fontRef idx="minor">
+            <a:schemeClr val="lt1"/>
+          </a:fontRef>
+        </p:style>
+        <p:txBody>
+          <a:bodyPr rtlCol="0" anchor="ctr"/>
+          <a:lstStyle/>
+          <a:p>
+            <a:pPr algn="ctr"/>
+          </a:p>
+        </p:txBody>
+      </p:sp>
+      <p:sp>
+        <p:nvSpPr>
+          <p:cNvPr id="3" name="TextBox 2"/>
+          <p:cNvSpPr txBox="1"/>
+          <p:nvPr/>
+        </p:nvSpPr>
+        <p:spPr>
+          <a:xfrm>
+            <a:off x="228600" y="182880"/>
+            <a:ext cx="11430000" cy="320040"/>
+          </a:xfrm>
+          <a:prstGeom prst="rect">
+            <a:avLst/>
+          </a:prstGeom>
+          <a:noFill/>
+        </p:spPr>
+        <p:txBody>
+          <a:bodyPr wrap="square">
+            <a:spAutoFit/>
+          </a:bodyPr>
+          <a:lstStyle/>
+          <a:p>
+            <a:pPr algn="l"/>
+            <a:r>
+              <a:rPr sz="900" b="0" i="0">
+                <a:solidFill>
+                  <a:srgbClr val="556575"/>
+                </a:solidFill>
+                <a:latin typeface="Arial"/>
+              </a:rPr>
+              <a:t>M14 · 4.6 Arbeitsblätter</a:t>
+            </a:r>
+          </a:p>
+        </p:txBody>
+      </p:sp>
+      <p:sp>
+        <p:nvSpPr>
+          <p:cNvPr id="4" name="TextBox 3"/>
+          <p:cNvSpPr txBox="1"/>
+          <p:nvPr/>
+        </p:nvSpPr>
+        <p:spPr>
+          <a:xfrm>
+            <a:off x="365760" y="274320"/>
+            <a:ext cx="11430000" cy="777240"/>
+          </a:xfrm>
+          <a:prstGeom prst="rect">
+            <a:avLst/>
+          </a:prstGeom>
+          <a:noFill/>
+        </p:spPr>
+        <p:txBody>
+          <a:bodyPr wrap="square">
+            <a:spAutoFit/>
+          </a:bodyPr>
+          <a:lstStyle/>
+          <a:p>
+            <a:pPr algn="l"/>
+            <a:r>
+              <a:rPr sz="2200" b="1" i="0">
+                <a:solidFill>
+                  <a:srgbClr val="003DA5"/>
+                </a:solidFill>
+                <a:latin typeface="Arial"/>
+              </a:rPr>
+              <a:t>Arbeitsblatt A: Deckungsbeitragsrechnung</a:t>
+            </a:r>
+          </a:p>
+        </p:txBody>
+      </p:sp>
+      <p:sp>
+        <p:nvSpPr>
+          <p:cNvPr id="5" name="Rectangle 4"/>
+          <p:cNvSpPr/>
+          <p:nvPr/>
+        </p:nvSpPr>
+        <p:spPr>
+          <a:xfrm>
+            <a:off x="365760" y="1005840"/>
+            <a:ext cx="11430000" cy="27432"/>
+          </a:xfrm>
+          <a:prstGeom prst="rect">
+            <a:avLst/>
+          </a:prstGeom>
+          <a:solidFill>
+            <a:srgbClr val="D1D5DB"/>
+          </a:solidFill>
+          <a:ln>
+            <a:noFill/>
+          </a:ln>
+        </p:spPr>
+        <p:style>
+          <a:lnRef idx="1">
+            <a:schemeClr val="accent1"/>
+          </a:lnRef>
+          <a:fillRef idx="3">
+            <a:schemeClr val="accent1"/>
+          </a:fillRef>
+          <a:effectRef idx="2">
+            <a:schemeClr val="accent1"/>
+          </a:effectRef>
+          <a:fontRef idx="minor">
+            <a:schemeClr val="lt1"/>
+          </a:fontRef>
+        </p:style>
+        <p:txBody>
+          <a:bodyPr rtlCol="0" anchor="ctr"/>
+          <a:lstStyle/>
+          <a:p>
+            <a:pPr algn="ctr"/>
+          </a:p>
+        </p:txBody>
+      </p:sp>
+      <p:graphicFrame>
+        <p:nvGraphicFramePr>
+          <p:cNvPr id="6" name="Table 5"/>
+          <p:cNvGraphicFramePr>
+            <a:graphicFrameLocks noGrp="1"/>
+          </p:cNvGraphicFramePr>
+          <p:nvPr/>
+        </p:nvGraphicFramePr>
+        <p:xfrm>
+          <a:off x="365760" y="1143000"/>
+          <a:ext cx="11430000" cy="5029200"/>
+        </p:xfrm>
+        <a:graphic>
+          <a:graphicData uri="http://schemas.openxmlformats.org/drawingml/2006/table">
+            <a:tbl>
+              <a:tblPr firstRow="1" bandRow="1">
+                <a:tableStyleId>{5C22544A-7EE6-4342-B048-85BDC9FD1C3A}</a:tableStyleId>
+              </a:tblPr>
+              <a:tblGrid>
+                <a:gridCol w="5715000"/>
+                <a:gridCol w="5715000"/>
+              </a:tblGrid>
+              <a:tr h="457200">
+                <a:tc>
+                  <a:txBody>
+                    <a:bodyPr wrap="square"/>
+                    <a:lstStyle/>
+                    <a:p>
+                      <a:r>
+                        <a:rPr sz="1100" b="1">
+                          <a:solidFill>
+                            <a:srgbClr val="FFFFFF"/>
+                          </a:solidFill>
+                          <a:latin typeface="Arial"/>
+                        </a:rPr>
+                        <a:t>Position</a:t>
+                      </a:r>
+                    </a:p>
+                  </a:txBody>
+                  <a:tcPr>
+                    <a:solidFill>
+                      <a:srgbClr val="003DA5"/>
+                    </a:solidFill>
+                  </a:tcPr>
+                </a:tc>
+                <a:tc>
+                  <a:txBody>
+                    <a:bodyPr wrap="square"/>
+                    <a:lstStyle/>
+                    <a:p>
+                      <a:r>
+                        <a:rPr sz="1100" b="1">
+                          <a:solidFill>
+                            <a:srgbClr val="FFFFFF"/>
+                          </a:solidFill>
+                          <a:latin typeface="Arial"/>
+                        </a:rPr>
+                        <a:t>Betrag p.a. (EUR)</a:t>
+                      </a:r>
+                    </a:p>
+                  </a:txBody>
+                  <a:tcPr>
+                    <a:solidFill>
+                      <a:srgbClr val="003DA5"/>
+                    </a:solidFill>
+                  </a:tcPr>
+                </a:tc>
+              </a:tr>
+              <a:tr h="457200">
+                <a:tc>
+                  <a:txBody>
+                    <a:bodyPr wrap="square"/>
+                    <a:lstStyle/>
+                    <a:p>
+                      <a:r>
+                        <a:rPr sz="1100" b="0">
+                          <a:solidFill>
+                            <a:srgbClr val="1A1A1A"/>
+                          </a:solidFill>
+                          <a:latin typeface="Arial"/>
+                        </a:rPr>
+                        <a:t>Kreditmarge ( ___ % × ___ EUR)</a:t>
+                      </a:r>
+                    </a:p>
+                  </a:txBody>
+                  <a:tcPr>
+                    <a:solidFill>
+                      <a:srgbClr val="FFFFFF"/>
+                    </a:solidFill>
+                  </a:tcPr>
+                </a:tc>
+                <a:tc>
+                  <a:txBody>
+                    <a:bodyPr wrap="square"/>
+                    <a:lstStyle/>
+                    <a:p>
+                      <a:r>
+                        <a:rPr sz="1100" b="0">
+                          <a:solidFill>
+                            <a:srgbClr val="1A1A1A"/>
+                          </a:solidFill>
+                          <a:latin typeface="Arial"/>
+                        </a:rPr>
+                        <a:t/>
+                      </a:r>
+                    </a:p>
+                  </a:txBody>
+                  <a:tcPr>
+                    <a:solidFill>
+                      <a:srgbClr val="FFFFFF"/>
+                    </a:solidFill>
+                  </a:tcPr>
+                </a:tc>
+              </a:tr>
+              <a:tr h="457200">
+                <a:tc>
+                  <a:txBody>
+                    <a:bodyPr wrap="square"/>
+                    <a:lstStyle/>
+                    <a:p>
+                      <a:r>
+                        <a:rPr sz="1100" b="0">
+                          <a:solidFill>
+                            <a:srgbClr val="1A1A1A"/>
+                          </a:solidFill>
+                          <a:latin typeface="Arial"/>
+                        </a:rPr>
+                        <a:t>Einlagenmarge ( ___ % × ___ EUR)</a:t>
+                      </a:r>
+                    </a:p>
+                  </a:txBody>
+                  <a:tcPr>
+                    <a:solidFill>
+                      <a:srgbClr val="F4F6FA"/>
+                    </a:solidFill>
+                  </a:tcPr>
+                </a:tc>
+                <a:tc>
+                  <a:txBody>
+                    <a:bodyPr wrap="square"/>
+                    <a:lstStyle/>
+                    <a:p>
+                      <a:r>
+                        <a:rPr sz="1100" b="0">
+                          <a:solidFill>
+                            <a:srgbClr val="1A1A1A"/>
+                          </a:solidFill>
+                          <a:latin typeface="Arial"/>
+                        </a:rPr>
+                        <a:t/>
+                      </a:r>
+                    </a:p>
+                  </a:txBody>
+                  <a:tcPr>
+                    <a:solidFill>
+                      <a:srgbClr val="F4F6FA"/>
+                    </a:solidFill>
+                  </a:tcPr>
+                </a:tc>
+              </a:tr>
+              <a:tr h="457200">
+                <a:tc>
+                  <a:txBody>
+                    <a:bodyPr wrap="square"/>
+                    <a:lstStyle/>
+                    <a:p>
+                      <a:r>
+                        <a:rPr sz="1100" b="0">
+                          <a:solidFill>
+                            <a:srgbClr val="1A1A1A"/>
+                          </a:solidFill>
+                          <a:latin typeface="Arial"/>
+                        </a:rPr>
+                        <a:t>Provisionsertrag</a:t>
+                      </a:r>
+                    </a:p>
+                  </a:txBody>
+                  <a:tcPr>
+                    <a:solidFill>
+                      <a:srgbClr val="FFFFFF"/>
+                    </a:solidFill>
+                  </a:tcPr>
+                </a:tc>
+                <a:tc>
+                  <a:txBody>
+                    <a:bodyPr wrap="square"/>
+                    <a:lstStyle/>
+                    <a:p>
+                      <a:r>
+                        <a:rPr sz="1100" b="0">
+                          <a:solidFill>
+                            <a:srgbClr val="1A1A1A"/>
+                          </a:solidFill>
+                          <a:latin typeface="Arial"/>
+                        </a:rPr>
+                        <a:t/>
+                      </a:r>
+                    </a:p>
+                  </a:txBody>
+                  <a:tcPr>
+                    <a:solidFill>
+                      <a:srgbClr val="FFFFFF"/>
+                    </a:solidFill>
+                  </a:tcPr>
+                </a:tc>
+              </a:tr>
+              <a:tr h="457200">
+                <a:tc>
+                  <a:txBody>
+                    <a:bodyPr wrap="square"/>
+                    <a:lstStyle/>
+                    <a:p>
+                      <a:r>
+                        <a:rPr sz="1100" b="0">
+                          <a:solidFill>
+                            <a:srgbClr val="1A1A1A"/>
+                          </a:solidFill>
+                          <a:latin typeface="Arial"/>
+                        </a:rPr>
+                        <a:t>Verbundertrag</a:t>
+                      </a:r>
+                    </a:p>
+                  </a:txBody>
+                  <a:tcPr>
+                    <a:solidFill>
+                      <a:srgbClr val="F4F6FA"/>
+                    </a:solidFill>
+                  </a:tcPr>
+                </a:tc>
+                <a:tc>
+                  <a:txBody>
+                    <a:bodyPr wrap="square"/>
+                    <a:lstStyle/>
+                    <a:p>
+                      <a:r>
+                        <a:rPr sz="1100" b="0">
+                          <a:solidFill>
+                            <a:srgbClr val="1A1A1A"/>
+                          </a:solidFill>
+                          <a:latin typeface="Arial"/>
+                        </a:rPr>
+                        <a:t/>
+                      </a:r>
+                    </a:p>
+                  </a:txBody>
+                  <a:tcPr>
+                    <a:solidFill>
+                      <a:srgbClr val="F4F6FA"/>
+                    </a:solidFill>
+                  </a:tcPr>
+                </a:tc>
+              </a:tr>
+              <a:tr h="457200">
+                <a:tc>
+                  <a:txBody>
+                    <a:bodyPr wrap="square"/>
+                    <a:lstStyle/>
+                    <a:p>
+                      <a:r>
+                        <a:rPr sz="1100" b="0">
+                          <a:solidFill>
+                            <a:srgbClr val="1A1A1A"/>
+                          </a:solidFill>
+                          <a:latin typeface="Arial"/>
+                        </a:rPr>
+                        <a:t>Bruttoertrag</a:t>
+                      </a:r>
+                    </a:p>
+                  </a:txBody>
+                  <a:tcPr>
+                    <a:solidFill>
+                      <a:srgbClr val="FFFFFF"/>
+                    </a:solidFill>
+                  </a:tcPr>
+                </a:tc>
+                <a:tc>
+                  <a:txBody>
+                    <a:bodyPr wrap="square"/>
+                    <a:lstStyle/>
+                    <a:p>
+                      <a:r>
+                        <a:rPr sz="1100" b="0">
+                          <a:solidFill>
+                            <a:srgbClr val="1A1A1A"/>
+                          </a:solidFill>
+                          <a:latin typeface="Arial"/>
+                        </a:rPr>
+                        <a:t/>
+                      </a:r>
+                    </a:p>
+                  </a:txBody>
+                  <a:tcPr>
+                    <a:solidFill>
+                      <a:srgbClr val="FFFFFF"/>
+                    </a:solidFill>
+                  </a:tcPr>
+                </a:tc>
+              </a:tr>
+              <a:tr h="457200">
+                <a:tc>
+                  <a:txBody>
+                    <a:bodyPr wrap="square"/>
+                    <a:lstStyle/>
+                    <a:p>
+                      <a:r>
+                        <a:rPr sz="1100" b="0">
+                          <a:solidFill>
+                            <a:srgbClr val="1A1A1A"/>
+                          </a:solidFill>
+                          <a:latin typeface="Arial"/>
+                        </a:rPr>
+                        <a:t>./. Risikokosten (EL: ___ % × ___ EUR)</a:t>
+                      </a:r>
+                    </a:p>
+                  </a:txBody>
+                  <a:tcPr>
+                    <a:solidFill>
+                      <a:srgbClr val="F4F6FA"/>
+                    </a:solidFill>
+                  </a:tcPr>
+                </a:tc>
+                <a:tc>
+                  <a:txBody>
+                    <a:bodyPr wrap="square"/>
+                    <a:lstStyle/>
+                    <a:p>
+                      <a:r>
+                        <a:rPr sz="1100" b="0">
+                          <a:solidFill>
+                            <a:srgbClr val="1A1A1A"/>
+                          </a:solidFill>
+                          <a:latin typeface="Arial"/>
+                        </a:rPr>
+                        <a:t/>
+                      </a:r>
+                    </a:p>
+                  </a:txBody>
+                  <a:tcPr>
+                    <a:solidFill>
+                      <a:srgbClr val="F4F6FA"/>
+                    </a:solidFill>
+                  </a:tcPr>
+                </a:tc>
+              </a:tr>
+              <a:tr h="457200">
+                <a:tc>
+                  <a:txBody>
+                    <a:bodyPr wrap="square"/>
+                    <a:lstStyle/>
+                    <a:p>
+                      <a:r>
+                        <a:rPr sz="1100" b="0">
+                          <a:solidFill>
+                            <a:srgbClr val="1A1A1A"/>
+                          </a:solidFill>
+                          <a:latin typeface="Arial"/>
+                        </a:rPr>
+                        <a:t>Deckungsbeitrag I</a:t>
+                      </a:r>
+                    </a:p>
+                  </a:txBody>
+                  <a:tcPr>
+                    <a:solidFill>
+                      <a:srgbClr val="FFFFFF"/>
+                    </a:solidFill>
+                  </a:tcPr>
+                </a:tc>
+                <a:tc>
+                  <a:txBody>
+                    <a:bodyPr wrap="square"/>
+                    <a:lstStyle/>
+                    <a:p>
+                      <a:r>
+                        <a:rPr sz="1100" b="0">
+                          <a:solidFill>
+                            <a:srgbClr val="1A1A1A"/>
+                          </a:solidFill>
+                          <a:latin typeface="Arial"/>
+                        </a:rPr>
+                        <a:t/>
+                      </a:r>
+                    </a:p>
+                  </a:txBody>
+                  <a:tcPr>
+                    <a:solidFill>
+                      <a:srgbClr val="FFFFFF"/>
+                    </a:solidFill>
+                  </a:tcPr>
+                </a:tc>
+              </a:tr>
+              <a:tr h="457200">
+                <a:tc>
+                  <a:txBody>
+                    <a:bodyPr wrap="square"/>
+                    <a:lstStyle/>
+                    <a:p>
+                      <a:r>
+                        <a:rPr sz="1100" b="0">
+                          <a:solidFill>
+                            <a:srgbClr val="1A1A1A"/>
+                          </a:solidFill>
+                          <a:latin typeface="Arial"/>
+                        </a:rPr>
+                        <a:t>./. Betriebskosten ( ___ Std. × 120 EUR)</a:t>
+                      </a:r>
+                    </a:p>
+                  </a:txBody>
+                  <a:tcPr>
+                    <a:solidFill>
+                      <a:srgbClr val="F4F6FA"/>
+                    </a:solidFill>
+                  </a:tcPr>
+                </a:tc>
+                <a:tc>
+                  <a:txBody>
+                    <a:bodyPr wrap="square"/>
+                    <a:lstStyle/>
+                    <a:p>
+                      <a:r>
+                        <a:rPr sz="1100" b="0">
+                          <a:solidFill>
+                            <a:srgbClr val="1A1A1A"/>
+                          </a:solidFill>
+                          <a:latin typeface="Arial"/>
+                        </a:rPr>
+                        <a:t/>
+                      </a:r>
+                    </a:p>
+                  </a:txBody>
+                  <a:tcPr>
+                    <a:solidFill>
+                      <a:srgbClr val="F4F6FA"/>
+                    </a:solidFill>
+                  </a:tcPr>
+                </a:tc>
+              </a:tr>
+              <a:tr h="457200">
+                <a:tc>
+                  <a:txBody>
+                    <a:bodyPr wrap="square"/>
+                    <a:lstStyle/>
+                    <a:p>
+                      <a:r>
+                        <a:rPr sz="1100" b="0">
+                          <a:solidFill>
+                            <a:srgbClr val="1A1A1A"/>
+                          </a:solidFill>
+                          <a:latin typeface="Arial"/>
+                        </a:rPr>
+                        <a:t>Deckungsbeitrag II</a:t>
+                      </a:r>
+                    </a:p>
+                  </a:txBody>
+                  <a:tcPr>
+                    <a:solidFill>
+                      <a:srgbClr val="FFFFFF"/>
+                    </a:solidFill>
+                  </a:tcPr>
+                </a:tc>
+                <a:tc>
+                  <a:txBody>
+                    <a:bodyPr wrap="square"/>
+                    <a:lstStyle/>
+                    <a:p>
+                      <a:r>
+                        <a:rPr sz="1100" b="0">
+                          <a:solidFill>
+                            <a:srgbClr val="1A1A1A"/>
+                          </a:solidFill>
+                          <a:latin typeface="Arial"/>
+                        </a:rPr>
+                        <a:t/>
+                      </a:r>
+                    </a:p>
+                  </a:txBody>
+                  <a:tcPr>
+                    <a:solidFill>
+                      <a:srgbClr val="FFFFFF"/>
+                    </a:solidFill>
+                  </a:tcPr>
+                </a:tc>
+              </a:tr>
+              <a:tr h="457200">
+                <a:tc>
+                  <a:txBody>
+                    <a:bodyPr wrap="square"/>
+                    <a:lstStyle/>
+                    <a:p>
+                      <a:r>
+                        <a:rPr sz="1100" b="0">
+                          <a:solidFill>
+                            <a:srgbClr val="1A1A1A"/>
+                          </a:solidFill>
+                          <a:latin typeface="Arial"/>
+                        </a:rPr>
+                        <a:t>Kundenrendite (DB II / Kreditvolumen)</a:t>
+                      </a:r>
+                    </a:p>
+                  </a:txBody>
+                  <a:tcPr>
+                    <a:solidFill>
+                      <a:srgbClr val="F4F6FA"/>
+                    </a:solidFill>
+                  </a:tcPr>
+                </a:tc>
+                <a:tc>
+                  <a:txBody>
+                    <a:bodyPr wrap="square"/>
+                    <a:lstStyle/>
+                    <a:p>
+                      <a:r>
+                        <a:rPr sz="1100" b="0">
+                          <a:solidFill>
+                            <a:srgbClr val="1A1A1A"/>
+                          </a:solidFill>
+                          <a:latin typeface="Arial"/>
+                        </a:rPr>
+                        <a:t>___ %</a:t>
+                      </a:r>
+                    </a:p>
+                  </a:txBody>
+                  <a:tcPr>
+                    <a:solidFill>
+                      <a:srgbClr val="F4F6FA"/>
+                    </a:solidFill>
+                  </a:tcPr>
+                </a:tc>
+              </a:tr>
+            </a:tbl>
+          </a:graphicData>
+        </a:graphic>
+      </p:graphicFrame>
+    </p:spTree>
+  </p:cSld>
+  <p:clrMapOvr>
+    <a:masterClrMapping/>
+  </p:clrMapOvr>
+</p:sld>
+</file>
+
+<file path=ppt/slides/slide23.xml><?xml version="1.0" encoding="utf-8"?>
+<p:sld xmlns:a="http://schemas.openxmlformats.org/drawingml/2006/main" xmlns:p="http://schemas.openxmlformats.org/presentationml/2006/main" xmlns:r="http://schemas.openxmlformats.org/officeDocument/2006/relationships">
+  <p:cSld>
+    <p:bg>
+      <p:bgPr>
+        <a:solidFill>
+          <a:srgbClr val="1A1A1A"/>
+        </a:solidFill>
+        <a:effectLst/>
+      </p:bgPr>
+    </p:bg>
+    <p:spTree>
+      <p:nvGrpSpPr>
+        <p:cNvPr id="1" name=""/>
+        <p:cNvGrpSpPr/>
+        <p:nvPr/>
+      </p:nvGrpSpPr>
+      <p:grpSpPr/>
+      <p:sp>
+        <p:nvSpPr>
+          <p:cNvPr id="2" name="Rectangle 1"/>
+          <p:cNvSpPr/>
+          <p:nvPr/>
+        </p:nvSpPr>
+        <p:spPr>
+          <a:xfrm>
+            <a:off x="0" y="0"/>
+            <a:ext cx="73152" cy="6858000"/>
+          </a:xfrm>
+          <a:prstGeom prst="rect">
+            <a:avLst/>
+          </a:prstGeom>
+          <a:solidFill>
+            <a:srgbClr val="E05B00"/>
+          </a:solidFill>
+          <a:ln>
+            <a:noFill/>
+          </a:ln>
+        </p:spPr>
+        <p:style>
+          <a:lnRef idx="1">
+            <a:schemeClr val="accent1"/>
+          </a:lnRef>
+          <a:fillRef idx="3">
+            <a:schemeClr val="accent1"/>
+          </a:fillRef>
+          <a:effectRef idx="2">
+            <a:schemeClr val="accent1"/>
+          </a:effectRef>
+          <a:fontRef idx="minor">
+            <a:schemeClr val="lt1"/>
+          </a:fontRef>
+        </p:style>
+        <p:txBody>
+          <a:bodyPr rtlCol="0" anchor="ctr"/>
+          <a:lstStyle/>
+          <a:p>
+            <a:pPr algn="ctr"/>
+          </a:p>
+        </p:txBody>
+      </p:sp>
+      <p:sp>
+        <p:nvSpPr>
+          <p:cNvPr id="3" name="TextBox 2"/>
+          <p:cNvSpPr txBox="1"/>
+          <p:nvPr/>
+        </p:nvSpPr>
+        <p:spPr>
+          <a:xfrm>
+            <a:off x="365760" y="2011680"/>
+            <a:ext cx="11430000" cy="2011680"/>
+          </a:xfrm>
+          <a:prstGeom prst="rect">
+            <a:avLst/>
+          </a:prstGeom>
+          <a:noFill/>
+        </p:spPr>
+        <p:txBody>
+          <a:bodyPr wrap="square">
+            <a:spAutoFit/>
+          </a:bodyPr>
+          <a:lstStyle/>
+          <a:p>
+            <a:pPr algn="l"/>
+            <a:r>
+              <a:rPr sz="3600" b="1" i="0">
+                <a:solidFill>
+                  <a:srgbClr val="FFFFFF"/>
+                </a:solidFill>
+                <a:latin typeface="Arial"/>
+              </a:rPr>
+              <a:t>Arbeitsblatt B: Konditionengespräch vorbereiten</a:t>
+            </a:r>
+          </a:p>
+        </p:txBody>
+      </p:sp>
+    </p:spTree>
+  </p:cSld>
+  <p:clrMapOvr>
+    <a:masterClrMapping/>
+  </p:clrMapOvr>
+</p:sld>
+</file>
+
+<file path=ppt/slides/slide24.xml><?xml version="1.0" encoding="utf-8"?>
+<p:sld xmlns:a="http://schemas.openxmlformats.org/drawingml/2006/main" xmlns:p="http://schemas.openxmlformats.org/presentationml/2006/main" xmlns:r="http://schemas.openxmlformats.org/officeDocument/2006/relationships">
+  <p:cSld>
+    <p:bg>
+      <p:bgPr>
+        <a:solidFill>
+          <a:srgbClr val="FFFFFF"/>
+        </a:solidFill>
+        <a:effectLst/>
+      </p:bgPr>
+    </p:bg>
+    <p:spTree>
+      <p:nvGrpSpPr>
+        <p:cNvPr id="1" name=""/>
+        <p:cNvGrpSpPr/>
+        <p:nvPr/>
+      </p:nvGrpSpPr>
+      <p:grpSpPr/>
+      <p:sp>
+        <p:nvSpPr>
+          <p:cNvPr id="2" name="Rectangle 1"/>
+          <p:cNvSpPr/>
+          <p:nvPr/>
+        </p:nvSpPr>
+        <p:spPr>
+          <a:xfrm>
+            <a:off x="0" y="0"/>
+            <a:ext cx="73152" cy="6858000"/>
+          </a:xfrm>
+          <a:prstGeom prst="rect">
+            <a:avLst/>
+          </a:prstGeom>
+          <a:solidFill>
+            <a:srgbClr val="003DA5"/>
+          </a:solidFill>
+          <a:ln>
+            <a:noFill/>
+          </a:ln>
+        </p:spPr>
+        <p:style>
+          <a:lnRef idx="1">
+            <a:schemeClr val="accent1"/>
+          </a:lnRef>
+          <a:fillRef idx="3">
+            <a:schemeClr val="accent1"/>
+          </a:fillRef>
+          <a:effectRef idx="2">
+            <a:schemeClr val="accent1"/>
+          </a:effectRef>
+          <a:fontRef idx="minor">
+            <a:schemeClr val="lt1"/>
+          </a:fontRef>
+        </p:style>
+        <p:txBody>
+          <a:bodyPr rtlCol="0" anchor="ctr"/>
+          <a:lstStyle/>
+          <a:p>
+            <a:pPr algn="ctr"/>
+          </a:p>
+        </p:txBody>
+      </p:sp>
+      <p:sp>
+        <p:nvSpPr>
+          <p:cNvPr id="3" name="TextBox 2"/>
+          <p:cNvSpPr txBox="1"/>
+          <p:nvPr/>
+        </p:nvSpPr>
+        <p:spPr>
+          <a:xfrm>
+            <a:off x="228600" y="182880"/>
+            <a:ext cx="11430000" cy="320040"/>
+          </a:xfrm>
+          <a:prstGeom prst="rect">
+            <a:avLst/>
+          </a:prstGeom>
+          <a:noFill/>
+        </p:spPr>
+        <p:txBody>
+          <a:bodyPr wrap="square">
+            <a:spAutoFit/>
+          </a:bodyPr>
+          <a:lstStyle/>
+          <a:p>
+            <a:pPr algn="l"/>
+            <a:r>
+              <a:rPr sz="900" b="0" i="0">
+                <a:solidFill>
+                  <a:srgbClr val="556575"/>
+                </a:solidFill>
+                <a:latin typeface="Arial"/>
+              </a:rPr>
+              <a:t>M14 · 4.6 Arbeitsblätter</a:t>
+            </a:r>
+          </a:p>
+        </p:txBody>
+      </p:sp>
+      <p:sp>
+        <p:nvSpPr>
+          <p:cNvPr id="4" name="TextBox 3"/>
+          <p:cNvSpPr txBox="1"/>
+          <p:nvPr/>
+        </p:nvSpPr>
+        <p:spPr>
+          <a:xfrm>
+            <a:off x="365760" y="274320"/>
+            <a:ext cx="11430000" cy="777240"/>
+          </a:xfrm>
+          <a:prstGeom prst="rect">
+            <a:avLst/>
+          </a:prstGeom>
+          <a:noFill/>
+        </p:spPr>
+        <p:txBody>
+          <a:bodyPr wrap="square">
+            <a:spAutoFit/>
+          </a:bodyPr>
+          <a:lstStyle/>
+          <a:p>
+            <a:pPr algn="l"/>
+            <a:r>
+              <a:rPr sz="2200" b="1" i="0">
+                <a:solidFill>
+                  <a:srgbClr val="003DA5"/>
+                </a:solidFill>
+                <a:latin typeface="Arial"/>
+              </a:rPr>
+              <a:t>Arbeitsblatt B: Konditionengespräch vorbereiten</a:t>
+            </a:r>
+          </a:p>
+        </p:txBody>
+      </p:sp>
+      <p:sp>
+        <p:nvSpPr>
+          <p:cNvPr id="5" name="Rectangle 4"/>
+          <p:cNvSpPr/>
+          <p:nvPr/>
+        </p:nvSpPr>
+        <p:spPr>
+          <a:xfrm>
+            <a:off x="365760" y="1005840"/>
+            <a:ext cx="11430000" cy="27432"/>
+          </a:xfrm>
+          <a:prstGeom prst="rect">
+            <a:avLst/>
+          </a:prstGeom>
+          <a:solidFill>
+            <a:srgbClr val="D1D5DB"/>
+          </a:solidFill>
+          <a:ln>
+            <a:noFill/>
+          </a:ln>
+        </p:spPr>
+        <p:style>
+          <a:lnRef idx="1">
+            <a:schemeClr val="accent1"/>
+          </a:lnRef>
+          <a:fillRef idx="3">
+            <a:schemeClr val="accent1"/>
+          </a:fillRef>
+          <a:effectRef idx="2">
+            <a:schemeClr val="accent1"/>
+          </a:effectRef>
+          <a:fontRef idx="minor">
+            <a:schemeClr val="lt1"/>
+          </a:fontRef>
+        </p:style>
+        <p:txBody>
+          <a:bodyPr rtlCol="0" anchor="ctr"/>
+          <a:lstStyle/>
+          <a:p>
+            <a:pPr algn="ctr"/>
+          </a:p>
+        </p:txBody>
+      </p:sp>
+      <p:sp>
+        <p:nvSpPr>
+          <p:cNvPr id="6" name="TextBox 5"/>
+          <p:cNvSpPr txBox="1"/>
+          <p:nvPr/>
+        </p:nvSpPr>
+        <p:spPr>
+          <a:xfrm>
+            <a:off x="365760" y="1143000"/>
+            <a:ext cx="11430000" cy="5212080"/>
+          </a:xfrm>
+          <a:prstGeom prst="rect">
+            <a:avLst/>
+          </a:prstGeom>
+          <a:noFill/>
+        </p:spPr>
+        <p:txBody>
+          <a:bodyPr wrap="square">
+            <a:spAutoFit/>
+          </a:bodyPr>
+          <a:lstStyle/>
+          <a:p>
+            <a:pPr>
+              <a:spcBef>
+                <a:spcPts val="500"/>
+              </a:spcBef>
+            </a:pPr>
+            <a:r>
+              <a:rPr sz="1500">
+                <a:solidFill>
+                  <a:srgbClr val="003DA5"/>
+                </a:solidFill>
+                <a:latin typeface="Arial"/>
+              </a:rPr>
+              <a:t>▪  </a:t>
+            </a:r>
+            <a:r>
+              <a:rPr sz="1700" b="1">
+                <a:solidFill>
+                  <a:srgbClr val="003DA5"/>
+                </a:solidFill>
+                <a:latin typeface="Arial"/>
+              </a:rPr>
+              <a:t>Wertargumente (Phase 1) – Was hat unsere Beziehung diesem Kunden gebracht?: </a:t>
+            </a:r>
+            <a:r>
+              <a:rPr sz="1700">
+                <a:solidFill>
+                  <a:srgbClr val="1A1A1A"/>
+                </a:solidFill>
+                <a:latin typeface="Arial"/>
+              </a:rPr>
+              <a:t>___________________________________________________________________________</a:t>
+            </a:r>
+          </a:p>
+          <a:p>
+            <a:pPr>
+              <a:spcBef>
+                <a:spcPts val="500"/>
+              </a:spcBef>
+            </a:pPr>
+            <a:r>
+              <a:rPr sz="1500">
+                <a:solidFill>
+                  <a:srgbClr val="003DA5"/>
+                </a:solidFill>
+                <a:latin typeface="Arial"/>
+              </a:rPr>
+              <a:t>▪  </a:t>
+            </a:r>
+            <a:r>
+              <a:rPr sz="1700" b="1">
+                <a:solidFill>
+                  <a:srgbClr val="003DA5"/>
+                </a:solidFill>
+                <a:latin typeface="Arial"/>
+              </a:rPr>
+              <a:t>Marktumfeld-Erklärung (Phase 2) – Welche externen Faktoren begründen die Anpassung?: </a:t>
+            </a:r>
+            <a:r>
+              <a:rPr sz="1700">
+                <a:solidFill>
+                  <a:srgbClr val="1A1A1A"/>
+                </a:solidFill>
+                <a:latin typeface="Arial"/>
+              </a:rPr>
+              <a:t>___________________________________________________________________________</a:t>
+            </a:r>
+          </a:p>
+          <a:p>
+            <a:pPr>
+              <a:spcBef>
+                <a:spcPts val="500"/>
+              </a:spcBef>
+            </a:pPr>
+            <a:r>
+              <a:rPr sz="1500">
+                <a:solidFill>
+                  <a:srgbClr val="003DA5"/>
+                </a:solidFill>
+                <a:latin typeface="Arial"/>
+              </a:rPr>
+              <a:t>▪  </a:t>
+            </a:r>
+            <a:r>
+              <a:rPr sz="1700" b="1">
+                <a:solidFill>
+                  <a:srgbClr val="003DA5"/>
+                </a:solidFill>
+                <a:latin typeface="Arial"/>
+              </a:rPr>
+              <a:t>Konkrete Anpassung (Phase 3): </a:t>
+            </a:r>
+            <a:r>
+              <a:rPr sz="1700">
+                <a:solidFill>
+                  <a:srgbClr val="1A1A1A"/>
+                </a:solidFill>
+                <a:latin typeface="Arial"/>
+              </a:rPr>
+              <a:t>___________________________________________________________________________</a:t>
+            </a:r>
+          </a:p>
+          <a:p>
+            <a:pPr>
+              <a:spcBef>
+                <a:spcPts val="500"/>
+              </a:spcBef>
+            </a:pPr>
+            <a:r>
+              <a:rPr sz="1500">
+                <a:solidFill>
+                  <a:srgbClr val="003DA5"/>
+                </a:solidFill>
+                <a:latin typeface="Arial"/>
+              </a:rPr>
+              <a:t>▪  </a:t>
+            </a:r>
+            <a:r>
+              <a:rPr sz="1700" b="1">
+                <a:solidFill>
+                  <a:srgbClr val="003DA5"/>
+                </a:solidFill>
+                <a:latin typeface="Arial"/>
+              </a:rPr>
+              <a:t>Alternativen (Phase 4) – Welche Optionen biete ich an?: </a:t>
+            </a:r>
+            <a:r>
+              <a:rPr sz="1700">
+                <a:solidFill>
+                  <a:srgbClr val="1A1A1A"/>
+                </a:solidFill>
+                <a:latin typeface="Arial"/>
+              </a:rPr>
+              <a:t>___________________________________________________________________________</a:t>
+            </a:r>
+          </a:p>
+        </p:txBody>
+      </p:sp>
+    </p:spTree>
+  </p:cSld>
+  <p:clrMapOvr>
+    <a:masterClrMapping/>
+  </p:clrMapOvr>
+</p:sld>
+</file>
+
+<file path=ppt/slides/slide25.xml><?xml version="1.0" encoding="utf-8"?>
 <p:sld xmlns:a="http://schemas.openxmlformats.org/drawingml/2006/main" xmlns:p="http://schemas.openxmlformats.org/presentationml/2006/main" xmlns:r="http://schemas.openxmlformats.org/officeDocument/2006/relationships">
   <p:cSld>
     <p:bg>
@@ -4038,8 +7717,8 @@
         </p:nvSpPr>
         <p:spPr>
           <a:xfrm>
-            <a:off x="365760" y="365760"/>
-            <a:ext cx="5486400" cy="365760"/>
+            <a:off x="365760" y="347472"/>
+            <a:ext cx="7315200" cy="384048"/>
           </a:xfrm>
           <a:prstGeom prst="rect">
             <a:avLst/>
@@ -4054,62 +7733,27 @@
           <a:p>
             <a:pPr algn="l"/>
             <a:r>
-              <a:rPr sz="1000" b="1">
+              <a:rPr sz="900" b="1" i="0">
                 <a:solidFill>
                   <a:srgbClr val="CCD6F0"/>
                 </a:solidFill>
                 <a:latin typeface="Arial"/>
               </a:rPr>
-              <a:t>PRAXISTRANSFER</a:t>
-            </a:r>
-          </a:p>
-        </p:txBody>
-      </p:sp>
-      <p:sp>
-        <p:nvSpPr>
-          <p:cNvPr id="4" name="TextBox 3"/>
-          <p:cNvSpPr txBox="1"/>
-          <p:nvPr/>
-        </p:nvSpPr>
-        <p:spPr>
-          <a:xfrm>
-            <a:off x="365760" y="640080"/>
-            <a:ext cx="9144000" cy="914400"/>
-          </a:xfrm>
-          <a:prstGeom prst="rect">
-            <a:avLst/>
-          </a:prstGeom>
-          <a:noFill/>
-        </p:spPr>
-        <p:txBody>
-          <a:bodyPr wrap="square">
-            <a:spAutoFit/>
-          </a:bodyPr>
-          <a:lstStyle/>
-          <a:p>
-            <a:pPr algn="l"/>
-            <a:r>
-              <a:rPr sz="2800" b="1">
-                <a:solidFill>
-                  <a:srgbClr val="FFFFFF"/>
-                </a:solidFill>
-                <a:latin typeface="Arial"/>
-              </a:rPr>
-              <a:t>Was nehmen Sie mit?</a:t>
-            </a:r>
-          </a:p>
-        </p:txBody>
-      </p:sp>
-      <p:sp>
-        <p:nvSpPr>
-          <p:cNvPr id="5" name="Rectangle 4"/>
+              <a:t>PRAXISTRANSFER &amp; NÄCHSTE SCHRITTE</a:t>
+            </a:r>
+          </a:p>
+        </p:txBody>
+      </p:sp>
+      <p:sp>
+        <p:nvSpPr>
+          <p:cNvPr id="4" name="Rectangle 3"/>
           <p:cNvSpPr/>
           <p:nvPr/>
         </p:nvSpPr>
         <p:spPr>
           <a:xfrm>
-            <a:off x="365760" y="1463040"/>
-            <a:ext cx="7315200" cy="27432"/>
+            <a:off x="365760" y="804672"/>
+            <a:ext cx="8229600" cy="22860"/>
           </a:xfrm>
           <a:prstGeom prst="rect">
             <a:avLst/>
@@ -4145,14 +7789,14 @@
       </p:sp>
       <p:sp>
         <p:nvSpPr>
-          <p:cNvPr id="6" name="TextBox 5"/>
+          <p:cNvPr id="5" name="TextBox 4"/>
           <p:cNvSpPr txBox="1"/>
           <p:nvPr/>
         </p:nvSpPr>
         <p:spPr>
           <a:xfrm>
-            <a:off x="365760" y="1645920"/>
-            <a:ext cx="11430000" cy="4114800"/>
+            <a:off x="365760" y="960120"/>
+            <a:ext cx="9144000" cy="914400"/>
           </a:xfrm>
           <a:prstGeom prst="rect">
             <a:avLst/>
@@ -4165,67 +7809,29 @@
           </a:bodyPr>
           <a:lstStyle/>
           <a:p>
-            <a:pPr>
-              <a:spcBef>
-                <a:spcPts val="400"/>
-              </a:spcBef>
-            </a:pPr>
-            <a:r>
-              <a:rPr sz="1600">
-                <a:solidFill>
-                  <a:srgbClr val="E05B00"/>
-                </a:solidFill>
-                <a:latin typeface="Arial"/>
-              </a:rPr>
-              <a:t>▪  </a:t>
-            </a:r>
-            <a:r>
-              <a:rPr sz="1800">
+            <a:pPr algn="l"/>
+            <a:r>
+              <a:rPr sz="3000" b="1" i="0">
                 <a:solidFill>
                   <a:srgbClr val="FFFFFF"/>
                 </a:solidFill>
                 <a:latin typeface="Arial"/>
               </a:rPr>
-              <a:t>Transferaufgabe: Wenden Sie das Gelernte in den nächsten 14 Tagen bei einem konkreten Kunden an.</a:t>
-            </a:r>
-          </a:p>
-          <a:p>
-            <a:pPr>
-              <a:spcBef>
-                <a:spcPts val="400"/>
-              </a:spcBef>
-            </a:pPr>
-            <a:r>
-              <a:rPr sz="1600">
-                <a:solidFill>
-                  <a:srgbClr val="E05B00"/>
-                </a:solidFill>
-                <a:latin typeface="Arial"/>
-              </a:rPr>
-              <a:t>▪  </a:t>
-            </a:r>
-            <a:r>
-              <a:rPr sz="1800">
-                <a:solidFill>
-                  <a:srgbClr val="FFFFFF"/>
-                </a:solidFill>
-                <a:latin typeface="Arial"/>
-              </a:rPr>
-              <a:t>Selbstcheck nach 4 Wochen: Was hat sich verändert?</a:t>
-            </a:r>
-          </a:p>
-        </p:txBody>
-      </p:sp>
-      <p:sp>
-        <p:nvSpPr>
-          <p:cNvPr id="7" name="TextBox 6"/>
+              <a:t>Was nehmen Sie mit?</a:t>
+            </a:r>
+          </a:p>
+        </p:txBody>
+      </p:sp>
+      <p:sp>
+        <p:nvSpPr>
+          <p:cNvPr id="6" name="TextBox 5"/>
           <p:cNvSpPr txBox="1"/>
           <p:nvPr/>
         </p:nvSpPr>
         <p:spPr>
           <a:xfrm>
-            <a:off x="365760" y="6309360"/>
-            <a:ext cx="11430000" cy="365760"/>
+            <a:off x="365760" y="2103120"/>
+            <a:ext cx="11430000" cy="4114800"/>
           </a:xfrm>
           <a:prstGeom prst="rect">
             <a:avLst/>
@@ -4238,141 +7844,92 @@
           </a:bodyPr>
           <a:lstStyle/>
           <a:p>
-            <a:pPr algn="l"/>
-            <a:r>
-              <a:rPr sz="900" b="0">
-                <a:solidFill>
-                  <a:srgbClr val="99AACC"/>
-                </a:solidFill>
-                <a:latin typeface="Arial"/>
-              </a:rPr>
-              <a:t>M14 · Ertragsoptimierung pro Kunde  ·  v0.3  ·  Benedikt Zoller Coaching</a:t>
-            </a:r>
-          </a:p>
-        </p:txBody>
-      </p:sp>
-    </p:spTree>
-  </p:cSld>
-  <p:clrMapOvr>
-    <a:masterClrMapping/>
-  </p:clrMapOvr>
-</p:sld>
-</file>
-
-<file path=ppt/slides/slide2.xml><?xml version="1.0" encoding="utf-8"?>
-<p:sld xmlns:a="http://schemas.openxmlformats.org/drawingml/2006/main" xmlns:p="http://schemas.openxmlformats.org/presentationml/2006/main" xmlns:r="http://schemas.openxmlformats.org/officeDocument/2006/relationships">
-  <p:cSld>
-    <p:bg>
-      <p:bgPr>
-        <a:solidFill>
-          <a:srgbClr val="F5F7FA"/>
-        </a:solidFill>
-        <a:effectLst/>
-      </p:bgPr>
-    </p:bg>
-    <p:spTree>
-      <p:nvGrpSpPr>
-        <p:cNvPr id="1" name=""/>
-        <p:cNvGrpSpPr/>
-        <p:nvPr/>
-      </p:nvGrpSpPr>
-      <p:grpSpPr/>
-      <p:sp>
-        <p:nvSpPr>
-          <p:cNvPr id="2" name="Rectangle 1"/>
-          <p:cNvSpPr/>
-          <p:nvPr/>
-        </p:nvSpPr>
-        <p:spPr>
-          <a:xfrm>
-            <a:off x="0" y="0"/>
-            <a:ext cx="73152" cy="6858000"/>
-          </a:xfrm>
-          <a:prstGeom prst="rect">
-            <a:avLst/>
-          </a:prstGeom>
-          <a:solidFill>
-            <a:srgbClr val="003DA5"/>
-          </a:solidFill>
-          <a:ln>
-            <a:noFill/>
-          </a:ln>
-        </p:spPr>
-        <p:style>
-          <a:lnRef idx="1">
-            <a:schemeClr val="accent1"/>
-          </a:lnRef>
-          <a:fillRef idx="3">
-            <a:schemeClr val="accent1"/>
-          </a:fillRef>
-          <a:effectRef idx="2">
-            <a:schemeClr val="accent1"/>
-          </a:effectRef>
-          <a:fontRef idx="minor">
-            <a:schemeClr val="lt1"/>
-          </a:fontRef>
-        </p:style>
-        <p:txBody>
-          <a:bodyPr rtlCol="0" anchor="ctr"/>
-          <a:lstStyle/>
-          <a:p>
-            <a:pPr algn="ctr"/>
-          </a:p>
-        </p:txBody>
-      </p:sp>
-      <p:sp>
-        <p:nvSpPr>
-          <p:cNvPr id="3" name="Rectangle 2"/>
-          <p:cNvSpPr/>
-          <p:nvPr/>
-        </p:nvSpPr>
-        <p:spPr>
-          <a:xfrm>
-            <a:off x="365760" y="868680"/>
-            <a:ext cx="7315200" cy="27432"/>
-          </a:xfrm>
-          <a:prstGeom prst="rect">
-            <a:avLst/>
-          </a:prstGeom>
-          <a:solidFill>
-            <a:srgbClr val="E5E7EB"/>
-          </a:solidFill>
-          <a:ln>
-            <a:noFill/>
-          </a:ln>
-        </p:spPr>
-        <p:style>
-          <a:lnRef idx="1">
-            <a:schemeClr val="accent1"/>
-          </a:lnRef>
-          <a:fillRef idx="3">
-            <a:schemeClr val="accent1"/>
-          </a:fillRef>
-          <a:effectRef idx="2">
-            <a:schemeClr val="accent1"/>
-          </a:effectRef>
-          <a:fontRef idx="minor">
-            <a:schemeClr val="lt1"/>
-          </a:fontRef>
-        </p:style>
-        <p:txBody>
-          <a:bodyPr rtlCol="0" anchor="ctr"/>
-          <a:lstStyle/>
-          <a:p>
-            <a:pPr algn="ctr"/>
-          </a:p>
-        </p:txBody>
-      </p:sp>
-      <p:sp>
-        <p:nvSpPr>
-          <p:cNvPr id="4" name="TextBox 3"/>
+            <a:pPr>
+              <a:spcBef>
+                <a:spcPts val="500"/>
+              </a:spcBef>
+            </a:pPr>
+            <a:r>
+              <a:rPr sz="1600">
+                <a:solidFill>
+                  <a:srgbClr val="E05B00"/>
+                </a:solidFill>
+                <a:latin typeface="Arial"/>
+              </a:rPr>
+              <a:t>▪  </a:t>
+            </a:r>
+            <a:r>
+              <a:rPr sz="1800">
+                <a:solidFill>
+                  <a:srgbClr val="FFFFFF"/>
+                </a:solidFill>
+                <a:latin typeface="Arial"/>
+              </a:rPr>
+              <a:t>Transferaufgabe: Wenden Sie das Gelernte in den nächsten 14 Tagen bei einem konkreten Kunden an.</a:t>
+            </a:r>
+          </a:p>
+          <a:p>
+            <a:pPr>
+              <a:spcBef>
+                <a:spcPts val="500"/>
+              </a:spcBef>
+            </a:pPr>
+            <a:r>
+              <a:rPr sz="1600">
+                <a:solidFill>
+                  <a:srgbClr val="E05B00"/>
+                </a:solidFill>
+                <a:latin typeface="Arial"/>
+              </a:rPr>
+              <a:t>▪  </a:t>
+            </a:r>
+            <a:r>
+              <a:rPr sz="1800">
+                <a:solidFill>
+                  <a:srgbClr val="FFFFFF"/>
+                </a:solidFill>
+                <a:latin typeface="Arial"/>
+              </a:rPr>
+              <a:t>Selbstcheck nach 4 Wochen: Bewerten Sie Ihre Fortschritte ehrlich.</a:t>
+            </a:r>
+          </a:p>
+          <a:p>
+            <a:pPr>
+              <a:spcBef>
+                <a:spcPts val="500"/>
+              </a:spcBef>
+            </a:pPr>
+            <a:r>
+              <a:rPr sz="1600">
+                <a:solidFill>
+                  <a:srgbClr val="E05B00"/>
+                </a:solidFill>
+                <a:latin typeface="Arial"/>
+              </a:rPr>
+              <a:t>▪  </a:t>
+            </a:r>
+            <a:r>
+              <a:rPr sz="1800">
+                <a:solidFill>
+                  <a:srgbClr val="FFFFFF"/>
+                </a:solidFill>
+                <a:latin typeface="Arial"/>
+              </a:rPr>
+              <a:t>Nächste Module: M15, M16</a:t>
+            </a:r>
+          </a:p>
+        </p:txBody>
+      </p:sp>
+      <p:sp>
+        <p:nvSpPr>
+          <p:cNvPr id="7" name="TextBox 6"/>
           <p:cNvSpPr txBox="1"/>
           <p:nvPr/>
         </p:nvSpPr>
         <p:spPr>
           <a:xfrm>
-            <a:off x="365760" y="320040"/>
-            <a:ext cx="3657600" cy="365760"/>
+            <a:off x="365760" y="6309360"/>
+            <a:ext cx="11430000" cy="365760"/>
           </a:xfrm>
           <a:prstGeom prst="rect">
             <a:avLst/>
@@ -4387,196 +7944,13 @@
           <a:p>
             <a:pPr algn="l"/>
             <a:r>
-              <a:rPr sz="1000" b="1">
-                <a:solidFill>
-                  <a:srgbClr val="003DA5"/>
-                </a:solidFill>
-                <a:latin typeface="Arial"/>
-              </a:rPr>
-              <a:t>LERNZIELE</a:t>
-            </a:r>
-          </a:p>
-        </p:txBody>
-      </p:sp>
-      <p:sp>
-        <p:nvSpPr>
-          <p:cNvPr id="5" name="TextBox 4"/>
-          <p:cNvSpPr txBox="1"/>
-          <p:nvPr/>
-        </p:nvSpPr>
-        <p:spPr>
-          <a:xfrm>
-            <a:off x="365760" y="502920"/>
-            <a:ext cx="9144000" cy="548640"/>
-          </a:xfrm>
-          <a:prstGeom prst="rect">
-            <a:avLst/>
-          </a:prstGeom>
-          <a:noFill/>
-        </p:spPr>
-        <p:txBody>
-          <a:bodyPr wrap="square">
-            <a:spAutoFit/>
-          </a:bodyPr>
-          <a:lstStyle/>
-          <a:p>
-            <a:pPr algn="l"/>
-            <a:r>
-              <a:rPr sz="2200" b="1">
-                <a:solidFill>
-                  <a:srgbClr val="1A1A1A"/>
-                </a:solidFill>
-                <a:latin typeface="Arial"/>
-              </a:rPr>
-              <a:t>Was Sie nach diesem Modul können.</a:t>
-            </a:r>
-          </a:p>
-        </p:txBody>
-      </p:sp>
-      <p:sp>
-        <p:nvSpPr>
-          <p:cNvPr id="6" name="TextBox 5"/>
-          <p:cNvSpPr txBox="1"/>
-          <p:nvPr/>
-        </p:nvSpPr>
-        <p:spPr>
-          <a:xfrm>
-            <a:off x="365760" y="1188720"/>
-            <a:ext cx="11430000" cy="5303520"/>
-          </a:xfrm>
-          <a:prstGeom prst="rect">
-            <a:avLst/>
-          </a:prstGeom>
-          <a:noFill/>
-        </p:spPr>
-        <p:txBody>
-          <a:bodyPr wrap="square">
-            <a:spAutoFit/>
-          </a:bodyPr>
-          <a:lstStyle/>
-          <a:p>
-            <a:pPr>
-              <a:spcBef>
-                <a:spcPts val="400"/>
-              </a:spcBef>
-            </a:pPr>
-            <a:r>
-              <a:rPr sz="1400">
-                <a:solidFill>
-                  <a:srgbClr val="003DA5"/>
-                </a:solidFill>
-                <a:latin typeface="Arial"/>
-              </a:rPr>
-              <a:t>▪  </a:t>
-            </a:r>
-            <a:r>
-              <a:rPr sz="1600">
-                <a:solidFill>
-                  <a:srgbClr val="1A1A1A"/>
-                </a:solidFill>
-                <a:latin typeface="Arial"/>
-              </a:rPr>
-              <a:t>Den Kundendeckungsbeitrag anhand der vier Ertragskomponenten berechnen</a:t>
-            </a:r>
-          </a:p>
-          <a:p>
-            <a:pPr>
-              <a:spcBef>
-                <a:spcPts val="400"/>
-              </a:spcBef>
-            </a:pPr>
-            <a:r>
-              <a:rPr sz="1400">
-                <a:solidFill>
-                  <a:srgbClr val="003DA5"/>
-                </a:solidFill>
-                <a:latin typeface="Arial"/>
-              </a:rPr>
-              <a:t>▪  </a:t>
-            </a:r>
-            <a:r>
-              <a:rPr sz="1600">
-                <a:solidFill>
-                  <a:srgbClr val="1A1A1A"/>
-                </a:solidFill>
-                <a:latin typeface="Arial"/>
-              </a:rPr>
-              <a:t>Die Ertragsstruktur eines Kunden analysieren und die größten Optimierungshebel identifizieren</a:t>
-            </a:r>
-          </a:p>
-          <a:p>
-            <a:pPr>
-              <a:spcBef>
-                <a:spcPts val="400"/>
-              </a:spcBef>
-            </a:pPr>
-            <a:r>
-              <a:rPr sz="1400">
-                <a:solidFill>
-                  <a:srgbClr val="003DA5"/>
-                </a:solidFill>
-                <a:latin typeface="Arial"/>
-              </a:rPr>
-              <a:t>▪  </a:t>
-            </a:r>
-            <a:r>
-              <a:rPr sz="1600">
-                <a:solidFill>
-                  <a:srgbClr val="1A1A1A"/>
-                </a:solidFill>
-                <a:latin typeface="Arial"/>
-              </a:rPr>
-              <a:t>Den Expected Loss in der Konditionenkalkulation erklären und bewerten, ob eine Beziehung risikogerecht bepreist ist</a:t>
-            </a:r>
-          </a:p>
-          <a:p>
-            <a:pPr>
-              <a:spcBef>
-                <a:spcPts val="400"/>
-              </a:spcBef>
-            </a:pPr>
-            <a:r>
-              <a:rPr sz="1400">
-                <a:solidFill>
-                  <a:srgbClr val="003DA5"/>
-                </a:solidFill>
-                <a:latin typeface="Arial"/>
-              </a:rPr>
-              <a:t>▪  </a:t>
-            </a:r>
-            <a:r>
-              <a:rPr sz="1600">
-                <a:solidFill>
-                  <a:srgbClr val="1A1A1A"/>
-                </a:solidFill>
-                <a:latin typeface="Arial"/>
-              </a:rPr>
-              <a:t>Drei Optimierungsszenarien bewerten und die ertragswirksamste Option wählen</a:t>
-            </a:r>
-          </a:p>
-          <a:p>
-            <a:pPr>
-              <a:spcBef>
-                <a:spcPts val="400"/>
-              </a:spcBef>
-            </a:pPr>
-            <a:r>
-              <a:rPr sz="1400">
-                <a:solidFill>
-                  <a:srgbClr val="003DA5"/>
-                </a:solidFill>
-                <a:latin typeface="Arial"/>
-              </a:rPr>
-              <a:t>▪  </a:t>
-            </a:r>
-            <a:r>
-              <a:rPr sz="1600">
-                <a:solidFill>
-                  <a:srgbClr val="1A1A1A"/>
-                </a:solidFill>
-                <a:latin typeface="Arial"/>
-              </a:rPr>
-              <a:t>Ein Konditionengespräch wertbasiert führen – Nutzen kommunizieren bevor über Konditionen gesprochen wird</a:t>
+              <a:rPr sz="900" b="0" i="0">
+                <a:solidFill>
+                  <a:srgbClr val="889ACC"/>
+                </a:solidFill>
+                <a:latin typeface="Arial"/>
+              </a:rPr>
+              <a:t>M14 · Ertragsoptimierung pro Kunde  ·  v0.3  ·  Benedikt Zoller Coaching</a:t>
             </a:r>
           </a:p>
         </p:txBody>
@@ -4658,8 +8032,8 @@
         </p:nvSpPr>
         <p:spPr>
           <a:xfrm>
-            <a:off x="365760" y="2286000"/>
-            <a:ext cx="11430000" cy="1828800"/>
+            <a:off x="365760" y="2011680"/>
+            <a:ext cx="11430000" cy="2011680"/>
           </a:xfrm>
           <a:prstGeom prst="rect">
             <a:avLst/>
@@ -4674,7 +8048,7 @@
           <a:p>
             <a:pPr algn="l"/>
             <a:r>
-              <a:rPr sz="3600" b="1">
+              <a:rPr sz="3600" b="1" i="0">
                 <a:solidFill>
                   <a:srgbClr val="FFFFFF"/>
                 </a:solidFill>
@@ -4699,7 +8073,7 @@
     <p:bg>
       <p:bgPr>
         <a:solidFill>
-          <a:srgbClr val="1A1A1A"/>
+          <a:srgbClr val="FFFFFF"/>
         </a:solidFill>
         <a:effectLst/>
       </p:bgPr>
@@ -4726,7 +8100,7 @@
             <a:avLst/>
           </a:prstGeom>
           <a:solidFill>
-            <a:srgbClr val="E05B00"/>
+            <a:srgbClr val="003DA5"/>
           </a:solidFill>
           <a:ln>
             <a:noFill/>
@@ -4762,8 +8136,8 @@
         </p:nvSpPr>
         <p:spPr>
           <a:xfrm>
-            <a:off x="365760" y="2286000"/>
-            <a:ext cx="11430000" cy="1828800"/>
+            <a:off x="228600" y="182880"/>
+            <a:ext cx="11430000" cy="320040"/>
           </a:xfrm>
           <a:prstGeom prst="rect">
             <a:avLst/>
@@ -4778,13 +8152,164 @@
           <a:p>
             <a:pPr algn="l"/>
             <a:r>
-              <a:rPr sz="3600" b="1">
-                <a:solidFill>
-                  <a:srgbClr val="FFFFFF"/>
-                </a:solidFill>
-                <a:latin typeface="Arial"/>
-              </a:rPr>
-              <a:t>Die vier Ertragskomponenten</a:t>
+              <a:rPr sz="900" b="0" i="0">
+                <a:solidFill>
+                  <a:srgbClr val="556575"/>
+                </a:solidFill>
+                <a:latin typeface="Arial"/>
+              </a:rPr>
+              <a:t>M14 · Modulinhalte</a:t>
+            </a:r>
+          </a:p>
+        </p:txBody>
+      </p:sp>
+      <p:sp>
+        <p:nvSpPr>
+          <p:cNvPr id="4" name="TextBox 3"/>
+          <p:cNvSpPr txBox="1"/>
+          <p:nvPr/>
+        </p:nvSpPr>
+        <p:spPr>
+          <a:xfrm>
+            <a:off x="365760" y="274320"/>
+            <a:ext cx="11430000" cy="777240"/>
+          </a:xfrm>
+          <a:prstGeom prst="rect">
+            <a:avLst/>
+          </a:prstGeom>
+          <a:noFill/>
+        </p:spPr>
+        <p:txBody>
+          <a:bodyPr wrap="square">
+            <a:spAutoFit/>
+          </a:bodyPr>
+          <a:lstStyle/>
+          <a:p>
+            <a:pPr algn="l"/>
+            <a:r>
+              <a:rPr sz="2200" b="1" i="0">
+                <a:solidFill>
+                  <a:srgbClr val="003DA5"/>
+                </a:solidFill>
+                <a:latin typeface="Arial"/>
+              </a:rPr>
+              <a:t>Warum Ertrag je Kunde messen?</a:t>
+            </a:r>
+          </a:p>
+        </p:txBody>
+      </p:sp>
+      <p:sp>
+        <p:nvSpPr>
+          <p:cNvPr id="5" name="Rectangle 4"/>
+          <p:cNvSpPr/>
+          <p:nvPr/>
+        </p:nvSpPr>
+        <p:spPr>
+          <a:xfrm>
+            <a:off x="365760" y="1005840"/>
+            <a:ext cx="11430000" cy="27432"/>
+          </a:xfrm>
+          <a:prstGeom prst="rect">
+            <a:avLst/>
+          </a:prstGeom>
+          <a:solidFill>
+            <a:srgbClr val="D1D5DB"/>
+          </a:solidFill>
+          <a:ln>
+            <a:noFill/>
+          </a:ln>
+        </p:spPr>
+        <p:style>
+          <a:lnRef idx="1">
+            <a:schemeClr val="accent1"/>
+          </a:lnRef>
+          <a:fillRef idx="3">
+            <a:schemeClr val="accent1"/>
+          </a:fillRef>
+          <a:effectRef idx="2">
+            <a:schemeClr val="accent1"/>
+          </a:effectRef>
+          <a:fontRef idx="minor">
+            <a:schemeClr val="lt1"/>
+          </a:fontRef>
+        </p:style>
+        <p:txBody>
+          <a:bodyPr rtlCol="0" anchor="ctr"/>
+          <a:lstStyle/>
+          <a:p>
+            <a:pPr algn="ctr"/>
+          </a:p>
+        </p:txBody>
+      </p:sp>
+      <p:sp>
+        <p:nvSpPr>
+          <p:cNvPr id="6" name="TextBox 5"/>
+          <p:cNvSpPr txBox="1"/>
+          <p:nvPr/>
+        </p:nvSpPr>
+        <p:spPr>
+          <a:xfrm>
+            <a:off x="365760" y="1143000"/>
+            <a:ext cx="11430000" cy="5212080"/>
+          </a:xfrm>
+          <a:prstGeom prst="rect">
+            <a:avLst/>
+          </a:prstGeom>
+          <a:noFill/>
+        </p:spPr>
+        <p:txBody>
+          <a:bodyPr wrap="square">
+            <a:spAutoFit/>
+          </a:bodyPr>
+          <a:lstStyle/>
+          <a:p>
+            <a:pPr>
+              <a:spcBef>
+                <a:spcPts val="500"/>
+              </a:spcBef>
+            </a:pPr>
+            <a:r>
+              <a:rPr sz="1500">
+                <a:solidFill>
+                  <a:srgbClr val="003DA5"/>
+                </a:solidFill>
+                <a:latin typeface="Arial"/>
+              </a:rPr>
+              <a:t>▪  </a:t>
+            </a:r>
+            <a:r>
+              <a:rPr sz="1700">
+                <a:solidFill>
+                  <a:srgbClr val="1A1A1A"/>
+                </a:solidFill>
+                <a:latin typeface="Arial"/>
+              </a:rPr>
+              <a:t>Die zeb-Firmenkundenstudie zeigt, dass in einem typischen VR-Bank-Firmenkundenbestand 20 % der Kunden 80 % des Deckungsbeitrags erzeugen. Ohne eine klare…</a:t>
+            </a:r>
+          </a:p>
+          <a:p>
+            <a:pPr>
+              <a:spcBef>
+                <a:spcPts val="500"/>
+              </a:spcBef>
+            </a:pPr>
+            <a:r>
+              <a:rPr sz="1500">
+                <a:solidFill>
+                  <a:srgbClr val="003DA5"/>
+                </a:solidFill>
+                <a:latin typeface="Arial"/>
+              </a:rPr>
+              <a:t>▪  </a:t>
+            </a:r>
+            <a:r>
+              <a:rPr sz="1700">
+                <a:solidFill>
+                  <a:srgbClr val="1A1A1A"/>
+                </a:solidFill>
+                <a:latin typeface="Arial"/>
+              </a:rPr>
+              <a:t>Schierenbeck et al. definieren die Kunden-Deckungsbeitrag-Rechnung als das zentrale Steuerungsinstrument der kundenbezogenen Rentabilitätsanalyse im…</a:t>
             </a:r>
           </a:p>
         </p:txBody>
@@ -4866,8 +8391,8 @@
         </p:nvSpPr>
         <p:spPr>
           <a:xfrm>
-            <a:off x="365760" y="2286000"/>
-            <a:ext cx="11430000" cy="1828800"/>
+            <a:off x="365760" y="2011680"/>
+            <a:ext cx="11430000" cy="2011680"/>
           </a:xfrm>
           <a:prstGeom prst="rect">
             <a:avLst/>
@@ -4882,13 +8407,13 @@
           <a:p>
             <a:pPr algn="l"/>
             <a:r>
-              <a:rPr sz="3600" b="1">
+              <a:rPr sz="3600" b="1" i="0">
                 <a:solidFill>
                   <a:srgbClr val="FFFFFF"/>
                 </a:solidFill>
                 <a:latin typeface="Arial"/>
               </a:rPr>
-              <a:t>Rechenbeispiel: Kundendeckungsbeitrag Müller GmbH</a:t>
+              <a:t>Die vier Ertragskomponenten</a:t>
             </a:r>
           </a:p>
         </p:txBody>
@@ -4907,7 +8432,7 @@
     <p:bg>
       <p:bgPr>
         <a:solidFill>
-          <a:srgbClr val="1A1A1A"/>
+          <a:srgbClr val="FFFFFF"/>
         </a:solidFill>
         <a:effectLst/>
       </p:bgPr>
@@ -4934,7 +8459,7 @@
             <a:avLst/>
           </a:prstGeom>
           <a:solidFill>
-            <a:srgbClr val="E05B00"/>
+            <a:srgbClr val="003DA5"/>
           </a:solidFill>
           <a:ln>
             <a:noFill/>
@@ -4970,8 +8495,8 @@
         </p:nvSpPr>
         <p:spPr>
           <a:xfrm>
-            <a:off x="365760" y="2286000"/>
-            <a:ext cx="11430000" cy="1828800"/>
+            <a:off x="228600" y="182880"/>
+            <a:ext cx="11430000" cy="320040"/>
           </a:xfrm>
           <a:prstGeom prst="rect">
             <a:avLst/>
@@ -4986,17 +8511,530 @@
           <a:p>
             <a:pPr algn="l"/>
             <a:r>
-              <a:rPr sz="3600" b="1">
-                <a:solidFill>
-                  <a:srgbClr val="FFFFFF"/>
-                </a:solidFill>
-                <a:latin typeface="Arial"/>
-              </a:rPr>
-              <a:t>Der Expected Loss als Kalkulationsgrundlage</a:t>
-            </a:r>
-          </a:p>
-        </p:txBody>
-      </p:sp>
+              <a:rPr sz="900" b="0" i="0">
+                <a:solidFill>
+                  <a:srgbClr val="556575"/>
+                </a:solidFill>
+                <a:latin typeface="Arial"/>
+              </a:rPr>
+              <a:t>M14 · Modulinhalte</a:t>
+            </a:r>
+          </a:p>
+        </p:txBody>
+      </p:sp>
+      <p:sp>
+        <p:nvSpPr>
+          <p:cNvPr id="4" name="TextBox 3"/>
+          <p:cNvSpPr txBox="1"/>
+          <p:nvPr/>
+        </p:nvSpPr>
+        <p:spPr>
+          <a:xfrm>
+            <a:off x="365760" y="274320"/>
+            <a:ext cx="11430000" cy="777240"/>
+          </a:xfrm>
+          <a:prstGeom prst="rect">
+            <a:avLst/>
+          </a:prstGeom>
+          <a:noFill/>
+        </p:spPr>
+        <p:txBody>
+          <a:bodyPr wrap="square">
+            <a:spAutoFit/>
+          </a:bodyPr>
+          <a:lstStyle/>
+          <a:p>
+            <a:pPr algn="l"/>
+            <a:r>
+              <a:rPr sz="2200" b="1" i="0">
+                <a:solidFill>
+                  <a:srgbClr val="003DA5"/>
+                </a:solidFill>
+                <a:latin typeface="Arial"/>
+              </a:rPr>
+              <a:t>Die vier Ertragskomponenten</a:t>
+            </a:r>
+          </a:p>
+        </p:txBody>
+      </p:sp>
+      <p:sp>
+        <p:nvSpPr>
+          <p:cNvPr id="5" name="Rectangle 4"/>
+          <p:cNvSpPr/>
+          <p:nvPr/>
+        </p:nvSpPr>
+        <p:spPr>
+          <a:xfrm>
+            <a:off x="365760" y="1005840"/>
+            <a:ext cx="11430000" cy="27432"/>
+          </a:xfrm>
+          <a:prstGeom prst="rect">
+            <a:avLst/>
+          </a:prstGeom>
+          <a:solidFill>
+            <a:srgbClr val="D1D5DB"/>
+          </a:solidFill>
+          <a:ln>
+            <a:noFill/>
+          </a:ln>
+        </p:spPr>
+        <p:style>
+          <a:lnRef idx="1">
+            <a:schemeClr val="accent1"/>
+          </a:lnRef>
+          <a:fillRef idx="3">
+            <a:schemeClr val="accent1"/>
+          </a:fillRef>
+          <a:effectRef idx="2">
+            <a:schemeClr val="accent1"/>
+          </a:effectRef>
+          <a:fontRef idx="minor">
+            <a:schemeClr val="lt1"/>
+          </a:fontRef>
+        </p:style>
+        <p:txBody>
+          <a:bodyPr rtlCol="0" anchor="ctr"/>
+          <a:lstStyle/>
+          <a:p>
+            <a:pPr algn="ctr"/>
+          </a:p>
+        </p:txBody>
+      </p:sp>
+      <p:graphicFrame>
+        <p:nvGraphicFramePr>
+          <p:cNvPr id="6" name="Table 5"/>
+          <p:cNvGraphicFramePr>
+            <a:graphicFrameLocks noGrp="1"/>
+          </p:cNvGraphicFramePr>
+          <p:nvPr/>
+        </p:nvGraphicFramePr>
+        <p:xfrm>
+          <a:off x="365760" y="1143000"/>
+          <a:ext cx="11430000" cy="2852928"/>
+        </p:xfrm>
+        <a:graphic>
+          <a:graphicData uri="http://schemas.openxmlformats.org/drawingml/2006/table">
+            <a:tbl>
+              <a:tblPr firstRow="1" bandRow="1">
+                <a:tableStyleId>{5C22544A-7EE6-4342-B048-85BDC9FD1C3A}</a:tableStyleId>
+              </a:tblPr>
+              <a:tblGrid>
+                <a:gridCol w="3810000"/>
+                <a:gridCol w="3810000"/>
+                <a:gridCol w="3810000"/>
+              </a:tblGrid>
+              <a:tr h="475488">
+                <a:tc>
+                  <a:txBody>
+                    <a:bodyPr wrap="square"/>
+                    <a:lstStyle/>
+                    <a:p>
+                      <a:r>
+                        <a:rPr sz="1100" b="1">
+                          <a:solidFill>
+                            <a:srgbClr val="FFFFFF"/>
+                          </a:solidFill>
+                          <a:latin typeface="Arial"/>
+                        </a:rPr>
+                        <a:t>Komponente</a:t>
+                      </a:r>
+                    </a:p>
+                  </a:txBody>
+                  <a:tcPr>
+                    <a:solidFill>
+                      <a:srgbClr val="003DA5"/>
+                    </a:solidFill>
+                  </a:tcPr>
+                </a:tc>
+                <a:tc>
+                  <a:txBody>
+                    <a:bodyPr wrap="square"/>
+                    <a:lstStyle/>
+                    <a:p>
+                      <a:r>
+                        <a:rPr sz="1100" b="1">
+                          <a:solidFill>
+                            <a:srgbClr val="FFFFFF"/>
+                          </a:solidFill>
+                          <a:latin typeface="Arial"/>
+                        </a:rPr>
+                        <a:t>Beschreibung</a:t>
+                      </a:r>
+                    </a:p>
+                  </a:txBody>
+                  <a:tcPr>
+                    <a:solidFill>
+                      <a:srgbClr val="003DA5"/>
+                    </a:solidFill>
+                  </a:tcPr>
+                </a:tc>
+                <a:tc>
+                  <a:txBody>
+                    <a:bodyPr wrap="square"/>
+                    <a:lstStyle/>
+                    <a:p>
+                      <a:r>
+                        <a:rPr sz="1100" b="1">
+                          <a:solidFill>
+                            <a:srgbClr val="FFFFFF"/>
+                          </a:solidFill>
+                          <a:latin typeface="Arial"/>
+                        </a:rPr>
+                        <a:t>Typische Treiber</a:t>
+                      </a:r>
+                    </a:p>
+                  </a:txBody>
+                  <a:tcPr>
+                    <a:solidFill>
+                      <a:srgbClr val="003DA5"/>
+                    </a:solidFill>
+                  </a:tcPr>
+                </a:tc>
+              </a:tr>
+              <a:tr h="475488">
+                <a:tc>
+                  <a:txBody>
+                    <a:bodyPr wrap="square"/>
+                    <a:lstStyle/>
+                    <a:p>
+                      <a:r>
+                        <a:rPr sz="1100" b="0">
+                          <a:solidFill>
+                            <a:srgbClr val="1A1A1A"/>
+                          </a:solidFill>
+                          <a:latin typeface="Arial"/>
+                        </a:rPr>
+                        <a:t>Zinsüberschuss</a:t>
+                      </a:r>
+                    </a:p>
+                  </a:txBody>
+                  <a:tcPr>
+                    <a:solidFill>
+                      <a:srgbClr val="FFFFFF"/>
+                    </a:solidFill>
+                  </a:tcPr>
+                </a:tc>
+                <a:tc>
+                  <a:txBody>
+                    <a:bodyPr wrap="square"/>
+                    <a:lstStyle/>
+                    <a:p>
+                      <a:r>
+                        <a:rPr sz="1100" b="0">
+                          <a:solidFill>
+                            <a:srgbClr val="1A1A1A"/>
+                          </a:solidFill>
+                          <a:latin typeface="Arial"/>
+                        </a:rPr>
+                        <a:t>Zinsmarge aus Kredit- und Einlagengeschäft</a:t>
+                      </a:r>
+                    </a:p>
+                  </a:txBody>
+                  <a:tcPr>
+                    <a:solidFill>
+                      <a:srgbClr val="FFFFFF"/>
+                    </a:solidFill>
+                  </a:tcPr>
+                </a:tc>
+                <a:tc>
+                  <a:txBody>
+                    <a:bodyPr wrap="square"/>
+                    <a:lstStyle/>
+                    <a:p>
+                      <a:r>
+                        <a:rPr sz="1100" b="0">
+                          <a:solidFill>
+                            <a:srgbClr val="1A1A1A"/>
+                          </a:solidFill>
+                          <a:latin typeface="Arial"/>
+                        </a:rPr>
+                        <a:t>Konditionshöhe, Volumen, Laufzeit</a:t>
+                      </a:r>
+                    </a:p>
+                  </a:txBody>
+                  <a:tcPr>
+                    <a:solidFill>
+                      <a:srgbClr val="FFFFFF"/>
+                    </a:solidFill>
+                  </a:tcPr>
+                </a:tc>
+              </a:tr>
+              <a:tr h="475488">
+                <a:tc>
+                  <a:txBody>
+                    <a:bodyPr wrap="square"/>
+                    <a:lstStyle/>
+                    <a:p>
+                      <a:r>
+                        <a:rPr sz="1100" b="0">
+                          <a:solidFill>
+                            <a:srgbClr val="1A1A1A"/>
+                          </a:solidFill>
+                          <a:latin typeface="Arial"/>
+                        </a:rPr>
+                        <a:t>Provisionsertrag</a:t>
+                      </a:r>
+                    </a:p>
+                  </a:txBody>
+                  <a:tcPr>
+                    <a:solidFill>
+                      <a:srgbClr val="F4F6FA"/>
+                    </a:solidFill>
+                  </a:tcPr>
+                </a:tc>
+                <a:tc>
+                  <a:txBody>
+                    <a:bodyPr wrap="square"/>
+                    <a:lstStyle/>
+                    <a:p>
+                      <a:r>
+                        <a:rPr sz="1100" b="0">
+                          <a:solidFill>
+                            <a:srgbClr val="1A1A1A"/>
+                          </a:solidFill>
+                          <a:latin typeface="Arial"/>
+                        </a:rPr>
+                        <a:t>Gebühren aus ZV, Avale, Dokumenten, Beratung</a:t>
+                      </a:r>
+                    </a:p>
+                  </a:txBody>
+                  <a:tcPr>
+                    <a:solidFill>
+                      <a:srgbClr val="F4F6FA"/>
+                    </a:solidFill>
+                  </a:tcPr>
+                </a:tc>
+                <a:tc>
+                  <a:txBody>
+                    <a:bodyPr wrap="square"/>
+                    <a:lstStyle/>
+                    <a:p>
+                      <a:r>
+                        <a:rPr sz="1100" b="0">
+                          <a:solidFill>
+                            <a:srgbClr val="1A1A1A"/>
+                          </a:solidFill>
+                          <a:latin typeface="Arial"/>
+                        </a:rPr>
+                        <a:t>Zahlungsverkehrsvolumen, Produktkomplexität</a:t>
+                      </a:r>
+                    </a:p>
+                  </a:txBody>
+                  <a:tcPr>
+                    <a:solidFill>
+                      <a:srgbClr val="F4F6FA"/>
+                    </a:solidFill>
+                  </a:tcPr>
+                </a:tc>
+              </a:tr>
+              <a:tr h="475488">
+                <a:tc>
+                  <a:txBody>
+                    <a:bodyPr wrap="square"/>
+                    <a:lstStyle/>
+                    <a:p>
+                      <a:r>
+                        <a:rPr sz="1100" b="0">
+                          <a:solidFill>
+                            <a:srgbClr val="1A1A1A"/>
+                          </a:solidFill>
+                          <a:latin typeface="Arial"/>
+                        </a:rPr>
+                        <a:t>Verbundertrag</a:t>
+                      </a:r>
+                    </a:p>
+                  </a:txBody>
+                  <a:tcPr>
+                    <a:solidFill>
+                      <a:srgbClr val="FFFFFF"/>
+                    </a:solidFill>
+                  </a:tcPr>
+                </a:tc>
+                <a:tc>
+                  <a:txBody>
+                    <a:bodyPr wrap="square"/>
+                    <a:lstStyle/>
+                    <a:p>
+                      <a:r>
+                        <a:rPr sz="1100" b="0">
+                          <a:solidFill>
+                            <a:srgbClr val="1A1A1A"/>
+                          </a:solidFill>
+                          <a:latin typeface="Arial"/>
+                        </a:rPr>
+                        <a:t>Provisionen aus Verbundprodukten (R+V, Union Investment, etc.)</a:t>
+                      </a:r>
+                    </a:p>
+                  </a:txBody>
+                  <a:tcPr>
+                    <a:solidFill>
+                      <a:srgbClr val="FFFFFF"/>
+                    </a:solidFill>
+                  </a:tcPr>
+                </a:tc>
+                <a:tc>
+                  <a:txBody>
+                    <a:bodyPr wrap="square"/>
+                    <a:lstStyle/>
+                    <a:p>
+                      <a:r>
+                        <a:rPr sz="1100" b="0">
+                          <a:solidFill>
+                            <a:srgbClr val="1A1A1A"/>
+                          </a:solidFill>
+                          <a:latin typeface="Arial"/>
+                        </a:rPr>
+                        <a:t>Cross-Selling-Tiefe, Verbundpartner-Einbindung</a:t>
+                      </a:r>
+                    </a:p>
+                  </a:txBody>
+                  <a:tcPr>
+                    <a:solidFill>
+                      <a:srgbClr val="FFFFFF"/>
+                    </a:solidFill>
+                  </a:tcPr>
+                </a:tc>
+              </a:tr>
+              <a:tr h="475488">
+                <a:tc>
+                  <a:txBody>
+                    <a:bodyPr wrap="square"/>
+                    <a:lstStyle/>
+                    <a:p>
+                      <a:r>
+                        <a:rPr sz="1100" b="0">
+                          <a:solidFill>
+                            <a:srgbClr val="1A1A1A"/>
+                          </a:solidFill>
+                          <a:latin typeface="Arial"/>
+                        </a:rPr>
+                        <a:t>Risikokosten</a:t>
+                      </a:r>
+                    </a:p>
+                  </a:txBody>
+                  <a:tcPr>
+                    <a:solidFill>
+                      <a:srgbClr val="F4F6FA"/>
+                    </a:solidFill>
+                  </a:tcPr>
+                </a:tc>
+                <a:tc>
+                  <a:txBody>
+                    <a:bodyPr wrap="square"/>
+                    <a:lstStyle/>
+                    <a:p>
+                      <a:r>
+                        <a:rPr sz="1100" b="0">
+                          <a:solidFill>
+                            <a:srgbClr val="1A1A1A"/>
+                          </a:solidFill>
+                          <a:latin typeface="Arial"/>
+                        </a:rPr>
+                        <a:t>Expected Loss (EL = PD × LGD × EAD)</a:t>
+                      </a:r>
+                    </a:p>
+                  </a:txBody>
+                  <a:tcPr>
+                    <a:solidFill>
+                      <a:srgbClr val="F4F6FA"/>
+                    </a:solidFill>
+                  </a:tcPr>
+                </a:tc>
+                <a:tc>
+                  <a:txBody>
+                    <a:bodyPr wrap="square"/>
+                    <a:lstStyle/>
+                    <a:p>
+                      <a:r>
+                        <a:rPr sz="1100" b="0">
+                          <a:solidFill>
+                            <a:srgbClr val="1A1A1A"/>
+                          </a:solidFill>
+                          <a:latin typeface="Arial"/>
+                        </a:rPr>
+                        <a:t>Ratingklasse, Besicherung, Kreditvolumen</a:t>
+                      </a:r>
+                    </a:p>
+                  </a:txBody>
+                  <a:tcPr>
+                    <a:solidFill>
+                      <a:srgbClr val="F4F6FA"/>
+                    </a:solidFill>
+                  </a:tcPr>
+                </a:tc>
+              </a:tr>
+              <a:tr h="475488">
+                <a:tc>
+                  <a:txBody>
+                    <a:bodyPr wrap="square"/>
+                    <a:lstStyle/>
+                    <a:p>
+                      <a:r>
+                        <a:rPr sz="1100" b="0">
+                          <a:solidFill>
+                            <a:srgbClr val="1A1A1A"/>
+                          </a:solidFill>
+                          <a:latin typeface="Arial"/>
+                        </a:rPr>
+                        <a:t>Betriebskosten</a:t>
+                      </a:r>
+                    </a:p>
+                  </a:txBody>
+                  <a:tcPr>
+                    <a:solidFill>
+                      <a:srgbClr val="FFFFFF"/>
+                    </a:solidFill>
+                  </a:tcPr>
+                </a:tc>
+                <a:tc>
+                  <a:txBody>
+                    <a:bodyPr wrap="square"/>
+                    <a:lstStyle/>
+                    <a:p>
+                      <a:r>
+                        <a:rPr sz="1100" b="0">
+                          <a:solidFill>
+                            <a:srgbClr val="1A1A1A"/>
+                          </a:solidFill>
+                          <a:latin typeface="Arial"/>
+                        </a:rPr>
+                        <a:t>Direkter Betreuungsaufwand (Std. × Kostensatz)</a:t>
+                      </a:r>
+                    </a:p>
+                  </a:txBody>
+                  <a:tcPr>
+                    <a:solidFill>
+                      <a:srgbClr val="FFFFFF"/>
+                    </a:solidFill>
+                  </a:tcPr>
+                </a:tc>
+                <a:tc>
+                  <a:txBody>
+                    <a:bodyPr wrap="square"/>
+                    <a:lstStyle/>
+                    <a:p>
+                      <a:r>
+                        <a:rPr sz="1100" b="0">
+                          <a:solidFill>
+                            <a:srgbClr val="1A1A1A"/>
+                          </a:solidFill>
+                          <a:latin typeface="Arial"/>
+                        </a:rPr>
+                        <a:t>Gesprächsfrequenz, Komplexität, Sonderleistungen</a:t>
+                      </a:r>
+                    </a:p>
+                  </a:txBody>
+                  <a:tcPr>
+                    <a:solidFill>
+                      <a:srgbClr val="FFFFFF"/>
+                    </a:solidFill>
+                  </a:tcPr>
+                </a:tc>
+              </a:tr>
+            </a:tbl>
+          </a:graphicData>
+        </a:graphic>
+      </p:graphicFrame>
     </p:spTree>
   </p:cSld>
   <p:clrMapOvr>
@@ -5074,8 +9112,8 @@
         </p:nvSpPr>
         <p:spPr>
           <a:xfrm>
-            <a:off x="365760" y="2286000"/>
-            <a:ext cx="11430000" cy="1828800"/>
+            <a:off x="365760" y="2011680"/>
+            <a:ext cx="11430000" cy="2011680"/>
           </a:xfrm>
           <a:prstGeom prst="rect">
             <a:avLst/>
@@ -5090,13 +9128,13 @@
           <a:p>
             <a:pPr algn="l"/>
             <a:r>
-              <a:rPr sz="3600" b="1">
+              <a:rPr sz="3600" b="1" i="0">
                 <a:solidFill>
                   <a:srgbClr val="FFFFFF"/>
                 </a:solidFill>
                 <a:latin typeface="Arial"/>
               </a:rPr>
-              <a:t>Das Nettomargenziel (NMZ) als Steuerungsgröße</a:t>
+              <a:t>Rechenbeispiel: Kundendeckungsbeitrag Müller GmbH</a:t>
             </a:r>
           </a:p>
         </p:txBody>
@@ -5115,7 +9153,7 @@
     <p:bg>
       <p:bgPr>
         <a:solidFill>
-          <a:srgbClr val="1A1A1A"/>
+          <a:srgbClr val="FFFFFF"/>
         </a:solidFill>
         <a:effectLst/>
       </p:bgPr>
@@ -5142,7 +9180,7 @@
             <a:avLst/>
           </a:prstGeom>
           <a:solidFill>
-            <a:srgbClr val="E05B00"/>
+            <a:srgbClr val="003DA5"/>
           </a:solidFill>
           <a:ln>
             <a:noFill/>
@@ -5178,8 +9216,8 @@
         </p:nvSpPr>
         <p:spPr>
           <a:xfrm>
-            <a:off x="365760" y="2286000"/>
-            <a:ext cx="11430000" cy="1828800"/>
+            <a:off x="228600" y="182880"/>
+            <a:ext cx="11430000" cy="320040"/>
           </a:xfrm>
           <a:prstGeom prst="rect">
             <a:avLst/>
@@ -5194,17 +9232,581 @@
           <a:p>
             <a:pPr algn="l"/>
             <a:r>
-              <a:rPr sz="3600" b="1">
-                <a:solidFill>
-                  <a:srgbClr val="FFFFFF"/>
-                </a:solidFill>
-                <a:latin typeface="Arial"/>
-              </a:rPr>
-              <a:t>Konditionsanpassung vorbereiten</a:t>
-            </a:r>
-          </a:p>
-        </p:txBody>
-      </p:sp>
+              <a:rPr sz="900" b="0" i="0">
+                <a:solidFill>
+                  <a:srgbClr val="556575"/>
+                </a:solidFill>
+                <a:latin typeface="Arial"/>
+              </a:rPr>
+              <a:t>M14 · Modulinhalte</a:t>
+            </a:r>
+          </a:p>
+        </p:txBody>
+      </p:sp>
+      <p:sp>
+        <p:nvSpPr>
+          <p:cNvPr id="4" name="TextBox 3"/>
+          <p:cNvSpPr txBox="1"/>
+          <p:nvPr/>
+        </p:nvSpPr>
+        <p:spPr>
+          <a:xfrm>
+            <a:off x="365760" y="274320"/>
+            <a:ext cx="11430000" cy="777240"/>
+          </a:xfrm>
+          <a:prstGeom prst="rect">
+            <a:avLst/>
+          </a:prstGeom>
+          <a:noFill/>
+        </p:spPr>
+        <p:txBody>
+          <a:bodyPr wrap="square">
+            <a:spAutoFit/>
+          </a:bodyPr>
+          <a:lstStyle/>
+          <a:p>
+            <a:pPr algn="l"/>
+            <a:r>
+              <a:rPr sz="2200" b="1" i="0">
+                <a:solidFill>
+                  <a:srgbClr val="003DA5"/>
+                </a:solidFill>
+                <a:latin typeface="Arial"/>
+              </a:rPr>
+              <a:t>Rechenbeispiel: Kundendeckungsbeitrag Müller GmbH</a:t>
+            </a:r>
+          </a:p>
+        </p:txBody>
+      </p:sp>
+      <p:sp>
+        <p:nvSpPr>
+          <p:cNvPr id="5" name="Rectangle 4"/>
+          <p:cNvSpPr/>
+          <p:nvPr/>
+        </p:nvSpPr>
+        <p:spPr>
+          <a:xfrm>
+            <a:off x="365760" y="1005840"/>
+            <a:ext cx="11430000" cy="27432"/>
+          </a:xfrm>
+          <a:prstGeom prst="rect">
+            <a:avLst/>
+          </a:prstGeom>
+          <a:solidFill>
+            <a:srgbClr val="D1D5DB"/>
+          </a:solidFill>
+          <a:ln>
+            <a:noFill/>
+          </a:ln>
+        </p:spPr>
+        <p:style>
+          <a:lnRef idx="1">
+            <a:schemeClr val="accent1"/>
+          </a:lnRef>
+          <a:fillRef idx="3">
+            <a:schemeClr val="accent1"/>
+          </a:fillRef>
+          <a:effectRef idx="2">
+            <a:schemeClr val="accent1"/>
+          </a:effectRef>
+          <a:fontRef idx="minor">
+            <a:schemeClr val="lt1"/>
+          </a:fontRef>
+        </p:style>
+        <p:txBody>
+          <a:bodyPr rtlCol="0" anchor="ctr"/>
+          <a:lstStyle/>
+          <a:p>
+            <a:pPr algn="ctr"/>
+          </a:p>
+        </p:txBody>
+      </p:sp>
+      <p:graphicFrame>
+        <p:nvGraphicFramePr>
+          <p:cNvPr id="6" name="Table 5"/>
+          <p:cNvGraphicFramePr>
+            <a:graphicFrameLocks noGrp="1"/>
+          </p:cNvGraphicFramePr>
+          <p:nvPr/>
+        </p:nvGraphicFramePr>
+        <p:xfrm>
+          <a:off x="365760" y="1143000"/>
+          <a:ext cx="11430000" cy="4754880"/>
+        </p:xfrm>
+        <a:graphic>
+          <a:graphicData uri="http://schemas.openxmlformats.org/drawingml/2006/table">
+            <a:tbl>
+              <a:tblPr firstRow="1" bandRow="1">
+                <a:tableStyleId>{5C22544A-7EE6-4342-B048-85BDC9FD1C3A}</a:tableStyleId>
+              </a:tblPr>
+              <a:tblGrid>
+                <a:gridCol w="5715000"/>
+                <a:gridCol w="5715000"/>
+              </a:tblGrid>
+              <a:tr h="475488">
+                <a:tc>
+                  <a:txBody>
+                    <a:bodyPr wrap="square"/>
+                    <a:lstStyle/>
+                    <a:p>
+                      <a:r>
+                        <a:rPr sz="1100" b="1">
+                          <a:solidFill>
+                            <a:srgbClr val="FFFFFF"/>
+                          </a:solidFill>
+                          <a:latin typeface="Arial"/>
+                        </a:rPr>
+                        <a:t>Position</a:t>
+                      </a:r>
+                    </a:p>
+                  </a:txBody>
+                  <a:tcPr>
+                    <a:solidFill>
+                      <a:srgbClr val="003DA5"/>
+                    </a:solidFill>
+                  </a:tcPr>
+                </a:tc>
+                <a:tc>
+                  <a:txBody>
+                    <a:bodyPr wrap="square"/>
+                    <a:lstStyle/>
+                    <a:p>
+                      <a:r>
+                        <a:rPr sz="1100" b="1">
+                          <a:solidFill>
+                            <a:srgbClr val="FFFFFF"/>
+                          </a:solidFill>
+                          <a:latin typeface="Arial"/>
+                        </a:rPr>
+                        <a:t>Betrag p.a.</a:t>
+                      </a:r>
+                    </a:p>
+                  </a:txBody>
+                  <a:tcPr>
+                    <a:solidFill>
+                      <a:srgbClr val="003DA5"/>
+                    </a:solidFill>
+                  </a:tcPr>
+                </a:tc>
+              </a:tr>
+              <a:tr h="475488">
+                <a:tc>
+                  <a:txBody>
+                    <a:bodyPr wrap="square"/>
+                    <a:lstStyle/>
+                    <a:p>
+                      <a:r>
+                        <a:rPr sz="1100" b="0">
+                          <a:solidFill>
+                            <a:srgbClr val="1A1A1A"/>
+                          </a:solidFill>
+                          <a:latin typeface="Arial"/>
+                        </a:rPr>
+                        <a:t>Kreditzinsen (Marge 1,85 % auf 800.000 EUR)</a:t>
+                      </a:r>
+                    </a:p>
+                  </a:txBody>
+                  <a:tcPr>
+                    <a:solidFill>
+                      <a:srgbClr val="FFFFFF"/>
+                    </a:solidFill>
+                  </a:tcPr>
+                </a:tc>
+                <a:tc>
+                  <a:txBody>
+                    <a:bodyPr wrap="square"/>
+                    <a:lstStyle/>
+                    <a:p>
+                      <a:r>
+                        <a:rPr sz="1100" b="0">
+                          <a:solidFill>
+                            <a:srgbClr val="1A1A1A"/>
+                          </a:solidFill>
+                          <a:latin typeface="Arial"/>
+                        </a:rPr>
+                        <a:t>14.800 EUR</a:t>
+                      </a:r>
+                    </a:p>
+                  </a:txBody>
+                  <a:tcPr>
+                    <a:solidFill>
+                      <a:srgbClr val="FFFFFF"/>
+                    </a:solidFill>
+                  </a:tcPr>
+                </a:tc>
+              </a:tr>
+              <a:tr h="475488">
+                <a:tc>
+                  <a:txBody>
+                    <a:bodyPr wrap="square"/>
+                    <a:lstStyle/>
+                    <a:p>
+                      <a:r>
+                        <a:rPr sz="1100" b="0">
+                          <a:solidFill>
+                            <a:srgbClr val="1A1A1A"/>
+                          </a:solidFill>
+                          <a:latin typeface="Arial"/>
+                        </a:rPr>
+                        <a:t>Einlagenzinsen (Marge 0,45 % auf 300.000 EUR)</a:t>
+                      </a:r>
+                    </a:p>
+                  </a:txBody>
+                  <a:tcPr>
+                    <a:solidFill>
+                      <a:srgbClr val="F4F6FA"/>
+                    </a:solidFill>
+                  </a:tcPr>
+                </a:tc>
+                <a:tc>
+                  <a:txBody>
+                    <a:bodyPr wrap="square"/>
+                    <a:lstStyle/>
+                    <a:p>
+                      <a:r>
+                        <a:rPr sz="1100" b="0">
+                          <a:solidFill>
+                            <a:srgbClr val="1A1A1A"/>
+                          </a:solidFill>
+                          <a:latin typeface="Arial"/>
+                        </a:rPr>
+                        <a:t>1.350 EUR</a:t>
+                      </a:r>
+                    </a:p>
+                  </a:txBody>
+                  <a:tcPr>
+                    <a:solidFill>
+                      <a:srgbClr val="F4F6FA"/>
+                    </a:solidFill>
+                  </a:tcPr>
+                </a:tc>
+              </a:tr>
+              <a:tr h="475488">
+                <a:tc>
+                  <a:txBody>
+                    <a:bodyPr wrap="square"/>
+                    <a:lstStyle/>
+                    <a:p>
+                      <a:r>
+                        <a:rPr sz="1100" b="0">
+                          <a:solidFill>
+                            <a:srgbClr val="1A1A1A"/>
+                          </a:solidFill>
+                          <a:latin typeface="Arial"/>
+                        </a:rPr>
+                        <a:t>Provisionsertrag ZV, Avale, Beratung</a:t>
+                      </a:r>
+                    </a:p>
+                  </a:txBody>
+                  <a:tcPr>
+                    <a:solidFill>
+                      <a:srgbClr val="FFFFFF"/>
+                    </a:solidFill>
+                  </a:tcPr>
+                </a:tc>
+                <a:tc>
+                  <a:txBody>
+                    <a:bodyPr wrap="square"/>
+                    <a:lstStyle/>
+                    <a:p>
+                      <a:r>
+                        <a:rPr sz="1100" b="0">
+                          <a:solidFill>
+                            <a:srgbClr val="1A1A1A"/>
+                          </a:solidFill>
+                          <a:latin typeface="Arial"/>
+                        </a:rPr>
+                        <a:t>3.200 EUR</a:t>
+                      </a:r>
+                    </a:p>
+                  </a:txBody>
+                  <a:tcPr>
+                    <a:solidFill>
+                      <a:srgbClr val="FFFFFF"/>
+                    </a:solidFill>
+                  </a:tcPr>
+                </a:tc>
+              </a:tr>
+              <a:tr h="475488">
+                <a:tc>
+                  <a:txBody>
+                    <a:bodyPr wrap="square"/>
+                    <a:lstStyle/>
+                    <a:p>
+                      <a:r>
+                        <a:rPr sz="1100" b="0">
+                          <a:solidFill>
+                            <a:srgbClr val="1A1A1A"/>
+                          </a:solidFill>
+                          <a:latin typeface="Arial"/>
+                        </a:rPr>
+                        <a:t>Verbundertrag (R+V Prämie, keine UI-Verbindung)</a:t>
+                      </a:r>
+                    </a:p>
+                  </a:txBody>
+                  <a:tcPr>
+                    <a:solidFill>
+                      <a:srgbClr val="F4F6FA"/>
+                    </a:solidFill>
+                  </a:tcPr>
+                </a:tc>
+                <a:tc>
+                  <a:txBody>
+                    <a:bodyPr wrap="square"/>
+                    <a:lstStyle/>
+                    <a:p>
+                      <a:r>
+                        <a:rPr sz="1100" b="0">
+                          <a:solidFill>
+                            <a:srgbClr val="1A1A1A"/>
+                          </a:solidFill>
+                          <a:latin typeface="Arial"/>
+                        </a:rPr>
+                        <a:t>1.100 EUR</a:t>
+                      </a:r>
+                    </a:p>
+                  </a:txBody>
+                  <a:tcPr>
+                    <a:solidFill>
+                      <a:srgbClr val="F4F6FA"/>
+                    </a:solidFill>
+                  </a:tcPr>
+                </a:tc>
+              </a:tr>
+              <a:tr h="475488">
+                <a:tc>
+                  <a:txBody>
+                    <a:bodyPr wrap="square"/>
+                    <a:lstStyle/>
+                    <a:p>
+                      <a:r>
+                        <a:rPr sz="1100" b="0">
+                          <a:solidFill>
+                            <a:srgbClr val="1A1A1A"/>
+                          </a:solidFill>
+                          <a:latin typeface="Arial"/>
+                        </a:rPr>
+                        <a:t>Bruttoertrag</a:t>
+                      </a:r>
+                    </a:p>
+                  </a:txBody>
+                  <a:tcPr>
+                    <a:solidFill>
+                      <a:srgbClr val="FFFFFF"/>
+                    </a:solidFill>
+                  </a:tcPr>
+                </a:tc>
+                <a:tc>
+                  <a:txBody>
+                    <a:bodyPr wrap="square"/>
+                    <a:lstStyle/>
+                    <a:p>
+                      <a:r>
+                        <a:rPr sz="1100" b="0">
+                          <a:solidFill>
+                            <a:srgbClr val="1A1A1A"/>
+                          </a:solidFill>
+                          <a:latin typeface="Arial"/>
+                        </a:rPr>
+                        <a:t>20.450 EUR</a:t>
+                      </a:r>
+                    </a:p>
+                  </a:txBody>
+                  <a:tcPr>
+                    <a:solidFill>
+                      <a:srgbClr val="FFFFFF"/>
+                    </a:solidFill>
+                  </a:tcPr>
+                </a:tc>
+              </a:tr>
+              <a:tr h="475488">
+                <a:tc>
+                  <a:txBody>
+                    <a:bodyPr wrap="square"/>
+                    <a:lstStyle/>
+                    <a:p>
+                      <a:r>
+                        <a:rPr sz="1100" b="0">
+                          <a:solidFill>
+                            <a:srgbClr val="1A1A1A"/>
+                          </a:solidFill>
+                          <a:latin typeface="Arial"/>
+                        </a:rPr>
+                        <a:t>./. Risikokosten (Rating B, EL 0,8 % × 800.000)</a:t>
+                      </a:r>
+                    </a:p>
+                  </a:txBody>
+                  <a:tcPr>
+                    <a:solidFill>
+                      <a:srgbClr val="F4F6FA"/>
+                    </a:solidFill>
+                  </a:tcPr>
+                </a:tc>
+                <a:tc>
+                  <a:txBody>
+                    <a:bodyPr wrap="square"/>
+                    <a:lstStyle/>
+                    <a:p>
+                      <a:r>
+                        <a:rPr sz="1100" b="0">
+                          <a:solidFill>
+                            <a:srgbClr val="1A1A1A"/>
+                          </a:solidFill>
+                          <a:latin typeface="Arial"/>
+                        </a:rPr>
+                        <a:t>− 6.400 EUR</a:t>
+                      </a:r>
+                    </a:p>
+                  </a:txBody>
+                  <a:tcPr>
+                    <a:solidFill>
+                      <a:srgbClr val="F4F6FA"/>
+                    </a:solidFill>
+                  </a:tcPr>
+                </a:tc>
+              </a:tr>
+              <a:tr h="475488">
+                <a:tc>
+                  <a:txBody>
+                    <a:bodyPr wrap="square"/>
+                    <a:lstStyle/>
+                    <a:p>
+                      <a:r>
+                        <a:rPr sz="1100" b="0">
+                          <a:solidFill>
+                            <a:srgbClr val="1A1A1A"/>
+                          </a:solidFill>
+                          <a:latin typeface="Arial"/>
+                        </a:rPr>
+                        <a:t>Deckungsbeitrag I</a:t>
+                      </a:r>
+                    </a:p>
+                  </a:txBody>
+                  <a:tcPr>
+                    <a:solidFill>
+                      <a:srgbClr val="FFFFFF"/>
+                    </a:solidFill>
+                  </a:tcPr>
+                </a:tc>
+                <a:tc>
+                  <a:txBody>
+                    <a:bodyPr wrap="square"/>
+                    <a:lstStyle/>
+                    <a:p>
+                      <a:r>
+                        <a:rPr sz="1100" b="0">
+                          <a:solidFill>
+                            <a:srgbClr val="1A1A1A"/>
+                          </a:solidFill>
+                          <a:latin typeface="Arial"/>
+                        </a:rPr>
+                        <a:t>14.050 EUR</a:t>
+                      </a:r>
+                    </a:p>
+                  </a:txBody>
+                  <a:tcPr>
+                    <a:solidFill>
+                      <a:srgbClr val="FFFFFF"/>
+                    </a:solidFill>
+                  </a:tcPr>
+                </a:tc>
+              </a:tr>
+              <a:tr h="475488">
+                <a:tc>
+                  <a:txBody>
+                    <a:bodyPr wrap="square"/>
+                    <a:lstStyle/>
+                    <a:p>
+                      <a:r>
+                        <a:rPr sz="1100" b="0">
+                          <a:solidFill>
+                            <a:srgbClr val="1A1A1A"/>
+                          </a:solidFill>
+                          <a:latin typeface="Arial"/>
+                        </a:rPr>
+                        <a:t>./. Betriebskosten (12 Std. × 120 EUR/Std.*)</a:t>
+                      </a:r>
+                    </a:p>
+                  </a:txBody>
+                  <a:tcPr>
+                    <a:solidFill>
+                      <a:srgbClr val="F4F6FA"/>
+                    </a:solidFill>
+                  </a:tcPr>
+                </a:tc>
+                <a:tc>
+                  <a:txBody>
+                    <a:bodyPr wrap="square"/>
+                    <a:lstStyle/>
+                    <a:p>
+                      <a:r>
+                        <a:rPr sz="1100" b="0">
+                          <a:solidFill>
+                            <a:srgbClr val="1A1A1A"/>
+                          </a:solidFill>
+                          <a:latin typeface="Arial"/>
+                        </a:rPr>
+                        <a:t>− 1.440 EUR</a:t>
+                      </a:r>
+                    </a:p>
+                  </a:txBody>
+                  <a:tcPr>
+                    <a:solidFill>
+                      <a:srgbClr val="F4F6FA"/>
+                    </a:solidFill>
+                  </a:tcPr>
+                </a:tc>
+              </a:tr>
+              <a:tr h="475488">
+                <a:tc>
+                  <a:txBody>
+                    <a:bodyPr wrap="square"/>
+                    <a:lstStyle/>
+                    <a:p>
+                      <a:r>
+                        <a:rPr sz="1100" b="0">
+                          <a:solidFill>
+                            <a:srgbClr val="1A1A1A"/>
+                          </a:solidFill>
+                          <a:latin typeface="Arial"/>
+                        </a:rPr>
+                        <a:t>Deckungsbeitrag II</a:t>
+                      </a:r>
+                    </a:p>
+                  </a:txBody>
+                  <a:tcPr>
+                    <a:solidFill>
+                      <a:srgbClr val="FFFFFF"/>
+                    </a:solidFill>
+                  </a:tcPr>
+                </a:tc>
+                <a:tc>
+                  <a:txBody>
+                    <a:bodyPr wrap="square"/>
+                    <a:lstStyle/>
+                    <a:p>
+                      <a:r>
+                        <a:rPr sz="1100" b="0">
+                          <a:solidFill>
+                            <a:srgbClr val="1A1A1A"/>
+                          </a:solidFill>
+                          <a:latin typeface="Arial"/>
+                        </a:rPr>
+                        <a:t>12.610 EUR</a:t>
+                      </a:r>
+                    </a:p>
+                  </a:txBody>
+                  <a:tcPr>
+                    <a:solidFill>
+                      <a:srgbClr val="FFFFFF"/>
+                    </a:solidFill>
+                  </a:tcPr>
+                </a:tc>
+              </a:tr>
+            </a:tbl>
+          </a:graphicData>
+        </a:graphic>
+      </p:graphicFrame>
     </p:spTree>
   </p:cSld>
   <p:clrMapOvr>
@@ -5282,8 +9884,8 @@
         </p:nvSpPr>
         <p:spPr>
           <a:xfrm>
-            <a:off x="365760" y="2286000"/>
-            <a:ext cx="11430000" cy="1828800"/>
+            <a:off x="365760" y="2011680"/>
+            <a:ext cx="11430000" cy="2011680"/>
           </a:xfrm>
           <a:prstGeom prst="rect">
             <a:avLst/>
@@ -5298,13 +9900,13 @@
           <a:p>
             <a:pPr algn="l"/>
             <a:r>
-              <a:rPr sz="3600" b="1">
+              <a:rPr sz="3600" b="1" i="0">
                 <a:solidFill>
                   <a:srgbClr val="FFFFFF"/>
                 </a:solidFill>
                 <a:latin typeface="Arial"/>
               </a:rPr>
-              <a:t>Kundensegmentierung nach Ertragsprofil</a:t>
+              <a:t>Der Expected Loss als Kalkulationsgrundlage</a:t>
             </a:r>
           </a:p>
         </p:txBody>

--- a/public/downloads/praesentation/M14.pptx
+++ b/public/downloads/praesentation/M14.pptx
@@ -4166,7 +4166,7 @@
     <p:bg>
       <p:bgPr>
         <a:solidFill>
-          <a:srgbClr val="191D2E"/>
+          <a:srgbClr val="1F2B56"/>
         </a:solidFill>
         <a:effectLst/>
       </p:bgPr>
@@ -4674,7 +4674,7 @@
                   </a:txBody>
                   <a:tcPr>
                     <a:solidFill>
-                      <a:srgbClr val="191D2E"/>
+                      <a:srgbClr val="1F2B56"/>
                     </a:solidFill>
                   </a:tcPr>
                 </a:tc>
@@ -4696,7 +4696,7 @@
                   </a:txBody>
                   <a:tcPr>
                     <a:solidFill>
-                      <a:srgbClr val="191D2E"/>
+                      <a:srgbClr val="1F2B56"/>
                     </a:solidFill>
                   </a:tcPr>
                 </a:tc>
@@ -4718,7 +4718,7 @@
                   </a:txBody>
                   <a:tcPr>
                     <a:solidFill>
-                      <a:srgbClr val="191D2E"/>
+                      <a:srgbClr val="1F2B56"/>
                     </a:solidFill>
                   </a:tcPr>
                 </a:tc>
@@ -5581,7 +5581,7 @@
     <p:bg>
       <p:bgPr>
         <a:solidFill>
-          <a:srgbClr val="191D2E"/>
+          <a:srgbClr val="1F2B56"/>
         </a:solidFill>
         <a:effectLst/>
       </p:bgPr>
@@ -6747,7 +6747,7 @@
     <p:bg>
       <p:bgPr>
         <a:solidFill>
-          <a:srgbClr val="191D2E"/>
+          <a:srgbClr val="1F2B56"/>
         </a:solidFill>
         <a:effectLst/>
       </p:bgPr>
@@ -6948,7 +6948,7 @@
     <p:bg>
       <p:bgPr>
         <a:solidFill>
-          <a:srgbClr val="191D2E"/>
+          <a:srgbClr val="1F2B56"/>
         </a:solidFill>
         <a:effectLst/>
       </p:bgPr>
@@ -7455,7 +7455,7 @@
                   </a:txBody>
                   <a:tcPr>
                     <a:solidFill>
-                      <a:srgbClr val="191D2E"/>
+                      <a:srgbClr val="1F2B56"/>
                     </a:solidFill>
                   </a:tcPr>
                 </a:tc>
@@ -7477,7 +7477,7 @@
                   </a:txBody>
                   <a:tcPr>
                     <a:solidFill>
-                      <a:srgbClr val="191D2E"/>
+                      <a:srgbClr val="1F2B56"/>
                     </a:solidFill>
                   </a:tcPr>
                 </a:tc>
@@ -9136,29 +9136,29 @@
         </p:nvSpPr>
         <p:spPr>
           <a:xfrm>
-            <a:off x="4064000" y="927100"/>
-            <a:ext cx="508000" cy="647700"/>
-          </a:xfrm>
-          <a:prstGeom prst="rect">
-            <a:avLst/>
-          </a:prstGeom>
-          <a:noFill/>
-        </p:spPr>
-        <p:txBody>
-          <a:bodyPr wrap="square">
+            <a:off x="4064000" y="939799"/>
+            <a:ext cx="762000" cy="647700"/>
+          </a:xfrm>
+          <a:prstGeom prst="rect">
+            <a:avLst/>
+          </a:prstGeom>
+          <a:noFill/>
+        </p:spPr>
+        <p:txBody>
+          <a:bodyPr wrap="none">
             <a:normAutofit/>
           </a:bodyPr>
           <a:lstStyle/>
           <a:p>
             <a:pPr algn="l"/>
             <a:r>
-              <a:rPr sz="2600" b="0" i="1">
+              <a:rPr sz="2400" b="0" i="1">
                 <a:solidFill>
                   <a:srgbClr val="1F2B56"/>
                 </a:solidFill>
                 <a:latin typeface="Georgia"/>
               </a:rPr>
-              <a:t>I.</a:t>
+              <a:t>I</a:t>
             </a:r>
           </a:p>
         </p:txBody>
@@ -9171,8 +9171,8 @@
         </p:nvSpPr>
         <p:spPr>
           <a:xfrm>
-            <a:off x="4699000" y="952500"/>
-            <a:ext cx="6858000" cy="622300"/>
+            <a:off x="4953000" y="952500"/>
+            <a:ext cx="6629400" cy="635000"/>
           </a:xfrm>
           <a:prstGeom prst="rect">
             <a:avLst/>
@@ -9206,7 +9206,7 @@
         </p:nvSpPr>
         <p:spPr>
           <a:xfrm>
-            <a:off x="4064000" y="1574800"/>
+            <a:off x="4064000" y="1587500"/>
             <a:ext cx="7518399" cy="6350"/>
           </a:xfrm>
           <a:prstGeom prst="rect">
@@ -9249,29 +9249,29 @@
         </p:nvSpPr>
         <p:spPr>
           <a:xfrm>
-            <a:off x="4064000" y="1612900"/>
-            <a:ext cx="508000" cy="647700"/>
-          </a:xfrm>
-          <a:prstGeom prst="rect">
-            <a:avLst/>
-          </a:prstGeom>
-          <a:noFill/>
-        </p:spPr>
-        <p:txBody>
-          <a:bodyPr wrap="square">
+            <a:off x="4064000" y="1638300"/>
+            <a:ext cx="762000" cy="647700"/>
+          </a:xfrm>
+          <a:prstGeom prst="rect">
+            <a:avLst/>
+          </a:prstGeom>
+          <a:noFill/>
+        </p:spPr>
+        <p:txBody>
+          <a:bodyPr wrap="none">
             <a:normAutofit/>
           </a:bodyPr>
           <a:lstStyle/>
           <a:p>
             <a:pPr algn="l"/>
             <a:r>
-              <a:rPr sz="2600" b="0" i="1">
+              <a:rPr sz="2400" b="0" i="1">
                 <a:solidFill>
                   <a:srgbClr val="1F2B56"/>
                 </a:solidFill>
                 <a:latin typeface="Georgia"/>
               </a:rPr>
-              <a:t>II.</a:t>
+              <a:t>II</a:t>
             </a:r>
           </a:p>
         </p:txBody>
@@ -9284,8 +9284,8 @@
         </p:nvSpPr>
         <p:spPr>
           <a:xfrm>
-            <a:off x="4699000" y="1638300"/>
-            <a:ext cx="6858000" cy="622300"/>
+            <a:off x="4953000" y="1651000"/>
+            <a:ext cx="6629400" cy="635000"/>
           </a:xfrm>
           <a:prstGeom prst="rect">
             <a:avLst/>
@@ -9319,7 +9319,7 @@
         </p:nvSpPr>
         <p:spPr>
           <a:xfrm>
-            <a:off x="4064000" y="2260600"/>
+            <a:off x="4064000" y="2286000"/>
             <a:ext cx="7518399" cy="6350"/>
           </a:xfrm>
           <a:prstGeom prst="rect">
@@ -9362,29 +9362,29 @@
         </p:nvSpPr>
         <p:spPr>
           <a:xfrm>
-            <a:off x="4064000" y="2298700"/>
-            <a:ext cx="508000" cy="647700"/>
-          </a:xfrm>
-          <a:prstGeom prst="rect">
-            <a:avLst/>
-          </a:prstGeom>
-          <a:noFill/>
-        </p:spPr>
-        <p:txBody>
-          <a:bodyPr wrap="square">
+            <a:off x="4064000" y="2336800"/>
+            <a:ext cx="762000" cy="647700"/>
+          </a:xfrm>
+          <a:prstGeom prst="rect">
+            <a:avLst/>
+          </a:prstGeom>
+          <a:noFill/>
+        </p:spPr>
+        <p:txBody>
+          <a:bodyPr wrap="none">
             <a:normAutofit/>
           </a:bodyPr>
           <a:lstStyle/>
           <a:p>
             <a:pPr algn="l"/>
             <a:r>
-              <a:rPr sz="2600" b="0" i="1">
+              <a:rPr sz="2400" b="0" i="1">
                 <a:solidFill>
                   <a:srgbClr val="1F2B56"/>
                 </a:solidFill>
                 <a:latin typeface="Georgia"/>
               </a:rPr>
-              <a:t>III.</a:t>
+              <a:t>III</a:t>
             </a:r>
           </a:p>
         </p:txBody>
@@ -9397,8 +9397,8 @@
         </p:nvSpPr>
         <p:spPr>
           <a:xfrm>
-            <a:off x="4699000" y="2324100"/>
-            <a:ext cx="6858000" cy="622300"/>
+            <a:off x="4953000" y="2349500"/>
+            <a:ext cx="6629400" cy="635000"/>
           </a:xfrm>
           <a:prstGeom prst="rect">
             <a:avLst/>
@@ -9432,7 +9432,7 @@
         </p:nvSpPr>
         <p:spPr>
           <a:xfrm>
-            <a:off x="4064000" y="2946400"/>
+            <a:off x="4064000" y="2984500"/>
             <a:ext cx="7518399" cy="6350"/>
           </a:xfrm>
           <a:prstGeom prst="rect">
@@ -9475,29 +9475,29 @@
         </p:nvSpPr>
         <p:spPr>
           <a:xfrm>
-            <a:off x="4064000" y="2984500"/>
-            <a:ext cx="508000" cy="647700"/>
-          </a:xfrm>
-          <a:prstGeom prst="rect">
-            <a:avLst/>
-          </a:prstGeom>
-          <a:noFill/>
-        </p:spPr>
-        <p:txBody>
-          <a:bodyPr wrap="square">
+            <a:off x="4064000" y="3035300"/>
+            <a:ext cx="762000" cy="647700"/>
+          </a:xfrm>
+          <a:prstGeom prst="rect">
+            <a:avLst/>
+          </a:prstGeom>
+          <a:noFill/>
+        </p:spPr>
+        <p:txBody>
+          <a:bodyPr wrap="none">
             <a:normAutofit/>
           </a:bodyPr>
           <a:lstStyle/>
           <a:p>
             <a:pPr algn="l"/>
             <a:r>
-              <a:rPr sz="2600" b="0" i="1">
+              <a:rPr sz="2400" b="0" i="1">
                 <a:solidFill>
                   <a:srgbClr val="1F2B56"/>
                 </a:solidFill>
                 <a:latin typeface="Georgia"/>
               </a:rPr>
-              <a:t>IV.</a:t>
+              <a:t>IV</a:t>
             </a:r>
           </a:p>
         </p:txBody>
@@ -9510,8 +9510,8 @@
         </p:nvSpPr>
         <p:spPr>
           <a:xfrm>
-            <a:off x="4699000" y="3009900"/>
-            <a:ext cx="6858000" cy="622300"/>
+            <a:off x="4953000" y="3048000"/>
+            <a:ext cx="6629400" cy="635000"/>
           </a:xfrm>
           <a:prstGeom prst="rect">
             <a:avLst/>
@@ -9545,7 +9545,7 @@
         </p:nvSpPr>
         <p:spPr>
           <a:xfrm>
-            <a:off x="4064000" y="3632200"/>
+            <a:off x="4064000" y="3683000"/>
             <a:ext cx="7518399" cy="6350"/>
           </a:xfrm>
           <a:prstGeom prst="rect">
@@ -9588,29 +9588,29 @@
         </p:nvSpPr>
         <p:spPr>
           <a:xfrm>
-            <a:off x="4064000" y="3670300"/>
-            <a:ext cx="508000" cy="647700"/>
-          </a:xfrm>
-          <a:prstGeom prst="rect">
-            <a:avLst/>
-          </a:prstGeom>
-          <a:noFill/>
-        </p:spPr>
-        <p:txBody>
-          <a:bodyPr wrap="square">
+            <a:off x="4064000" y="3733799"/>
+            <a:ext cx="762000" cy="647700"/>
+          </a:xfrm>
+          <a:prstGeom prst="rect">
+            <a:avLst/>
+          </a:prstGeom>
+          <a:noFill/>
+        </p:spPr>
+        <p:txBody>
+          <a:bodyPr wrap="none">
             <a:normAutofit/>
           </a:bodyPr>
           <a:lstStyle/>
           <a:p>
             <a:pPr algn="l"/>
             <a:r>
-              <a:rPr sz="2600" b="0" i="1">
+              <a:rPr sz="2400" b="0" i="1">
                 <a:solidFill>
                   <a:srgbClr val="1F2B56"/>
                 </a:solidFill>
                 <a:latin typeface="Georgia"/>
               </a:rPr>
-              <a:t>V.</a:t>
+              <a:t>V</a:t>
             </a:r>
           </a:p>
         </p:txBody>
@@ -9623,8 +9623,8 @@
         </p:nvSpPr>
         <p:spPr>
           <a:xfrm>
-            <a:off x="4699000" y="3695700"/>
-            <a:ext cx="6858000" cy="622300"/>
+            <a:off x="4953000" y="3746500"/>
+            <a:ext cx="6629400" cy="635000"/>
           </a:xfrm>
           <a:prstGeom prst="rect">
             <a:avLst/>
@@ -9664,7 +9664,7 @@
     <p:bg>
       <p:bgPr>
         <a:solidFill>
-          <a:srgbClr val="191D2E"/>
+          <a:srgbClr val="1F2B56"/>
         </a:solidFill>
         <a:effectLst/>
       </p:bgPr>
@@ -9865,7 +9865,7 @@
     <p:bg>
       <p:bgPr>
         <a:solidFill>
-          <a:srgbClr val="191D2E"/>
+          <a:srgbClr val="1F2B56"/>
         </a:solidFill>
         <a:effectLst/>
       </p:bgPr>
@@ -10066,7 +10066,7 @@
     <p:bg>
       <p:bgPr>
         <a:solidFill>
-          <a:srgbClr val="191D2E"/>
+          <a:srgbClr val="1F2B56"/>
         </a:solidFill>
         <a:effectLst/>
       </p:bgPr>
@@ -11371,7 +11371,7 @@
     <p:bg>
       <p:bgPr>
         <a:solidFill>
-          <a:srgbClr val="191D2E"/>
+          <a:srgbClr val="1F2B56"/>
         </a:solidFill>
         <a:effectLst/>
       </p:bgPr>
@@ -11572,7 +11572,7 @@
     <p:bg>
       <p:bgPr>
         <a:solidFill>
-          <a:srgbClr val="191D2E"/>
+          <a:srgbClr val="1F2B56"/>
         </a:solidFill>
         <a:effectLst/>
       </p:bgPr>
@@ -11773,7 +11773,7 @@
     <p:bg>
       <p:bgPr>
         <a:solidFill>
-          <a:srgbClr val="191D2E"/>
+          <a:srgbClr val="1F2B56"/>
         </a:solidFill>
         <a:effectLst/>
       </p:bgPr>
@@ -11974,7 +11974,7 @@
     <p:bg>
       <p:bgPr>
         <a:solidFill>
-          <a:srgbClr val="191D2E"/>
+          <a:srgbClr val="1F2B56"/>
         </a:solidFill>
         <a:effectLst/>
       </p:bgPr>
@@ -12175,7 +12175,7 @@
     <p:bg>
       <p:bgPr>
         <a:solidFill>
-          <a:srgbClr val="191D2E"/>
+          <a:srgbClr val="1F2B56"/>
         </a:solidFill>
         <a:effectLst/>
       </p:bgPr>
@@ -12376,7 +12376,7 @@
     <p:bg>
       <p:bgPr>
         <a:solidFill>
-          <a:srgbClr val="191D2E"/>
+          <a:srgbClr val="1F2B56"/>
         </a:solidFill>
         <a:effectLst/>
       </p:bgPr>
@@ -13712,7 +13712,7 @@
                   </a:txBody>
                   <a:tcPr>
                     <a:solidFill>
-                      <a:srgbClr val="191D2E"/>
+                      <a:srgbClr val="1F2B56"/>
                     </a:solidFill>
                   </a:tcPr>
                 </a:tc>
@@ -13734,7 +13734,7 @@
                   </a:txBody>
                   <a:tcPr>
                     <a:solidFill>
-                      <a:srgbClr val="191D2E"/>
+                      <a:srgbClr val="1F2B56"/>
                     </a:solidFill>
                   </a:tcPr>
                 </a:tc>
@@ -13756,7 +13756,7 @@
                   </a:txBody>
                   <a:tcPr>
                     <a:solidFill>
-                      <a:srgbClr val="191D2E"/>
+                      <a:srgbClr val="1F2B56"/>
                     </a:solidFill>
                   </a:tcPr>
                 </a:tc>
@@ -14390,7 +14390,7 @@
                   </a:txBody>
                   <a:tcPr>
                     <a:solidFill>
-                      <a:srgbClr val="191D2E"/>
+                      <a:srgbClr val="1F2B56"/>
                     </a:solidFill>
                   </a:tcPr>
                 </a:tc>
@@ -14412,7 +14412,7 @@
                   </a:txBody>
                   <a:tcPr>
                     <a:solidFill>
-                      <a:srgbClr val="191D2E"/>
+                      <a:srgbClr val="1F2B56"/>
                     </a:solidFill>
                   </a:tcPr>
                 </a:tc>
@@ -14849,7 +14849,7 @@
     <p:bg>
       <p:bgPr>
         <a:solidFill>
-          <a:srgbClr val="191D2E"/>
+          <a:srgbClr val="1F2B56"/>
         </a:solidFill>
         <a:effectLst/>
       </p:bgPr>
@@ -15357,7 +15357,7 @@
                   </a:txBody>
                   <a:tcPr>
                     <a:solidFill>
-                      <a:srgbClr val="191D2E"/>
+                      <a:srgbClr val="1F2B56"/>
                     </a:solidFill>
                   </a:tcPr>
                 </a:tc>
@@ -15379,7 +15379,7 @@
                   </a:txBody>
                   <a:tcPr>
                     <a:solidFill>
-                      <a:srgbClr val="191D2E"/>
+                      <a:srgbClr val="1F2B56"/>
                     </a:solidFill>
                   </a:tcPr>
                 </a:tc>
@@ -15401,7 +15401,7 @@
                   </a:txBody>
                   <a:tcPr>
                     <a:solidFill>
-                      <a:srgbClr val="191D2E"/>
+                      <a:srgbClr val="1F2B56"/>
                     </a:solidFill>
                   </a:tcPr>
                 </a:tc>

--- a/public/downloads/praesentation/M14.pptx
+++ b/public/downloads/praesentation/M14.pptx
@@ -3259,7 +3259,42 @@
       </p:sp>
       <p:sp>
         <p:nvSpPr>
-          <p:cNvPr id="6" name="Rectangle 5"/>
+          <p:cNvPr id="6" name="TextBox 5"/>
+          <p:cNvSpPr txBox="1"/>
+          <p:nvPr/>
+        </p:nvSpPr>
+        <p:spPr>
+          <a:xfrm>
+            <a:off x="685800" y="3977639"/>
+            <a:ext cx="10817352" cy="731520"/>
+          </a:xfrm>
+          <a:prstGeom prst="rect">
+            <a:avLst/>
+          </a:prstGeom>
+          <a:noFill/>
+        </p:spPr>
+        <p:txBody>
+          <a:bodyPr wrap="square">
+            <a:spAutoFit/>
+          </a:bodyPr>
+          <a:lstStyle/>
+          <a:p>
+            <a:pPr algn="l"/>
+            <a:r>
+              <a:rPr sz="1900" b="0" i="1">
+                <a:solidFill>
+                  <a:srgbClr val="BECDE6"/>
+                </a:solidFill>
+                <a:latin typeface="Source Serif 4"/>
+              </a:rPr>
+              <a:t>Kundendeckungsbeitrag analysieren, risikogerechtes Pricing verstehen und Konditionengespräche wertbasiert führen</a:t>
+            </a:r>
+          </a:p>
+        </p:txBody>
+      </p:sp>
+      <p:sp>
+        <p:nvSpPr>
+          <p:cNvPr id="7" name="Rectangle 6"/>
           <p:cNvSpPr/>
           <p:nvPr/>
         </p:nvSpPr>
@@ -3302,14 +3337,14 @@
       </p:sp>
       <p:sp>
         <p:nvSpPr>
-          <p:cNvPr id="7" name="TextBox 6"/>
+          <p:cNvPr id="8" name="TextBox 7"/>
           <p:cNvSpPr txBox="1"/>
           <p:nvPr/>
         </p:nvSpPr>
         <p:spPr>
           <a:xfrm>
             <a:off x="685800" y="5193792"/>
-            <a:ext cx="5408676" cy="201168"/>
+            <a:ext cx="3605784" cy="201168"/>
           </a:xfrm>
           <a:prstGeom prst="rect">
             <a:avLst/>
@@ -3330,21 +3365,21 @@
                 </a:solidFill>
                 <a:latin typeface="JetBrains Mono"/>
               </a:rPr>
-              <a:t>KOMPETENZSTUFE</a:t>
-            </a:r>
-          </a:p>
-        </p:txBody>
-      </p:sp>
-      <p:sp>
-        <p:nvSpPr>
-          <p:cNvPr id="8" name="TextBox 7"/>
+              <a:t>KOMPETENZFELD</a:t>
+            </a:r>
+          </a:p>
+        </p:txBody>
+      </p:sp>
+      <p:sp>
+        <p:nvSpPr>
+          <p:cNvPr id="9" name="TextBox 8"/>
           <p:cNvSpPr txBox="1"/>
           <p:nvPr/>
         </p:nvSpPr>
         <p:spPr>
           <a:xfrm>
             <a:off x="685800" y="5394960"/>
-            <a:ext cx="5408676" cy="320040"/>
+            <a:ext cx="3605784" cy="320040"/>
           </a:xfrm>
           <a:prstGeom prst="rect">
             <a:avLst/>
@@ -3365,21 +3400,21 @@
                 </a:solidFill>
                 <a:latin typeface="Arial"/>
               </a:rPr>
-              <a:t>Sparring</a:t>
-            </a:r>
-          </a:p>
-        </p:txBody>
-      </p:sp>
-      <p:sp>
-        <p:nvSpPr>
-          <p:cNvPr id="9" name="TextBox 8"/>
+              <a:t>K-04 Vertrieb &amp; Ertragsoptimierung</a:t>
+            </a:r>
+          </a:p>
+        </p:txBody>
+      </p:sp>
+      <p:sp>
+        <p:nvSpPr>
+          <p:cNvPr id="10" name="TextBox 9"/>
           <p:cNvSpPr txBox="1"/>
           <p:nvPr/>
         </p:nvSpPr>
         <p:spPr>
           <a:xfrm>
-            <a:off x="6094476" y="5193792"/>
-            <a:ext cx="5408676" cy="201168"/>
+            <a:off x="4291584" y="5193792"/>
+            <a:ext cx="3605784" cy="201168"/>
           </a:xfrm>
           <a:prstGeom prst="rect">
             <a:avLst/>
@@ -3400,21 +3435,21 @@
                 </a:solidFill>
                 <a:latin typeface="JetBrains Mono"/>
               </a:rPr>
-              <a:t>VERSION</a:t>
-            </a:r>
-          </a:p>
-        </p:txBody>
-      </p:sp>
-      <p:sp>
-        <p:nvSpPr>
-          <p:cNvPr id="10" name="TextBox 9"/>
+              <a:t>KOMPETENZSTUFE</a:t>
+            </a:r>
+          </a:p>
+        </p:txBody>
+      </p:sp>
+      <p:sp>
+        <p:nvSpPr>
+          <p:cNvPr id="11" name="TextBox 10"/>
           <p:cNvSpPr txBox="1"/>
           <p:nvPr/>
         </p:nvSpPr>
         <p:spPr>
           <a:xfrm>
-            <a:off x="6094476" y="5394960"/>
-            <a:ext cx="5408676" cy="320040"/>
+            <a:off x="4291584" y="5394960"/>
+            <a:ext cx="3605784" cy="320040"/>
           </a:xfrm>
           <a:prstGeom prst="rect">
             <a:avLst/>
@@ -3435,6 +3470,76 @@
                 </a:solidFill>
                 <a:latin typeface="Arial"/>
               </a:rPr>
+              <a:t>Sparring</a:t>
+            </a:r>
+          </a:p>
+        </p:txBody>
+      </p:sp>
+      <p:sp>
+        <p:nvSpPr>
+          <p:cNvPr id="12" name="TextBox 11"/>
+          <p:cNvSpPr txBox="1"/>
+          <p:nvPr/>
+        </p:nvSpPr>
+        <p:spPr>
+          <a:xfrm>
+            <a:off x="7897368" y="5193792"/>
+            <a:ext cx="3605784" cy="201168"/>
+          </a:xfrm>
+          <a:prstGeom prst="rect">
+            <a:avLst/>
+          </a:prstGeom>
+          <a:noFill/>
+        </p:spPr>
+        <p:txBody>
+          <a:bodyPr wrap="none">
+            <a:spAutoFit/>
+          </a:bodyPr>
+          <a:lstStyle/>
+          <a:p>
+            <a:pPr algn="l"/>
+            <a:r>
+              <a:rPr sz="700">
+                <a:solidFill>
+                  <a:srgbClr val="A0B4D2"/>
+                </a:solidFill>
+                <a:latin typeface="JetBrains Mono"/>
+              </a:rPr>
+              <a:t>VERSION</a:t>
+            </a:r>
+          </a:p>
+        </p:txBody>
+      </p:sp>
+      <p:sp>
+        <p:nvSpPr>
+          <p:cNvPr id="13" name="TextBox 12"/>
+          <p:cNvSpPr txBox="1"/>
+          <p:nvPr/>
+        </p:nvSpPr>
+        <p:spPr>
+          <a:xfrm>
+            <a:off x="7897368" y="5394960"/>
+            <a:ext cx="3605784" cy="320040"/>
+          </a:xfrm>
+          <a:prstGeom prst="rect">
+            <a:avLst/>
+          </a:prstGeom>
+          <a:noFill/>
+        </p:spPr>
+        <p:txBody>
+          <a:bodyPr wrap="square">
+            <a:spAutoFit/>
+          </a:bodyPr>
+          <a:lstStyle/>
+          <a:p>
+            <a:pPr algn="l"/>
+            <a:r>
+              <a:rPr sz="1100" b="0" i="0">
+                <a:solidFill>
+                  <a:srgbClr val="FFFFFF"/>
+                </a:solidFill>
+                <a:latin typeface="Arial"/>
+              </a:rPr>
               <a:t>v0.3</a:t>
             </a:r>
           </a:p>
@@ -3442,7 +3547,7 @@
       </p:sp>
       <p:sp>
         <p:nvSpPr>
-          <p:cNvPr id="11" name="Rectangle 10"/>
+          <p:cNvPr id="14" name="Rectangle 13"/>
           <p:cNvSpPr/>
           <p:nvPr/>
         </p:nvSpPr>
@@ -3485,7 +3590,7 @@
       </p:sp>
       <p:sp>
         <p:nvSpPr>
-          <p:cNvPr id="12" name="TextBox 11"/>
+          <p:cNvPr id="15" name="TextBox 14"/>
           <p:cNvSpPr txBox="1"/>
           <p:nvPr/>
         </p:nvSpPr>
@@ -3520,7 +3625,7 @@
       </p:sp>
       <p:sp>
         <p:nvSpPr>
-          <p:cNvPr id="13" name="TextBox 12"/>
+          <p:cNvPr id="16" name="TextBox 15"/>
           <p:cNvSpPr txBox="1"/>
           <p:nvPr/>
         </p:nvSpPr>
